--- a/results/pres.pptx
+++ b/results/pres.pptx
@@ -20,6 +20,7 @@
     <p:sldId id="275" r:id="rId14"/>
     <p:sldId id="271" r:id="rId15"/>
     <p:sldId id="272" r:id="rId16"/>
+    <p:sldId id="276" r:id="rId17"/>
   </p:sldIdLst>
   <p:sldSz cx="12192000" cy="6858000"/>
   <p:notesSz cx="6858000" cy="9144000"/>
@@ -4039,6 +4040,95 @@
 </p:sld>
 </file>
 
+<file path=ppt/slides/slide16.xml><?xml version="1.0" encoding="utf-8"?>
+<p:sld xmlns:a="http://schemas.openxmlformats.org/drawingml/2006/main" xmlns:r="http://schemas.openxmlformats.org/officeDocument/2006/relationships" xmlns:p="http://schemas.openxmlformats.org/presentationml/2006/main">
+  <p:cSld>
+    <p:spTree>
+      <p:nvGrpSpPr>
+        <p:cNvPr id="1" name=""/>
+        <p:cNvGrpSpPr/>
+        <p:nvPr/>
+      </p:nvGrpSpPr>
+      <p:grpSpPr>
+        <a:xfrm>
+          <a:off x="0" y="0"/>
+          <a:ext cx="0" cy="0"/>
+          <a:chOff x="0" y="0"/>
+          <a:chExt cx="0" cy="0"/>
+        </a:xfrm>
+      </p:grpSpPr>
+      <p:sp>
+        <p:nvSpPr>
+          <p:cNvPr id="2" name="Title 1">
+            <a:extLst>
+              <a:ext uri="{FF2B5EF4-FFF2-40B4-BE49-F238E27FC236}">
+                <a16:creationId xmlns:a16="http://schemas.microsoft.com/office/drawing/2014/main" id="{E462399C-D3D2-1C76-C99D-DE975D803ECC}"/>
+              </a:ext>
+            </a:extLst>
+          </p:cNvPr>
+          <p:cNvSpPr>
+            <a:spLocks noGrp="1"/>
+          </p:cNvSpPr>
+          <p:nvPr>
+            <p:ph type="title"/>
+          </p:nvPr>
+        </p:nvSpPr>
+        <p:spPr/>
+        <p:txBody>
+          <a:bodyPr/>
+          <a:lstStyle/>
+          <a:p>
+            <a:r>
+              <a:rPr lang="ru-RU" dirty="0"/>
+              <a:t>Общие графики</a:t>
+            </a:r>
+            <a:endParaRPr lang="en-US" dirty="0"/>
+          </a:p>
+        </p:txBody>
+      </p:sp>
+      <p:pic>
+        <p:nvPicPr>
+          <p:cNvPr id="4" name="Picture 3">
+            <a:extLst>
+              <a:ext uri="{FF2B5EF4-FFF2-40B4-BE49-F238E27FC236}">
+                <a16:creationId xmlns:a16="http://schemas.microsoft.com/office/drawing/2014/main" id="{248234BF-D57F-D595-6233-0320370AF913}"/>
+              </a:ext>
+            </a:extLst>
+          </p:cNvPr>
+          <p:cNvPicPr>
+            <a:picLocks noChangeAspect="1"/>
+          </p:cNvPicPr>
+          <p:nvPr/>
+        </p:nvPicPr>
+        <p:blipFill>
+          <a:blip r:embed="rId2"/>
+          <a:stretch>
+            <a:fillRect/>
+          </a:stretch>
+        </p:blipFill>
+        <p:spPr>
+          <a:xfrm>
+            <a:off x="1134643" y="1373559"/>
+            <a:ext cx="9922714" cy="5119316"/>
+          </a:xfrm>
+          <a:prstGeom prst="rect">
+            <a:avLst/>
+          </a:prstGeom>
+        </p:spPr>
+      </p:pic>
+    </p:spTree>
+    <p:extLst>
+      <p:ext uri="{BB962C8B-B14F-4D97-AF65-F5344CB8AC3E}">
+        <p14:creationId xmlns:p14="http://schemas.microsoft.com/office/powerpoint/2010/main" val="801357139"/>
+      </p:ext>
+    </p:extLst>
+  </p:cSld>
+  <p:clrMapOvr>
+    <a:masterClrMapping/>
+  </p:clrMapOvr>
+</p:sld>
+</file>
+
 <file path=ppt/slides/slide2.xml><?xml version="1.0" encoding="utf-8"?>
 <p:sld xmlns:a="http://schemas.openxmlformats.org/drawingml/2006/main" xmlns:r="http://schemas.openxmlformats.org/officeDocument/2006/relationships" xmlns:p="http://schemas.openxmlformats.org/presentationml/2006/main">
   <p:cSld>

--- a/results/pres.pptx
+++ b/results/pres.pptx
@@ -13,14 +13,16 @@
     <p:sldId id="264" r:id="rId7"/>
     <p:sldId id="262" r:id="rId8"/>
     <p:sldId id="265" r:id="rId9"/>
-    <p:sldId id="266" r:id="rId10"/>
-    <p:sldId id="267" r:id="rId11"/>
-    <p:sldId id="268" r:id="rId12"/>
-    <p:sldId id="269" r:id="rId13"/>
-    <p:sldId id="275" r:id="rId14"/>
-    <p:sldId id="271" r:id="rId15"/>
-    <p:sldId id="272" r:id="rId16"/>
-    <p:sldId id="276" r:id="rId17"/>
+    <p:sldId id="278" r:id="rId10"/>
+    <p:sldId id="277" r:id="rId11"/>
+    <p:sldId id="266" r:id="rId12"/>
+    <p:sldId id="267" r:id="rId13"/>
+    <p:sldId id="268" r:id="rId14"/>
+    <p:sldId id="269" r:id="rId15"/>
+    <p:sldId id="275" r:id="rId16"/>
+    <p:sldId id="271" r:id="rId17"/>
+    <p:sldId id="272" r:id="rId18"/>
+    <p:sldId id="276" r:id="rId19"/>
   </p:sldIdLst>
   <p:sldSz cx="12192000" cy="6858000"/>
   <p:notesSz cx="6858000" cy="9144000"/>
@@ -119,6 +121,11 @@
       </a:defRPr>
     </a:lvl9pPr>
   </p:defaultTextStyle>
+  <p:extLst>
+    <p:ext uri="{EFAFB233-063F-42B5-8137-9DF3F51BA10A}">
+      <p15:sldGuideLst xmlns:p15="http://schemas.microsoft.com/office/powerpoint/2012/main"/>
+    </p:ext>
+  </p:extLst>
 </p:presentation>
 </file>
 
@@ -269,7 +276,7 @@
           <a:p>
             <a:fld id="{954D5CCF-EDB3-1944-BB31-7ADB8F2E1A0A}" type="datetimeFigureOut">
               <a:rPr lang="en-US" smtClean="0"/>
-              <a:t>5/25/25</a:t>
+              <a:t>5/30/25</a:t>
             </a:fld>
             <a:endParaRPr lang="en-US"/>
           </a:p>
@@ -467,7 +474,7 @@
           <a:p>
             <a:fld id="{954D5CCF-EDB3-1944-BB31-7ADB8F2E1A0A}" type="datetimeFigureOut">
               <a:rPr lang="en-US" smtClean="0"/>
-              <a:t>5/25/25</a:t>
+              <a:t>5/30/25</a:t>
             </a:fld>
             <a:endParaRPr lang="en-US"/>
           </a:p>
@@ -675,7 +682,7 @@
           <a:p>
             <a:fld id="{954D5CCF-EDB3-1944-BB31-7ADB8F2E1A0A}" type="datetimeFigureOut">
               <a:rPr lang="en-US" smtClean="0"/>
-              <a:t>5/25/25</a:t>
+              <a:t>5/30/25</a:t>
             </a:fld>
             <a:endParaRPr lang="en-US"/>
           </a:p>
@@ -873,7 +880,7 @@
           <a:p>
             <a:fld id="{954D5CCF-EDB3-1944-BB31-7ADB8F2E1A0A}" type="datetimeFigureOut">
               <a:rPr lang="en-US" smtClean="0"/>
-              <a:t>5/25/25</a:t>
+              <a:t>5/30/25</a:t>
             </a:fld>
             <a:endParaRPr lang="en-US"/>
           </a:p>
@@ -1148,7 +1155,7 @@
           <a:p>
             <a:fld id="{954D5CCF-EDB3-1944-BB31-7ADB8F2E1A0A}" type="datetimeFigureOut">
               <a:rPr lang="en-US" smtClean="0"/>
-              <a:t>5/25/25</a:t>
+              <a:t>5/30/25</a:t>
             </a:fld>
             <a:endParaRPr lang="en-US"/>
           </a:p>
@@ -1413,7 +1420,7 @@
           <a:p>
             <a:fld id="{954D5CCF-EDB3-1944-BB31-7ADB8F2E1A0A}" type="datetimeFigureOut">
               <a:rPr lang="en-US" smtClean="0"/>
-              <a:t>5/25/25</a:t>
+              <a:t>5/30/25</a:t>
             </a:fld>
             <a:endParaRPr lang="en-US"/>
           </a:p>
@@ -1825,7 +1832,7 @@
           <a:p>
             <a:fld id="{954D5CCF-EDB3-1944-BB31-7ADB8F2E1A0A}" type="datetimeFigureOut">
               <a:rPr lang="en-US" smtClean="0"/>
-              <a:t>5/25/25</a:t>
+              <a:t>5/30/25</a:t>
             </a:fld>
             <a:endParaRPr lang="en-US"/>
           </a:p>
@@ -1966,7 +1973,7 @@
           <a:p>
             <a:fld id="{954D5CCF-EDB3-1944-BB31-7ADB8F2E1A0A}" type="datetimeFigureOut">
               <a:rPr lang="en-US" smtClean="0"/>
-              <a:t>5/25/25</a:t>
+              <a:t>5/30/25</a:t>
             </a:fld>
             <a:endParaRPr lang="en-US"/>
           </a:p>
@@ -2079,7 +2086,7 @@
           <a:p>
             <a:fld id="{954D5CCF-EDB3-1944-BB31-7ADB8F2E1A0A}" type="datetimeFigureOut">
               <a:rPr lang="en-US" smtClean="0"/>
-              <a:t>5/25/25</a:t>
+              <a:t>5/30/25</a:t>
             </a:fld>
             <a:endParaRPr lang="en-US"/>
           </a:p>
@@ -2390,7 +2397,7 @@
           <a:p>
             <a:fld id="{954D5CCF-EDB3-1944-BB31-7ADB8F2E1A0A}" type="datetimeFigureOut">
               <a:rPr lang="en-US" smtClean="0"/>
-              <a:t>5/25/25</a:t>
+              <a:t>5/30/25</a:t>
             </a:fld>
             <a:endParaRPr lang="en-US"/>
           </a:p>
@@ -2678,7 +2685,7 @@
           <a:p>
             <a:fld id="{954D5CCF-EDB3-1944-BB31-7ADB8F2E1A0A}" type="datetimeFigureOut">
               <a:rPr lang="en-US" smtClean="0"/>
-              <a:t>5/25/25</a:t>
+              <a:t>5/30/25</a:t>
             </a:fld>
             <a:endParaRPr lang="en-US"/>
           </a:p>
@@ -2919,7 +2926,7 @@
           <a:p>
             <a:fld id="{954D5CCF-EDB3-1944-BB31-7ADB8F2E1A0A}" type="datetimeFigureOut">
               <a:rPr lang="en-US" smtClean="0"/>
-              <a:t>5/25/25</a:t>
+              <a:t>5/30/25</a:t>
             </a:fld>
             <a:endParaRPr lang="en-US"/>
           </a:p>
@@ -3429,6 +3436,153 @@
           <p:cNvPr id="2" name="Title 1">
             <a:extLst>
               <a:ext uri="{FF2B5EF4-FFF2-40B4-BE49-F238E27FC236}">
+                <a16:creationId xmlns:a16="http://schemas.microsoft.com/office/drawing/2014/main" id="{F5ECD825-C439-7039-23E6-60350D21DEAB}"/>
+              </a:ext>
+            </a:extLst>
+          </p:cNvPr>
+          <p:cNvSpPr>
+            <a:spLocks noGrp="1"/>
+          </p:cNvSpPr>
+          <p:nvPr>
+            <p:ph type="title"/>
+          </p:nvPr>
+        </p:nvSpPr>
+        <p:spPr/>
+        <p:txBody>
+          <a:bodyPr/>
+          <a:lstStyle/>
+          <a:p>
+            <a:r>
+              <a:rPr lang="en-US" dirty="0"/>
+              <a:t>SC, graph_8</a:t>
+            </a:r>
+          </a:p>
+        </p:txBody>
+      </p:sp>
+      <p:pic>
+        <p:nvPicPr>
+          <p:cNvPr id="4" name="Picture 3">
+            <a:extLst>
+              <a:ext uri="{FF2B5EF4-FFF2-40B4-BE49-F238E27FC236}">
+                <a16:creationId xmlns:a16="http://schemas.microsoft.com/office/drawing/2014/main" id="{A3A29C8B-8522-B51D-F23A-C5AFDE628FDB}"/>
+              </a:ext>
+            </a:extLst>
+          </p:cNvPr>
+          <p:cNvPicPr>
+            <a:picLocks noChangeAspect="1"/>
+          </p:cNvPicPr>
+          <p:nvPr/>
+        </p:nvPicPr>
+        <p:blipFill>
+          <a:blip r:embed="rId2"/>
+          <a:stretch>
+            <a:fillRect/>
+          </a:stretch>
+        </p:blipFill>
+        <p:spPr>
+          <a:xfrm>
+            <a:off x="0" y="2279694"/>
+            <a:ext cx="12192000" cy="3233791"/>
+          </a:xfrm>
+          <a:prstGeom prst="rect">
+            <a:avLst/>
+          </a:prstGeom>
+        </p:spPr>
+      </p:pic>
+    </p:spTree>
+    <p:extLst>
+      <p:ext uri="{BB962C8B-B14F-4D97-AF65-F5344CB8AC3E}">
+        <p14:creationId xmlns:p14="http://schemas.microsoft.com/office/powerpoint/2010/main" val="4016728384"/>
+      </p:ext>
+    </p:extLst>
+  </p:cSld>
+  <p:clrMapOvr>
+    <a:masterClrMapping/>
+  </p:clrMapOvr>
+</p:sld>
+</file>
+
+<file path=ppt/slides/slide11.xml><?xml version="1.0" encoding="utf-8"?>
+<p:sld xmlns:a="http://schemas.openxmlformats.org/drawingml/2006/main" xmlns:r="http://schemas.openxmlformats.org/officeDocument/2006/relationships" xmlns:p="http://schemas.openxmlformats.org/presentationml/2006/main">
+  <p:cSld>
+    <p:spTree>
+      <p:nvGrpSpPr>
+        <p:cNvPr id="1" name=""/>
+        <p:cNvGrpSpPr/>
+        <p:nvPr/>
+      </p:nvGrpSpPr>
+      <p:grpSpPr>
+        <a:xfrm>
+          <a:off x="0" y="0"/>
+          <a:ext cx="0" cy="0"/>
+          <a:chOff x="0" y="0"/>
+          <a:chExt cx="0" cy="0"/>
+        </a:xfrm>
+      </p:grpSpPr>
+      <p:sp>
+        <p:nvSpPr>
+          <p:cNvPr id="2" name="Title 1">
+            <a:extLst>
+              <a:ext uri="{FF2B5EF4-FFF2-40B4-BE49-F238E27FC236}">
+                <a16:creationId xmlns:a16="http://schemas.microsoft.com/office/drawing/2014/main" id="{7E75FED4-BA3D-0044-55EA-1518683CD07B}"/>
+              </a:ext>
+            </a:extLst>
+          </p:cNvPr>
+          <p:cNvSpPr>
+            <a:spLocks noGrp="1"/>
+          </p:cNvSpPr>
+          <p:nvPr>
+            <p:ph type="title"/>
+          </p:nvPr>
+        </p:nvSpPr>
+        <p:spPr/>
+        <p:txBody>
+          <a:bodyPr/>
+          <a:lstStyle/>
+          <a:p>
+            <a:r>
+              <a:rPr lang="ru-RU" dirty="0"/>
+              <a:t>Выводы</a:t>
+            </a:r>
+            <a:endParaRPr lang="en-US" dirty="0"/>
+          </a:p>
+        </p:txBody>
+      </p:sp>
+    </p:spTree>
+    <p:extLst>
+      <p:ext uri="{BB962C8B-B14F-4D97-AF65-F5344CB8AC3E}">
+        <p14:creationId xmlns:p14="http://schemas.microsoft.com/office/powerpoint/2010/main" val="1017558136"/>
+      </p:ext>
+    </p:extLst>
+  </p:cSld>
+  <p:clrMapOvr>
+    <a:masterClrMapping/>
+  </p:clrMapOvr>
+</p:sld>
+</file>
+
+<file path=ppt/slides/slide12.xml><?xml version="1.0" encoding="utf-8"?>
+<p:sld xmlns:a="http://schemas.openxmlformats.org/drawingml/2006/main" xmlns:r="http://schemas.openxmlformats.org/officeDocument/2006/relationships" xmlns:p="http://schemas.openxmlformats.org/presentationml/2006/main">
+  <p:cSld>
+    <p:spTree>
+      <p:nvGrpSpPr>
+        <p:cNvPr id="1" name=""/>
+        <p:cNvGrpSpPr/>
+        <p:nvPr/>
+      </p:nvGrpSpPr>
+      <p:grpSpPr>
+        <a:xfrm>
+          <a:off x="0" y="0"/>
+          <a:ext cx="0" cy="0"/>
+          <a:chOff x="0" y="0"/>
+          <a:chExt cx="0" cy="0"/>
+        </a:xfrm>
+      </p:grpSpPr>
+      <p:sp>
+        <p:nvSpPr>
+          <p:cNvPr id="2" name="Title 1">
+            <a:extLst>
+              <a:ext uri="{FF2B5EF4-FFF2-40B4-BE49-F238E27FC236}">
                 <a16:creationId xmlns:a16="http://schemas.microsoft.com/office/drawing/2014/main" id="{ADBFFA0D-F416-5165-C864-9DAC1A68A858}"/>
               </a:ext>
             </a:extLst>
@@ -3509,7 +3663,7 @@
 </p:sld>
 </file>
 
-<file path=ppt/slides/slide11.xml><?xml version="1.0" encoding="utf-8"?>
+<file path=ppt/slides/slide13.xml><?xml version="1.0" encoding="utf-8"?>
 <p:sld xmlns:a="http://schemas.openxmlformats.org/drawingml/2006/main" xmlns:r="http://schemas.openxmlformats.org/officeDocument/2006/relationships" xmlns:p="http://schemas.openxmlformats.org/presentationml/2006/main">
   <p:cSld>
     <p:spTree>
@@ -3630,7 +3784,7 @@
 </p:sld>
 </file>
 
-<file path=ppt/slides/slide12.xml><?xml version="1.0" encoding="utf-8"?>
+<file path=ppt/slides/slide14.xml><?xml version="1.0" encoding="utf-8"?>
 <p:sld xmlns:a="http://schemas.openxmlformats.org/drawingml/2006/main" xmlns:r="http://schemas.openxmlformats.org/officeDocument/2006/relationships" xmlns:p="http://schemas.openxmlformats.org/presentationml/2006/main">
   <p:cSld>
     <p:spTree>
@@ -3735,7 +3889,7 @@
 </p:sld>
 </file>
 
-<file path=ppt/slides/slide13.xml><?xml version="1.0" encoding="utf-8"?>
+<file path=ppt/slides/slide15.xml><?xml version="1.0" encoding="utf-8"?>
 <p:sld xmlns:a="http://schemas.openxmlformats.org/drawingml/2006/main" xmlns:r="http://schemas.openxmlformats.org/officeDocument/2006/relationships" xmlns:p="http://schemas.openxmlformats.org/presentationml/2006/main">
   <p:cSld>
     <p:spTree>
@@ -3775,7 +3929,7 @@
           <a:p>
             <a:r>
               <a:rPr lang="ru-RU" dirty="0"/>
-              <a:t>Общие графики</a:t>
+              <a:t>Общие графики точности</a:t>
             </a:r>
             <a:endParaRPr lang="en-US" dirty="0"/>
           </a:p>
@@ -3824,7 +3978,7 @@
 </p:sld>
 </file>
 
-<file path=ppt/slides/slide14.xml><?xml version="1.0" encoding="utf-8"?>
+<file path=ppt/slides/slide16.xml><?xml version="1.0" encoding="utf-8"?>
 <p:sld xmlns:a="http://schemas.openxmlformats.org/drawingml/2006/main" xmlns:r="http://schemas.openxmlformats.org/officeDocument/2006/relationships" xmlns:p="http://schemas.openxmlformats.org/presentationml/2006/main">
   <p:cSld>
     <p:spTree>
@@ -3932,7 +4086,7 @@
 </p:sld>
 </file>
 
-<file path=ppt/slides/slide15.xml><?xml version="1.0" encoding="utf-8"?>
+<file path=ppt/slides/slide17.xml><?xml version="1.0" encoding="utf-8"?>
 <p:sld xmlns:a="http://schemas.openxmlformats.org/drawingml/2006/main" xmlns:r="http://schemas.openxmlformats.org/officeDocument/2006/relationships" xmlns:p="http://schemas.openxmlformats.org/presentationml/2006/main">
   <p:cSld>
     <p:spTree>
@@ -4040,7 +4194,7 @@
 </p:sld>
 </file>
 
-<file path=ppt/slides/slide16.xml><?xml version="1.0" encoding="utf-8"?>
+<file path=ppt/slides/slide18.xml><?xml version="1.0" encoding="utf-8"?>
 <p:sld xmlns:a="http://schemas.openxmlformats.org/drawingml/2006/main" xmlns:r="http://schemas.openxmlformats.org/officeDocument/2006/relationships" xmlns:p="http://schemas.openxmlformats.org/presentationml/2006/main">
   <p:cSld>
     <p:spTree>
@@ -4081,6 +4235,14 @@
             <a:r>
               <a:rPr lang="ru-RU" dirty="0"/>
               <a:t>Общие графики</a:t>
+            </a:r>
+            <a:r>
+              <a:rPr lang="en-US" dirty="0"/>
+              <a:t> </a:t>
+            </a:r>
+            <a:r>
+              <a:rPr lang="ru-RU" dirty="0"/>
+              <a:t>времени</a:t>
             </a:r>
             <a:endParaRPr lang="en-US" dirty="0"/>
           </a:p>
@@ -4788,7 +4950,7 @@
           <p:cNvPr id="2" name="Title 1">
             <a:extLst>
               <a:ext uri="{FF2B5EF4-FFF2-40B4-BE49-F238E27FC236}">
-                <a16:creationId xmlns:a16="http://schemas.microsoft.com/office/drawing/2014/main" id="{7E75FED4-BA3D-0044-55EA-1518683CD07B}"/>
+                <a16:creationId xmlns:a16="http://schemas.microsoft.com/office/drawing/2014/main" id="{CB826CEC-7668-7AD9-3E10-324C9172442E}"/>
               </a:ext>
             </a:extLst>
           </p:cNvPr>
@@ -4805,17 +4967,46 @@
           <a:lstStyle/>
           <a:p>
             <a:r>
-              <a:rPr lang="ru-RU" dirty="0"/>
-              <a:t>Выводы</a:t>
-            </a:r>
-            <a:endParaRPr lang="en-US" dirty="0"/>
-          </a:p>
-        </p:txBody>
-      </p:sp>
+              <a:rPr lang="en-US" dirty="0"/>
+              <a:t>BASIC, graph_8</a:t>
+            </a:r>
+          </a:p>
+        </p:txBody>
+      </p:sp>
+      <p:pic>
+        <p:nvPicPr>
+          <p:cNvPr id="4" name="Picture 3">
+            <a:extLst>
+              <a:ext uri="{FF2B5EF4-FFF2-40B4-BE49-F238E27FC236}">
+                <a16:creationId xmlns:a16="http://schemas.microsoft.com/office/drawing/2014/main" id="{EDEB1195-F2D7-51CD-474F-D3D6FA475A6E}"/>
+              </a:ext>
+            </a:extLst>
+          </p:cNvPr>
+          <p:cNvPicPr>
+            <a:picLocks noChangeAspect="1"/>
+          </p:cNvPicPr>
+          <p:nvPr/>
+        </p:nvPicPr>
+        <p:blipFill>
+          <a:blip r:embed="rId2"/>
+          <a:stretch>
+            <a:fillRect/>
+          </a:stretch>
+        </p:blipFill>
+        <p:spPr>
+          <a:xfrm>
+            <a:off x="0" y="2469624"/>
+            <a:ext cx="12192000" cy="2790627"/>
+          </a:xfrm>
+          <a:prstGeom prst="rect">
+            <a:avLst/>
+          </a:prstGeom>
+        </p:spPr>
+      </p:pic>
     </p:spTree>
     <p:extLst>
       <p:ext uri="{BB962C8B-B14F-4D97-AF65-F5344CB8AC3E}">
-        <p14:creationId xmlns:p14="http://schemas.microsoft.com/office/powerpoint/2010/main" val="1017558136"/>
+        <p14:creationId xmlns:p14="http://schemas.microsoft.com/office/powerpoint/2010/main" val="1179465604"/>
       </p:ext>
     </p:extLst>
   </p:cSld>

--- a/results/pres.pptx
+++ b/results/pres.pptx
@@ -5,24 +5,46 @@
     <p:sldMasterId id="2147483648" r:id="rId1"/>
   </p:sldMasterIdLst>
   <p:sldIdLst>
-    <p:sldId id="274" r:id="rId2"/>
-    <p:sldId id="259" r:id="rId3"/>
-    <p:sldId id="260" r:id="rId4"/>
-    <p:sldId id="263" r:id="rId5"/>
-    <p:sldId id="261" r:id="rId6"/>
-    <p:sldId id="264" r:id="rId7"/>
-    <p:sldId id="262" r:id="rId8"/>
-    <p:sldId id="265" r:id="rId9"/>
-    <p:sldId id="278" r:id="rId10"/>
-    <p:sldId id="277" r:id="rId11"/>
-    <p:sldId id="266" r:id="rId12"/>
-    <p:sldId id="267" r:id="rId13"/>
-    <p:sldId id="268" r:id="rId14"/>
-    <p:sldId id="269" r:id="rId15"/>
-    <p:sldId id="275" r:id="rId16"/>
-    <p:sldId id="271" r:id="rId17"/>
-    <p:sldId id="272" r:id="rId18"/>
-    <p:sldId id="276" r:id="rId19"/>
+    <p:sldId id="279" r:id="rId2"/>
+    <p:sldId id="282" r:id="rId3"/>
+    <p:sldId id="284" r:id="rId4"/>
+    <p:sldId id="285" r:id="rId5"/>
+    <p:sldId id="286" r:id="rId6"/>
+    <p:sldId id="287" r:id="rId7"/>
+    <p:sldId id="288" r:id="rId8"/>
+    <p:sldId id="280" r:id="rId9"/>
+    <p:sldId id="289" r:id="rId10"/>
+    <p:sldId id="292" r:id="rId11"/>
+    <p:sldId id="290" r:id="rId12"/>
+    <p:sldId id="293" r:id="rId13"/>
+    <p:sldId id="294" r:id="rId14"/>
+    <p:sldId id="295" r:id="rId15"/>
+    <p:sldId id="296" r:id="rId16"/>
+    <p:sldId id="291" r:id="rId17"/>
+    <p:sldId id="297" r:id="rId18"/>
+    <p:sldId id="298" r:id="rId19"/>
+    <p:sldId id="299" r:id="rId20"/>
+    <p:sldId id="300" r:id="rId21"/>
+    <p:sldId id="283" r:id="rId22"/>
+    <p:sldId id="281" r:id="rId23"/>
+    <p:sldId id="274" r:id="rId24"/>
+    <p:sldId id="259" r:id="rId25"/>
+    <p:sldId id="260" r:id="rId26"/>
+    <p:sldId id="263" r:id="rId27"/>
+    <p:sldId id="261" r:id="rId28"/>
+    <p:sldId id="264" r:id="rId29"/>
+    <p:sldId id="262" r:id="rId30"/>
+    <p:sldId id="265" r:id="rId31"/>
+    <p:sldId id="278" r:id="rId32"/>
+    <p:sldId id="277" r:id="rId33"/>
+    <p:sldId id="266" r:id="rId34"/>
+    <p:sldId id="267" r:id="rId35"/>
+    <p:sldId id="268" r:id="rId36"/>
+    <p:sldId id="269" r:id="rId37"/>
+    <p:sldId id="275" r:id="rId38"/>
+    <p:sldId id="271" r:id="rId39"/>
+    <p:sldId id="272" r:id="rId40"/>
+    <p:sldId id="276" r:id="rId41"/>
   </p:sldIdLst>
   <p:sldSz cx="12192000" cy="6858000"/>
   <p:notesSz cx="6858000" cy="9144000"/>
@@ -129,6 +151,32 @@
 </p:presentation>
 </file>
 
+<file path=ppt/commentAuthors.xml><?xml version="1.0" encoding="utf-8"?>
+<p:cmAuthorLst xmlns:a="http://schemas.openxmlformats.org/drawingml/2006/main" xmlns:r="http://schemas.openxmlformats.org/officeDocument/2006/relationships" xmlns:p="http://schemas.openxmlformats.org/presentationml/2006/main">
+  <p:cmAuthor id="1" name="Учетная запись Майкрософт" initials="УзМ" lastIdx="1" clrIdx="0">
+    <p:extLst>
+      <p:ext uri="{19B8F6BF-5375-455C-9EA6-DF929625EA0E}">
+        <p15:presenceInfo xmlns:p15="http://schemas.microsoft.com/office/powerpoint/2012/main" userId="16c420f34ac2e176" providerId="Windows Live"/>
+      </p:ext>
+    </p:extLst>
+  </p:cmAuthor>
+</p:cmAuthorLst>
+</file>
+
+<file path=ppt/comments/comment1.xml><?xml version="1.0" encoding="utf-8"?>
+<p:cmLst xmlns:a="http://schemas.openxmlformats.org/drawingml/2006/main" xmlns:r="http://schemas.openxmlformats.org/officeDocument/2006/relationships" xmlns:p="http://schemas.openxmlformats.org/presentationml/2006/main">
+  <p:cm authorId="1" dt="2025-05-31T02:23:34.111" idx="1">
+    <p:pos x="10" y="10"/>
+    <p:text/>
+    <p:extLst>
+      <p:ext uri="{C676402C-5697-4E1C-873F-D02D1690AC5C}">
+        <p15:threadingInfo xmlns:p15="http://schemas.microsoft.com/office/powerpoint/2012/main" timeZoneBias="-180"/>
+      </p:ext>
+    </p:extLst>
+  </p:cm>
+</p:cmLst>
+</file>
+
 <file path=ppt/slideLayouts/slideLayout1.xml><?xml version="1.0" encoding="utf-8"?>
 <p:sldLayout xmlns:a="http://schemas.openxmlformats.org/drawingml/2006/main" xmlns:r="http://schemas.openxmlformats.org/officeDocument/2006/relationships" xmlns:p="http://schemas.openxmlformats.org/presentationml/2006/main" type="title" preserve="1">
   <p:cSld name="Title Slide">
@@ -151,7 +199,7 @@
           <p:cNvPr id="2" name="Title 1">
             <a:extLst>
               <a:ext uri="{FF2B5EF4-FFF2-40B4-BE49-F238E27FC236}">
-                <a16:creationId xmlns:a16="http://schemas.microsoft.com/office/drawing/2014/main" id="{E8318D8C-2711-A077-8E6C-F13B7113124B}"/>
+                <a16:creationId xmlns:a16="http://schemas.microsoft.com/office/drawing/2014/main" xmlns="" id="{E8318D8C-2711-A077-8E6C-F13B7113124B}"/>
               </a:ext>
             </a:extLst>
           </p:cNvPr>
@@ -188,7 +236,7 @@
           <p:cNvPr id="3" name="Subtitle 2">
             <a:extLst>
               <a:ext uri="{FF2B5EF4-FFF2-40B4-BE49-F238E27FC236}">
-                <a16:creationId xmlns:a16="http://schemas.microsoft.com/office/drawing/2014/main" id="{510A1419-7B4D-044E-D40B-2B70ED6161EB}"/>
+                <a16:creationId xmlns:a16="http://schemas.microsoft.com/office/drawing/2014/main" xmlns="" id="{510A1419-7B4D-044E-D40B-2B70ED6161EB}"/>
               </a:ext>
             </a:extLst>
           </p:cNvPr>
@@ -258,7 +306,7 @@
           <p:cNvPr id="4" name="Date Placeholder 3">
             <a:extLst>
               <a:ext uri="{FF2B5EF4-FFF2-40B4-BE49-F238E27FC236}">
-                <a16:creationId xmlns:a16="http://schemas.microsoft.com/office/drawing/2014/main" id="{9AF0D707-573D-52E4-1F80-BB2ABEE54EEE}"/>
+                <a16:creationId xmlns:a16="http://schemas.microsoft.com/office/drawing/2014/main" xmlns="" id="{9AF0D707-573D-52E4-1F80-BB2ABEE54EEE}"/>
               </a:ext>
             </a:extLst>
           </p:cNvPr>
@@ -276,7 +324,7 @@
           <a:p>
             <a:fld id="{954D5CCF-EDB3-1944-BB31-7ADB8F2E1A0A}" type="datetimeFigureOut">
               <a:rPr lang="en-US" smtClean="0"/>
-              <a:t>5/30/25</a:t>
+              <a:t>5/31/2025</a:t>
             </a:fld>
             <a:endParaRPr lang="en-US"/>
           </a:p>
@@ -287,7 +335,7 @@
           <p:cNvPr id="5" name="Footer Placeholder 4">
             <a:extLst>
               <a:ext uri="{FF2B5EF4-FFF2-40B4-BE49-F238E27FC236}">
-                <a16:creationId xmlns:a16="http://schemas.microsoft.com/office/drawing/2014/main" id="{70FE333F-4018-3615-9D59-4FF4B29935B9}"/>
+                <a16:creationId xmlns:a16="http://schemas.microsoft.com/office/drawing/2014/main" xmlns="" id="{70FE333F-4018-3615-9D59-4FF4B29935B9}"/>
               </a:ext>
             </a:extLst>
           </p:cNvPr>
@@ -312,7 +360,7 @@
           <p:cNvPr id="6" name="Slide Number Placeholder 5">
             <a:extLst>
               <a:ext uri="{FF2B5EF4-FFF2-40B4-BE49-F238E27FC236}">
-                <a16:creationId xmlns:a16="http://schemas.microsoft.com/office/drawing/2014/main" id="{10ACCAD0-3114-AE0B-E08A-80E6E92A3969}"/>
+                <a16:creationId xmlns:a16="http://schemas.microsoft.com/office/drawing/2014/main" xmlns="" id="{10ACCAD0-3114-AE0B-E08A-80E6E92A3969}"/>
               </a:ext>
             </a:extLst>
           </p:cNvPr>
@@ -371,7 +419,7 @@
           <p:cNvPr id="2" name="Title 1">
             <a:extLst>
               <a:ext uri="{FF2B5EF4-FFF2-40B4-BE49-F238E27FC236}">
-                <a16:creationId xmlns:a16="http://schemas.microsoft.com/office/drawing/2014/main" id="{23E41AFA-5E9D-FCE9-0671-28BA77C5AB12}"/>
+                <a16:creationId xmlns:a16="http://schemas.microsoft.com/office/drawing/2014/main" xmlns="" id="{23E41AFA-5E9D-FCE9-0671-28BA77C5AB12}"/>
               </a:ext>
             </a:extLst>
           </p:cNvPr>
@@ -399,7 +447,7 @@
           <p:cNvPr id="3" name="Vertical Text Placeholder 2">
             <a:extLst>
               <a:ext uri="{FF2B5EF4-FFF2-40B4-BE49-F238E27FC236}">
-                <a16:creationId xmlns:a16="http://schemas.microsoft.com/office/drawing/2014/main" id="{AF1E3DEF-34D5-3D67-EEF0-50DBCDBDDB52}"/>
+                <a16:creationId xmlns:a16="http://schemas.microsoft.com/office/drawing/2014/main" xmlns="" id="{AF1E3DEF-34D5-3D67-EEF0-50DBCDBDDB52}"/>
               </a:ext>
             </a:extLst>
           </p:cNvPr>
@@ -456,7 +504,7 @@
           <p:cNvPr id="4" name="Date Placeholder 3">
             <a:extLst>
               <a:ext uri="{FF2B5EF4-FFF2-40B4-BE49-F238E27FC236}">
-                <a16:creationId xmlns:a16="http://schemas.microsoft.com/office/drawing/2014/main" id="{A0F41F2B-6FD5-55EF-B8CE-E1FB7B1ECC2B}"/>
+                <a16:creationId xmlns:a16="http://schemas.microsoft.com/office/drawing/2014/main" xmlns="" id="{A0F41F2B-6FD5-55EF-B8CE-E1FB7B1ECC2B}"/>
               </a:ext>
             </a:extLst>
           </p:cNvPr>
@@ -474,7 +522,7 @@
           <a:p>
             <a:fld id="{954D5CCF-EDB3-1944-BB31-7ADB8F2E1A0A}" type="datetimeFigureOut">
               <a:rPr lang="en-US" smtClean="0"/>
-              <a:t>5/30/25</a:t>
+              <a:t>5/31/2025</a:t>
             </a:fld>
             <a:endParaRPr lang="en-US"/>
           </a:p>
@@ -485,7 +533,7 @@
           <p:cNvPr id="5" name="Footer Placeholder 4">
             <a:extLst>
               <a:ext uri="{FF2B5EF4-FFF2-40B4-BE49-F238E27FC236}">
-                <a16:creationId xmlns:a16="http://schemas.microsoft.com/office/drawing/2014/main" id="{06E80C53-A967-897B-8A10-F7EC9DC850C9}"/>
+                <a16:creationId xmlns:a16="http://schemas.microsoft.com/office/drawing/2014/main" xmlns="" id="{06E80C53-A967-897B-8A10-F7EC9DC850C9}"/>
               </a:ext>
             </a:extLst>
           </p:cNvPr>
@@ -510,7 +558,7 @@
           <p:cNvPr id="6" name="Slide Number Placeholder 5">
             <a:extLst>
               <a:ext uri="{FF2B5EF4-FFF2-40B4-BE49-F238E27FC236}">
-                <a16:creationId xmlns:a16="http://schemas.microsoft.com/office/drawing/2014/main" id="{EB54060F-F944-9FAA-F497-5CC23228CF3A}"/>
+                <a16:creationId xmlns:a16="http://schemas.microsoft.com/office/drawing/2014/main" xmlns="" id="{EB54060F-F944-9FAA-F497-5CC23228CF3A}"/>
               </a:ext>
             </a:extLst>
           </p:cNvPr>
@@ -569,7 +617,7 @@
           <p:cNvPr id="2" name="Vertical Title 1">
             <a:extLst>
               <a:ext uri="{FF2B5EF4-FFF2-40B4-BE49-F238E27FC236}">
-                <a16:creationId xmlns:a16="http://schemas.microsoft.com/office/drawing/2014/main" id="{570EAFA8-6865-7229-ADF4-DDA7FB9544A4}"/>
+                <a16:creationId xmlns:a16="http://schemas.microsoft.com/office/drawing/2014/main" xmlns="" id="{570EAFA8-6865-7229-ADF4-DDA7FB9544A4}"/>
               </a:ext>
             </a:extLst>
           </p:cNvPr>
@@ -602,7 +650,7 @@
           <p:cNvPr id="3" name="Vertical Text Placeholder 2">
             <a:extLst>
               <a:ext uri="{FF2B5EF4-FFF2-40B4-BE49-F238E27FC236}">
-                <a16:creationId xmlns:a16="http://schemas.microsoft.com/office/drawing/2014/main" id="{43394958-E5CA-4F7D-D313-19A1C48E4F3F}"/>
+                <a16:creationId xmlns:a16="http://schemas.microsoft.com/office/drawing/2014/main" xmlns="" id="{43394958-E5CA-4F7D-D313-19A1C48E4F3F}"/>
               </a:ext>
             </a:extLst>
           </p:cNvPr>
@@ -664,7 +712,7 @@
           <p:cNvPr id="4" name="Date Placeholder 3">
             <a:extLst>
               <a:ext uri="{FF2B5EF4-FFF2-40B4-BE49-F238E27FC236}">
-                <a16:creationId xmlns:a16="http://schemas.microsoft.com/office/drawing/2014/main" id="{C59C40DB-0560-AC9A-A9B3-AA86D3E0105F}"/>
+                <a16:creationId xmlns:a16="http://schemas.microsoft.com/office/drawing/2014/main" xmlns="" id="{C59C40DB-0560-AC9A-A9B3-AA86D3E0105F}"/>
               </a:ext>
             </a:extLst>
           </p:cNvPr>
@@ -682,7 +730,7 @@
           <a:p>
             <a:fld id="{954D5CCF-EDB3-1944-BB31-7ADB8F2E1A0A}" type="datetimeFigureOut">
               <a:rPr lang="en-US" smtClean="0"/>
-              <a:t>5/30/25</a:t>
+              <a:t>5/31/2025</a:t>
             </a:fld>
             <a:endParaRPr lang="en-US"/>
           </a:p>
@@ -693,7 +741,7 @@
           <p:cNvPr id="5" name="Footer Placeholder 4">
             <a:extLst>
               <a:ext uri="{FF2B5EF4-FFF2-40B4-BE49-F238E27FC236}">
-                <a16:creationId xmlns:a16="http://schemas.microsoft.com/office/drawing/2014/main" id="{2CC9191E-42AE-8808-B0EC-063405A65D1E}"/>
+                <a16:creationId xmlns:a16="http://schemas.microsoft.com/office/drawing/2014/main" xmlns="" id="{2CC9191E-42AE-8808-B0EC-063405A65D1E}"/>
               </a:ext>
             </a:extLst>
           </p:cNvPr>
@@ -718,7 +766,7 @@
           <p:cNvPr id="6" name="Slide Number Placeholder 5">
             <a:extLst>
               <a:ext uri="{FF2B5EF4-FFF2-40B4-BE49-F238E27FC236}">
-                <a16:creationId xmlns:a16="http://schemas.microsoft.com/office/drawing/2014/main" id="{69D2B085-4155-69BF-EA9D-FEAB46EBEE30}"/>
+                <a16:creationId xmlns:a16="http://schemas.microsoft.com/office/drawing/2014/main" xmlns="" id="{69D2B085-4155-69BF-EA9D-FEAB46EBEE30}"/>
               </a:ext>
             </a:extLst>
           </p:cNvPr>
@@ -777,7 +825,7 @@
           <p:cNvPr id="2" name="Title 1">
             <a:extLst>
               <a:ext uri="{FF2B5EF4-FFF2-40B4-BE49-F238E27FC236}">
-                <a16:creationId xmlns:a16="http://schemas.microsoft.com/office/drawing/2014/main" id="{12BA87B9-9141-397A-4B86-B2A1018E4D40}"/>
+                <a16:creationId xmlns:a16="http://schemas.microsoft.com/office/drawing/2014/main" xmlns="" id="{12BA87B9-9141-397A-4B86-B2A1018E4D40}"/>
               </a:ext>
             </a:extLst>
           </p:cNvPr>
@@ -805,7 +853,7 @@
           <p:cNvPr id="3" name="Content Placeholder 2">
             <a:extLst>
               <a:ext uri="{FF2B5EF4-FFF2-40B4-BE49-F238E27FC236}">
-                <a16:creationId xmlns:a16="http://schemas.microsoft.com/office/drawing/2014/main" id="{1E4353AA-2D0A-1068-21B5-6AB804EEE4AC}"/>
+                <a16:creationId xmlns:a16="http://schemas.microsoft.com/office/drawing/2014/main" xmlns="" id="{1E4353AA-2D0A-1068-21B5-6AB804EEE4AC}"/>
               </a:ext>
             </a:extLst>
           </p:cNvPr>
@@ -862,7 +910,7 @@
           <p:cNvPr id="4" name="Date Placeholder 3">
             <a:extLst>
               <a:ext uri="{FF2B5EF4-FFF2-40B4-BE49-F238E27FC236}">
-                <a16:creationId xmlns:a16="http://schemas.microsoft.com/office/drawing/2014/main" id="{80D357D2-27C3-5A7F-683A-8448C19D4B41}"/>
+                <a16:creationId xmlns:a16="http://schemas.microsoft.com/office/drawing/2014/main" xmlns="" id="{80D357D2-27C3-5A7F-683A-8448C19D4B41}"/>
               </a:ext>
             </a:extLst>
           </p:cNvPr>
@@ -880,7 +928,7 @@
           <a:p>
             <a:fld id="{954D5CCF-EDB3-1944-BB31-7ADB8F2E1A0A}" type="datetimeFigureOut">
               <a:rPr lang="en-US" smtClean="0"/>
-              <a:t>5/30/25</a:t>
+              <a:t>5/31/2025</a:t>
             </a:fld>
             <a:endParaRPr lang="en-US"/>
           </a:p>
@@ -891,7 +939,7 @@
           <p:cNvPr id="5" name="Footer Placeholder 4">
             <a:extLst>
               <a:ext uri="{FF2B5EF4-FFF2-40B4-BE49-F238E27FC236}">
-                <a16:creationId xmlns:a16="http://schemas.microsoft.com/office/drawing/2014/main" id="{5F82C28C-58DE-9E5A-ECD7-C51DF5BF8F8C}"/>
+                <a16:creationId xmlns:a16="http://schemas.microsoft.com/office/drawing/2014/main" xmlns="" id="{5F82C28C-58DE-9E5A-ECD7-C51DF5BF8F8C}"/>
               </a:ext>
             </a:extLst>
           </p:cNvPr>
@@ -916,7 +964,7 @@
           <p:cNvPr id="6" name="Slide Number Placeholder 5">
             <a:extLst>
               <a:ext uri="{FF2B5EF4-FFF2-40B4-BE49-F238E27FC236}">
-                <a16:creationId xmlns:a16="http://schemas.microsoft.com/office/drawing/2014/main" id="{14C92359-3ED3-68AC-FCC2-B7B0A7116F6C}"/>
+                <a16:creationId xmlns:a16="http://schemas.microsoft.com/office/drawing/2014/main" xmlns="" id="{14C92359-3ED3-68AC-FCC2-B7B0A7116F6C}"/>
               </a:ext>
             </a:extLst>
           </p:cNvPr>
@@ -975,7 +1023,7 @@
           <p:cNvPr id="2" name="Title 1">
             <a:extLst>
               <a:ext uri="{FF2B5EF4-FFF2-40B4-BE49-F238E27FC236}">
-                <a16:creationId xmlns:a16="http://schemas.microsoft.com/office/drawing/2014/main" id="{06D8314C-FEC9-48DE-1056-AD8991E90C5D}"/>
+                <a16:creationId xmlns:a16="http://schemas.microsoft.com/office/drawing/2014/main" xmlns="" id="{06D8314C-FEC9-48DE-1056-AD8991E90C5D}"/>
               </a:ext>
             </a:extLst>
           </p:cNvPr>
@@ -1012,7 +1060,7 @@
           <p:cNvPr id="3" name="Text Placeholder 2">
             <a:extLst>
               <a:ext uri="{FF2B5EF4-FFF2-40B4-BE49-F238E27FC236}">
-                <a16:creationId xmlns:a16="http://schemas.microsoft.com/office/drawing/2014/main" id="{28187400-95BA-25F3-525F-8F6615796EF0}"/>
+                <a16:creationId xmlns:a16="http://schemas.microsoft.com/office/drawing/2014/main" xmlns="" id="{28187400-95BA-25F3-525F-8F6615796EF0}"/>
               </a:ext>
             </a:extLst>
           </p:cNvPr>
@@ -1137,7 +1185,7 @@
           <p:cNvPr id="4" name="Date Placeholder 3">
             <a:extLst>
               <a:ext uri="{FF2B5EF4-FFF2-40B4-BE49-F238E27FC236}">
-                <a16:creationId xmlns:a16="http://schemas.microsoft.com/office/drawing/2014/main" id="{2E06A0CB-5015-D6E6-9F7E-484FCE9D04A4}"/>
+                <a16:creationId xmlns:a16="http://schemas.microsoft.com/office/drawing/2014/main" xmlns="" id="{2E06A0CB-5015-D6E6-9F7E-484FCE9D04A4}"/>
               </a:ext>
             </a:extLst>
           </p:cNvPr>
@@ -1155,7 +1203,7 @@
           <a:p>
             <a:fld id="{954D5CCF-EDB3-1944-BB31-7ADB8F2E1A0A}" type="datetimeFigureOut">
               <a:rPr lang="en-US" smtClean="0"/>
-              <a:t>5/30/25</a:t>
+              <a:t>5/31/2025</a:t>
             </a:fld>
             <a:endParaRPr lang="en-US"/>
           </a:p>
@@ -1166,7 +1214,7 @@
           <p:cNvPr id="5" name="Footer Placeholder 4">
             <a:extLst>
               <a:ext uri="{FF2B5EF4-FFF2-40B4-BE49-F238E27FC236}">
-                <a16:creationId xmlns:a16="http://schemas.microsoft.com/office/drawing/2014/main" id="{339E30B1-95FE-7E84-B1D8-EF2F8132A65F}"/>
+                <a16:creationId xmlns:a16="http://schemas.microsoft.com/office/drawing/2014/main" xmlns="" id="{339E30B1-95FE-7E84-B1D8-EF2F8132A65F}"/>
               </a:ext>
             </a:extLst>
           </p:cNvPr>
@@ -1191,7 +1239,7 @@
           <p:cNvPr id="6" name="Slide Number Placeholder 5">
             <a:extLst>
               <a:ext uri="{FF2B5EF4-FFF2-40B4-BE49-F238E27FC236}">
-                <a16:creationId xmlns:a16="http://schemas.microsoft.com/office/drawing/2014/main" id="{BFB0F825-C239-8869-875D-7FE4BF8A26B0}"/>
+                <a16:creationId xmlns:a16="http://schemas.microsoft.com/office/drawing/2014/main" xmlns="" id="{BFB0F825-C239-8869-875D-7FE4BF8A26B0}"/>
               </a:ext>
             </a:extLst>
           </p:cNvPr>
@@ -1250,7 +1298,7 @@
           <p:cNvPr id="2" name="Title 1">
             <a:extLst>
               <a:ext uri="{FF2B5EF4-FFF2-40B4-BE49-F238E27FC236}">
-                <a16:creationId xmlns:a16="http://schemas.microsoft.com/office/drawing/2014/main" id="{A99D6323-440D-4E54-1DF4-0737848E5EDA}"/>
+                <a16:creationId xmlns:a16="http://schemas.microsoft.com/office/drawing/2014/main" xmlns="" id="{A99D6323-440D-4E54-1DF4-0737848E5EDA}"/>
               </a:ext>
             </a:extLst>
           </p:cNvPr>
@@ -1278,7 +1326,7 @@
           <p:cNvPr id="3" name="Content Placeholder 2">
             <a:extLst>
               <a:ext uri="{FF2B5EF4-FFF2-40B4-BE49-F238E27FC236}">
-                <a16:creationId xmlns:a16="http://schemas.microsoft.com/office/drawing/2014/main" id="{AEC501E1-2097-C039-3F48-A36152396AAD}"/>
+                <a16:creationId xmlns:a16="http://schemas.microsoft.com/office/drawing/2014/main" xmlns="" id="{AEC501E1-2097-C039-3F48-A36152396AAD}"/>
               </a:ext>
             </a:extLst>
           </p:cNvPr>
@@ -1340,7 +1388,7 @@
           <p:cNvPr id="4" name="Content Placeholder 3">
             <a:extLst>
               <a:ext uri="{FF2B5EF4-FFF2-40B4-BE49-F238E27FC236}">
-                <a16:creationId xmlns:a16="http://schemas.microsoft.com/office/drawing/2014/main" id="{4F92F21D-38E1-A84A-2DE7-A87C5D4F0E3A}"/>
+                <a16:creationId xmlns:a16="http://schemas.microsoft.com/office/drawing/2014/main" xmlns="" id="{4F92F21D-38E1-A84A-2DE7-A87C5D4F0E3A}"/>
               </a:ext>
             </a:extLst>
           </p:cNvPr>
@@ -1402,7 +1450,7 @@
           <p:cNvPr id="5" name="Date Placeholder 4">
             <a:extLst>
               <a:ext uri="{FF2B5EF4-FFF2-40B4-BE49-F238E27FC236}">
-                <a16:creationId xmlns:a16="http://schemas.microsoft.com/office/drawing/2014/main" id="{AD524769-FABD-63FC-DD00-A4DE26D8D3DA}"/>
+                <a16:creationId xmlns:a16="http://schemas.microsoft.com/office/drawing/2014/main" xmlns="" id="{AD524769-FABD-63FC-DD00-A4DE26D8D3DA}"/>
               </a:ext>
             </a:extLst>
           </p:cNvPr>
@@ -1420,7 +1468,7 @@
           <a:p>
             <a:fld id="{954D5CCF-EDB3-1944-BB31-7ADB8F2E1A0A}" type="datetimeFigureOut">
               <a:rPr lang="en-US" smtClean="0"/>
-              <a:t>5/30/25</a:t>
+              <a:t>5/31/2025</a:t>
             </a:fld>
             <a:endParaRPr lang="en-US"/>
           </a:p>
@@ -1431,7 +1479,7 @@
           <p:cNvPr id="6" name="Footer Placeholder 5">
             <a:extLst>
               <a:ext uri="{FF2B5EF4-FFF2-40B4-BE49-F238E27FC236}">
-                <a16:creationId xmlns:a16="http://schemas.microsoft.com/office/drawing/2014/main" id="{A5CB6F13-D363-B59A-8358-2F56DC2BCFEF}"/>
+                <a16:creationId xmlns:a16="http://schemas.microsoft.com/office/drawing/2014/main" xmlns="" id="{A5CB6F13-D363-B59A-8358-2F56DC2BCFEF}"/>
               </a:ext>
             </a:extLst>
           </p:cNvPr>
@@ -1456,7 +1504,7 @@
           <p:cNvPr id="7" name="Slide Number Placeholder 6">
             <a:extLst>
               <a:ext uri="{FF2B5EF4-FFF2-40B4-BE49-F238E27FC236}">
-                <a16:creationId xmlns:a16="http://schemas.microsoft.com/office/drawing/2014/main" id="{02BCA711-CE1D-3D7C-2715-516B7FA7B9E5}"/>
+                <a16:creationId xmlns:a16="http://schemas.microsoft.com/office/drawing/2014/main" xmlns="" id="{02BCA711-CE1D-3D7C-2715-516B7FA7B9E5}"/>
               </a:ext>
             </a:extLst>
           </p:cNvPr>
@@ -1515,7 +1563,7 @@
           <p:cNvPr id="2" name="Title 1">
             <a:extLst>
               <a:ext uri="{FF2B5EF4-FFF2-40B4-BE49-F238E27FC236}">
-                <a16:creationId xmlns:a16="http://schemas.microsoft.com/office/drawing/2014/main" id="{37D6F686-CAA4-AD35-D3C7-F2E4678AE0F1}"/>
+                <a16:creationId xmlns:a16="http://schemas.microsoft.com/office/drawing/2014/main" xmlns="" id="{37D6F686-CAA4-AD35-D3C7-F2E4678AE0F1}"/>
               </a:ext>
             </a:extLst>
           </p:cNvPr>
@@ -1548,7 +1596,7 @@
           <p:cNvPr id="3" name="Text Placeholder 2">
             <a:extLst>
               <a:ext uri="{FF2B5EF4-FFF2-40B4-BE49-F238E27FC236}">
-                <a16:creationId xmlns:a16="http://schemas.microsoft.com/office/drawing/2014/main" id="{68FAC657-F1BF-11BF-3A1E-93D33FA5A05F}"/>
+                <a16:creationId xmlns:a16="http://schemas.microsoft.com/office/drawing/2014/main" xmlns="" id="{68FAC657-F1BF-11BF-3A1E-93D33FA5A05F}"/>
               </a:ext>
             </a:extLst>
           </p:cNvPr>
@@ -1619,7 +1667,7 @@
           <p:cNvPr id="4" name="Content Placeholder 3">
             <a:extLst>
               <a:ext uri="{FF2B5EF4-FFF2-40B4-BE49-F238E27FC236}">
-                <a16:creationId xmlns:a16="http://schemas.microsoft.com/office/drawing/2014/main" id="{16092B3F-705A-0F71-CB9B-945553B89A09}"/>
+                <a16:creationId xmlns:a16="http://schemas.microsoft.com/office/drawing/2014/main" xmlns="" id="{16092B3F-705A-0F71-CB9B-945553B89A09}"/>
               </a:ext>
             </a:extLst>
           </p:cNvPr>
@@ -1681,7 +1729,7 @@
           <p:cNvPr id="5" name="Text Placeholder 4">
             <a:extLst>
               <a:ext uri="{FF2B5EF4-FFF2-40B4-BE49-F238E27FC236}">
-                <a16:creationId xmlns:a16="http://schemas.microsoft.com/office/drawing/2014/main" id="{1ABBDB65-3C4A-C8D8-641E-EB025F5BB62F}"/>
+                <a16:creationId xmlns:a16="http://schemas.microsoft.com/office/drawing/2014/main" xmlns="" id="{1ABBDB65-3C4A-C8D8-641E-EB025F5BB62F}"/>
               </a:ext>
             </a:extLst>
           </p:cNvPr>
@@ -1752,7 +1800,7 @@
           <p:cNvPr id="6" name="Content Placeholder 5">
             <a:extLst>
               <a:ext uri="{FF2B5EF4-FFF2-40B4-BE49-F238E27FC236}">
-                <a16:creationId xmlns:a16="http://schemas.microsoft.com/office/drawing/2014/main" id="{7A434233-0573-FA0C-8C95-75B0B1554DAD}"/>
+                <a16:creationId xmlns:a16="http://schemas.microsoft.com/office/drawing/2014/main" xmlns="" id="{7A434233-0573-FA0C-8C95-75B0B1554DAD}"/>
               </a:ext>
             </a:extLst>
           </p:cNvPr>
@@ -1814,7 +1862,7 @@
           <p:cNvPr id="7" name="Date Placeholder 6">
             <a:extLst>
               <a:ext uri="{FF2B5EF4-FFF2-40B4-BE49-F238E27FC236}">
-                <a16:creationId xmlns:a16="http://schemas.microsoft.com/office/drawing/2014/main" id="{1E835273-D6B2-41E1-7CE2-5BD1511CC6D6}"/>
+                <a16:creationId xmlns:a16="http://schemas.microsoft.com/office/drawing/2014/main" xmlns="" id="{1E835273-D6B2-41E1-7CE2-5BD1511CC6D6}"/>
               </a:ext>
             </a:extLst>
           </p:cNvPr>
@@ -1832,7 +1880,7 @@
           <a:p>
             <a:fld id="{954D5CCF-EDB3-1944-BB31-7ADB8F2E1A0A}" type="datetimeFigureOut">
               <a:rPr lang="en-US" smtClean="0"/>
-              <a:t>5/30/25</a:t>
+              <a:t>5/31/2025</a:t>
             </a:fld>
             <a:endParaRPr lang="en-US"/>
           </a:p>
@@ -1843,7 +1891,7 @@
           <p:cNvPr id="8" name="Footer Placeholder 7">
             <a:extLst>
               <a:ext uri="{FF2B5EF4-FFF2-40B4-BE49-F238E27FC236}">
-                <a16:creationId xmlns:a16="http://schemas.microsoft.com/office/drawing/2014/main" id="{5691805B-FD5E-4226-BD93-8EB1FFB99B24}"/>
+                <a16:creationId xmlns:a16="http://schemas.microsoft.com/office/drawing/2014/main" xmlns="" id="{5691805B-FD5E-4226-BD93-8EB1FFB99B24}"/>
               </a:ext>
             </a:extLst>
           </p:cNvPr>
@@ -1868,7 +1916,7 @@
           <p:cNvPr id="9" name="Slide Number Placeholder 8">
             <a:extLst>
               <a:ext uri="{FF2B5EF4-FFF2-40B4-BE49-F238E27FC236}">
-                <a16:creationId xmlns:a16="http://schemas.microsoft.com/office/drawing/2014/main" id="{993007C0-C85D-D0B0-7194-A580919FE208}"/>
+                <a16:creationId xmlns:a16="http://schemas.microsoft.com/office/drawing/2014/main" xmlns="" id="{993007C0-C85D-D0B0-7194-A580919FE208}"/>
               </a:ext>
             </a:extLst>
           </p:cNvPr>
@@ -1927,7 +1975,7 @@
           <p:cNvPr id="2" name="Title 1">
             <a:extLst>
               <a:ext uri="{FF2B5EF4-FFF2-40B4-BE49-F238E27FC236}">
-                <a16:creationId xmlns:a16="http://schemas.microsoft.com/office/drawing/2014/main" id="{6B762AA9-98B1-2080-B846-790F46E6D74E}"/>
+                <a16:creationId xmlns:a16="http://schemas.microsoft.com/office/drawing/2014/main" xmlns="" id="{6B762AA9-98B1-2080-B846-790F46E6D74E}"/>
               </a:ext>
             </a:extLst>
           </p:cNvPr>
@@ -1955,7 +2003,7 @@
           <p:cNvPr id="3" name="Date Placeholder 2">
             <a:extLst>
               <a:ext uri="{FF2B5EF4-FFF2-40B4-BE49-F238E27FC236}">
-                <a16:creationId xmlns:a16="http://schemas.microsoft.com/office/drawing/2014/main" id="{60B2B202-3729-E2E9-346B-F835B7CF730A}"/>
+                <a16:creationId xmlns:a16="http://schemas.microsoft.com/office/drawing/2014/main" xmlns="" id="{60B2B202-3729-E2E9-346B-F835B7CF730A}"/>
               </a:ext>
             </a:extLst>
           </p:cNvPr>
@@ -1973,7 +2021,7 @@
           <a:p>
             <a:fld id="{954D5CCF-EDB3-1944-BB31-7ADB8F2E1A0A}" type="datetimeFigureOut">
               <a:rPr lang="en-US" smtClean="0"/>
-              <a:t>5/30/25</a:t>
+              <a:t>5/31/2025</a:t>
             </a:fld>
             <a:endParaRPr lang="en-US"/>
           </a:p>
@@ -1984,7 +2032,7 @@
           <p:cNvPr id="4" name="Footer Placeholder 3">
             <a:extLst>
               <a:ext uri="{FF2B5EF4-FFF2-40B4-BE49-F238E27FC236}">
-                <a16:creationId xmlns:a16="http://schemas.microsoft.com/office/drawing/2014/main" id="{C2B90971-4602-51DD-B499-8A21DD24421E}"/>
+                <a16:creationId xmlns:a16="http://schemas.microsoft.com/office/drawing/2014/main" xmlns="" id="{C2B90971-4602-51DD-B499-8A21DD24421E}"/>
               </a:ext>
             </a:extLst>
           </p:cNvPr>
@@ -2009,7 +2057,7 @@
           <p:cNvPr id="5" name="Slide Number Placeholder 4">
             <a:extLst>
               <a:ext uri="{FF2B5EF4-FFF2-40B4-BE49-F238E27FC236}">
-                <a16:creationId xmlns:a16="http://schemas.microsoft.com/office/drawing/2014/main" id="{FB9BA957-61E9-E5E5-36F0-F89DEE3E7981}"/>
+                <a16:creationId xmlns:a16="http://schemas.microsoft.com/office/drawing/2014/main" xmlns="" id="{FB9BA957-61E9-E5E5-36F0-F89DEE3E7981}"/>
               </a:ext>
             </a:extLst>
           </p:cNvPr>
@@ -2068,7 +2116,7 @@
           <p:cNvPr id="2" name="Date Placeholder 1">
             <a:extLst>
               <a:ext uri="{FF2B5EF4-FFF2-40B4-BE49-F238E27FC236}">
-                <a16:creationId xmlns:a16="http://schemas.microsoft.com/office/drawing/2014/main" id="{00C11B51-8F2A-037F-9933-AD9715C0F2DD}"/>
+                <a16:creationId xmlns:a16="http://schemas.microsoft.com/office/drawing/2014/main" xmlns="" id="{00C11B51-8F2A-037F-9933-AD9715C0F2DD}"/>
               </a:ext>
             </a:extLst>
           </p:cNvPr>
@@ -2086,7 +2134,7 @@
           <a:p>
             <a:fld id="{954D5CCF-EDB3-1944-BB31-7ADB8F2E1A0A}" type="datetimeFigureOut">
               <a:rPr lang="en-US" smtClean="0"/>
-              <a:t>5/30/25</a:t>
+              <a:t>5/31/2025</a:t>
             </a:fld>
             <a:endParaRPr lang="en-US"/>
           </a:p>
@@ -2097,7 +2145,7 @@
           <p:cNvPr id="3" name="Footer Placeholder 2">
             <a:extLst>
               <a:ext uri="{FF2B5EF4-FFF2-40B4-BE49-F238E27FC236}">
-                <a16:creationId xmlns:a16="http://schemas.microsoft.com/office/drawing/2014/main" id="{41D02922-860C-35F4-EBC9-3F158F5DF448}"/>
+                <a16:creationId xmlns:a16="http://schemas.microsoft.com/office/drawing/2014/main" xmlns="" id="{41D02922-860C-35F4-EBC9-3F158F5DF448}"/>
               </a:ext>
             </a:extLst>
           </p:cNvPr>
@@ -2122,7 +2170,7 @@
           <p:cNvPr id="4" name="Slide Number Placeholder 3">
             <a:extLst>
               <a:ext uri="{FF2B5EF4-FFF2-40B4-BE49-F238E27FC236}">
-                <a16:creationId xmlns:a16="http://schemas.microsoft.com/office/drawing/2014/main" id="{D45BC533-F429-9DBF-A574-2BEFA68F5E59}"/>
+                <a16:creationId xmlns:a16="http://schemas.microsoft.com/office/drawing/2014/main" xmlns="" id="{D45BC533-F429-9DBF-A574-2BEFA68F5E59}"/>
               </a:ext>
             </a:extLst>
           </p:cNvPr>
@@ -2181,7 +2229,7 @@
           <p:cNvPr id="2" name="Title 1">
             <a:extLst>
               <a:ext uri="{FF2B5EF4-FFF2-40B4-BE49-F238E27FC236}">
-                <a16:creationId xmlns:a16="http://schemas.microsoft.com/office/drawing/2014/main" id="{4D1BBE21-75A0-5E90-DA0E-B4720C7C69F2}"/>
+                <a16:creationId xmlns:a16="http://schemas.microsoft.com/office/drawing/2014/main" xmlns="" id="{4D1BBE21-75A0-5E90-DA0E-B4720C7C69F2}"/>
               </a:ext>
             </a:extLst>
           </p:cNvPr>
@@ -2218,7 +2266,7 @@
           <p:cNvPr id="3" name="Content Placeholder 2">
             <a:extLst>
               <a:ext uri="{FF2B5EF4-FFF2-40B4-BE49-F238E27FC236}">
-                <a16:creationId xmlns:a16="http://schemas.microsoft.com/office/drawing/2014/main" id="{2285BB0A-C921-1A1A-2176-A0665C659302}"/>
+                <a16:creationId xmlns:a16="http://schemas.microsoft.com/office/drawing/2014/main" xmlns="" id="{2285BB0A-C921-1A1A-2176-A0665C659302}"/>
               </a:ext>
             </a:extLst>
           </p:cNvPr>
@@ -2308,7 +2356,7 @@
           <p:cNvPr id="4" name="Text Placeholder 3">
             <a:extLst>
               <a:ext uri="{FF2B5EF4-FFF2-40B4-BE49-F238E27FC236}">
-                <a16:creationId xmlns:a16="http://schemas.microsoft.com/office/drawing/2014/main" id="{1270A3F3-D0D0-B0EE-E74C-03ACC0B166E6}"/>
+                <a16:creationId xmlns:a16="http://schemas.microsoft.com/office/drawing/2014/main" xmlns="" id="{1270A3F3-D0D0-B0EE-E74C-03ACC0B166E6}"/>
               </a:ext>
             </a:extLst>
           </p:cNvPr>
@@ -2379,7 +2427,7 @@
           <p:cNvPr id="5" name="Date Placeholder 4">
             <a:extLst>
               <a:ext uri="{FF2B5EF4-FFF2-40B4-BE49-F238E27FC236}">
-                <a16:creationId xmlns:a16="http://schemas.microsoft.com/office/drawing/2014/main" id="{6316AF98-3303-98B6-DC2A-342AD55A9C04}"/>
+                <a16:creationId xmlns:a16="http://schemas.microsoft.com/office/drawing/2014/main" xmlns="" id="{6316AF98-3303-98B6-DC2A-342AD55A9C04}"/>
               </a:ext>
             </a:extLst>
           </p:cNvPr>
@@ -2397,7 +2445,7 @@
           <a:p>
             <a:fld id="{954D5CCF-EDB3-1944-BB31-7ADB8F2E1A0A}" type="datetimeFigureOut">
               <a:rPr lang="en-US" smtClean="0"/>
-              <a:t>5/30/25</a:t>
+              <a:t>5/31/2025</a:t>
             </a:fld>
             <a:endParaRPr lang="en-US"/>
           </a:p>
@@ -2408,7 +2456,7 @@
           <p:cNvPr id="6" name="Footer Placeholder 5">
             <a:extLst>
               <a:ext uri="{FF2B5EF4-FFF2-40B4-BE49-F238E27FC236}">
-                <a16:creationId xmlns:a16="http://schemas.microsoft.com/office/drawing/2014/main" id="{3EF1D7FB-F45E-32BC-0FB8-964E47BC9FC8}"/>
+                <a16:creationId xmlns:a16="http://schemas.microsoft.com/office/drawing/2014/main" xmlns="" id="{3EF1D7FB-F45E-32BC-0FB8-964E47BC9FC8}"/>
               </a:ext>
             </a:extLst>
           </p:cNvPr>
@@ -2433,7 +2481,7 @@
           <p:cNvPr id="7" name="Slide Number Placeholder 6">
             <a:extLst>
               <a:ext uri="{FF2B5EF4-FFF2-40B4-BE49-F238E27FC236}">
-                <a16:creationId xmlns:a16="http://schemas.microsoft.com/office/drawing/2014/main" id="{4A1E4841-B584-4871-C153-AFE972A41363}"/>
+                <a16:creationId xmlns:a16="http://schemas.microsoft.com/office/drawing/2014/main" xmlns="" id="{4A1E4841-B584-4871-C153-AFE972A41363}"/>
               </a:ext>
             </a:extLst>
           </p:cNvPr>
@@ -2492,7 +2540,7 @@
           <p:cNvPr id="2" name="Title 1">
             <a:extLst>
               <a:ext uri="{FF2B5EF4-FFF2-40B4-BE49-F238E27FC236}">
-                <a16:creationId xmlns:a16="http://schemas.microsoft.com/office/drawing/2014/main" id="{CB4AE8A9-038C-E3DD-28E8-4FF9D6F027EA}"/>
+                <a16:creationId xmlns:a16="http://schemas.microsoft.com/office/drawing/2014/main" xmlns="" id="{CB4AE8A9-038C-E3DD-28E8-4FF9D6F027EA}"/>
               </a:ext>
             </a:extLst>
           </p:cNvPr>
@@ -2529,7 +2577,7 @@
           <p:cNvPr id="3" name="Picture Placeholder 2">
             <a:extLst>
               <a:ext uri="{FF2B5EF4-FFF2-40B4-BE49-F238E27FC236}">
-                <a16:creationId xmlns:a16="http://schemas.microsoft.com/office/drawing/2014/main" id="{86C5CDF2-F754-93B1-B710-C16DA63A562E}"/>
+                <a16:creationId xmlns:a16="http://schemas.microsoft.com/office/drawing/2014/main" xmlns="" id="{86C5CDF2-F754-93B1-B710-C16DA63A562E}"/>
               </a:ext>
             </a:extLst>
           </p:cNvPr>
@@ -2596,7 +2644,7 @@
           <p:cNvPr id="4" name="Text Placeholder 3">
             <a:extLst>
               <a:ext uri="{FF2B5EF4-FFF2-40B4-BE49-F238E27FC236}">
-                <a16:creationId xmlns:a16="http://schemas.microsoft.com/office/drawing/2014/main" id="{2B48E7DC-FB1D-0454-B409-E13089BD4BF5}"/>
+                <a16:creationId xmlns:a16="http://schemas.microsoft.com/office/drawing/2014/main" xmlns="" id="{2B48E7DC-FB1D-0454-B409-E13089BD4BF5}"/>
               </a:ext>
             </a:extLst>
           </p:cNvPr>
@@ -2667,7 +2715,7 @@
           <p:cNvPr id="5" name="Date Placeholder 4">
             <a:extLst>
               <a:ext uri="{FF2B5EF4-FFF2-40B4-BE49-F238E27FC236}">
-                <a16:creationId xmlns:a16="http://schemas.microsoft.com/office/drawing/2014/main" id="{DCC56A54-3965-09E0-C5CA-FC78A1FBDEEF}"/>
+                <a16:creationId xmlns:a16="http://schemas.microsoft.com/office/drawing/2014/main" xmlns="" id="{DCC56A54-3965-09E0-C5CA-FC78A1FBDEEF}"/>
               </a:ext>
             </a:extLst>
           </p:cNvPr>
@@ -2685,7 +2733,7 @@
           <a:p>
             <a:fld id="{954D5CCF-EDB3-1944-BB31-7ADB8F2E1A0A}" type="datetimeFigureOut">
               <a:rPr lang="en-US" smtClean="0"/>
-              <a:t>5/30/25</a:t>
+              <a:t>5/31/2025</a:t>
             </a:fld>
             <a:endParaRPr lang="en-US"/>
           </a:p>
@@ -2696,7 +2744,7 @@
           <p:cNvPr id="6" name="Footer Placeholder 5">
             <a:extLst>
               <a:ext uri="{FF2B5EF4-FFF2-40B4-BE49-F238E27FC236}">
-                <a16:creationId xmlns:a16="http://schemas.microsoft.com/office/drawing/2014/main" id="{1A0531AA-F68F-8C6E-4617-3E1B67BBB607}"/>
+                <a16:creationId xmlns:a16="http://schemas.microsoft.com/office/drawing/2014/main" xmlns="" id="{1A0531AA-F68F-8C6E-4617-3E1B67BBB607}"/>
               </a:ext>
             </a:extLst>
           </p:cNvPr>
@@ -2721,7 +2769,7 @@
           <p:cNvPr id="7" name="Slide Number Placeholder 6">
             <a:extLst>
               <a:ext uri="{FF2B5EF4-FFF2-40B4-BE49-F238E27FC236}">
-                <a16:creationId xmlns:a16="http://schemas.microsoft.com/office/drawing/2014/main" id="{16B1FF3F-4C72-4D35-4EB3-AC93BCEE3C99}"/>
+                <a16:creationId xmlns:a16="http://schemas.microsoft.com/office/drawing/2014/main" xmlns="" id="{16B1FF3F-4C72-4D35-4EB3-AC93BCEE3C99}"/>
               </a:ext>
             </a:extLst>
           </p:cNvPr>
@@ -2785,7 +2833,7 @@
           <p:cNvPr id="2" name="Title Placeholder 1">
             <a:extLst>
               <a:ext uri="{FF2B5EF4-FFF2-40B4-BE49-F238E27FC236}">
-                <a16:creationId xmlns:a16="http://schemas.microsoft.com/office/drawing/2014/main" id="{0C2474C2-248C-C257-126D-62C0FC972B6D}"/>
+                <a16:creationId xmlns:a16="http://schemas.microsoft.com/office/drawing/2014/main" xmlns="" id="{0C2474C2-248C-C257-126D-62C0FC972B6D}"/>
               </a:ext>
             </a:extLst>
           </p:cNvPr>
@@ -2823,7 +2871,7 @@
           <p:cNvPr id="3" name="Text Placeholder 2">
             <a:extLst>
               <a:ext uri="{FF2B5EF4-FFF2-40B4-BE49-F238E27FC236}">
-                <a16:creationId xmlns:a16="http://schemas.microsoft.com/office/drawing/2014/main" id="{780C2BF9-2CFE-1E8E-FE9C-E1F7DF49E30D}"/>
+                <a16:creationId xmlns:a16="http://schemas.microsoft.com/office/drawing/2014/main" xmlns="" id="{780C2BF9-2CFE-1E8E-FE9C-E1F7DF49E30D}"/>
               </a:ext>
             </a:extLst>
           </p:cNvPr>
@@ -2890,7 +2938,7 @@
           <p:cNvPr id="4" name="Date Placeholder 3">
             <a:extLst>
               <a:ext uri="{FF2B5EF4-FFF2-40B4-BE49-F238E27FC236}">
-                <a16:creationId xmlns:a16="http://schemas.microsoft.com/office/drawing/2014/main" id="{3ABBBF39-B1AF-1988-B84C-BB7C46CAC03B}"/>
+                <a16:creationId xmlns:a16="http://schemas.microsoft.com/office/drawing/2014/main" xmlns="" id="{3ABBBF39-B1AF-1988-B84C-BB7C46CAC03B}"/>
               </a:ext>
             </a:extLst>
           </p:cNvPr>
@@ -2926,7 +2974,7 @@
           <a:p>
             <a:fld id="{954D5CCF-EDB3-1944-BB31-7ADB8F2E1A0A}" type="datetimeFigureOut">
               <a:rPr lang="en-US" smtClean="0"/>
-              <a:t>5/30/25</a:t>
+              <a:t>5/31/2025</a:t>
             </a:fld>
             <a:endParaRPr lang="en-US"/>
           </a:p>
@@ -2937,7 +2985,7 @@
           <p:cNvPr id="5" name="Footer Placeholder 4">
             <a:extLst>
               <a:ext uri="{FF2B5EF4-FFF2-40B4-BE49-F238E27FC236}">
-                <a16:creationId xmlns:a16="http://schemas.microsoft.com/office/drawing/2014/main" id="{90177C19-2367-79A0-241D-58ADB7342B91}"/>
+                <a16:creationId xmlns:a16="http://schemas.microsoft.com/office/drawing/2014/main" xmlns="" id="{90177C19-2367-79A0-241D-58ADB7342B91}"/>
               </a:ext>
             </a:extLst>
           </p:cNvPr>
@@ -2980,7 +3028,7 @@
           <p:cNvPr id="6" name="Slide Number Placeholder 5">
             <a:extLst>
               <a:ext uri="{FF2B5EF4-FFF2-40B4-BE49-F238E27FC236}">
-                <a16:creationId xmlns:a16="http://schemas.microsoft.com/office/drawing/2014/main" id="{A3D310DE-6D0C-FD47-9FFA-152A0DEB936D}"/>
+                <a16:creationId xmlns:a16="http://schemas.microsoft.com/office/drawing/2014/main" xmlns="" id="{A3D310DE-6D0C-FD47-9FFA-152A0DEB936D}"/>
               </a:ext>
             </a:extLst>
           </p:cNvPr>
@@ -3345,66 +3393,131 @@
       </p:grpSpPr>
       <p:sp>
         <p:nvSpPr>
-          <p:cNvPr id="2" name="Title 1">
-            <a:extLst>
-              <a:ext uri="{FF2B5EF4-FFF2-40B4-BE49-F238E27FC236}">
-                <a16:creationId xmlns:a16="http://schemas.microsoft.com/office/drawing/2014/main" id="{EC34633F-C91B-541D-1200-4A13B5E276F8}"/>
-              </a:ext>
-            </a:extLst>
-          </p:cNvPr>
-          <p:cNvSpPr>
-            <a:spLocks noGrp="1"/>
-          </p:cNvSpPr>
-          <p:nvPr>
-            <p:ph type="title"/>
-          </p:nvPr>
-        </p:nvSpPr>
-        <p:spPr/>
-        <p:txBody>
-          <a:bodyPr/>
-          <a:lstStyle/>
-          <a:p>
-            <a:r>
-              <a:rPr lang="en-US" dirty="0"/>
-              <a:t>LCA -&gt; SC</a:t>
-            </a:r>
-          </a:p>
-        </p:txBody>
-      </p:sp>
-      <p:pic>
-        <p:nvPicPr>
-          <p:cNvPr id="3" name="Picture 2">
-            <a:extLst>
-              <a:ext uri="{FF2B5EF4-FFF2-40B4-BE49-F238E27FC236}">
-                <a16:creationId xmlns:a16="http://schemas.microsoft.com/office/drawing/2014/main" id="{C78DE2A6-BF81-811D-E750-BEB42ACBF106}"/>
-              </a:ext>
-            </a:extLst>
-          </p:cNvPr>
-          <p:cNvPicPr>
-            <a:picLocks noChangeAspect="1"/>
-          </p:cNvPicPr>
+          <p:cNvPr id="3" name="Заголовок 2"/>
+          <p:cNvSpPr>
+            <a:spLocks noGrp="1"/>
+          </p:cNvSpPr>
+          <p:nvPr>
+            <p:ph type="ctrTitle"/>
+          </p:nvPr>
+        </p:nvSpPr>
+        <p:spPr>
+          <a:xfrm>
+            <a:off x="662940" y="1102769"/>
+            <a:ext cx="10866120" cy="2387600"/>
+          </a:xfrm>
+        </p:spPr>
+        <p:txBody>
+          <a:bodyPr>
+            <a:normAutofit fontScale="90000"/>
+          </a:bodyPr>
+          <a:lstStyle/>
+          <a:p>
+            <a:r>
+              <a:rPr lang="ru-RU" dirty="0"/>
+              <a:t>“Теория графов и ее приложения” </a:t>
+            </a:r>
+            <a:br>
+              <a:rPr lang="ru-RU" dirty="0"/>
+            </a:br>
+            <a:r>
+              <a:rPr lang="ru-RU" dirty="0"/>
+              <a:t>Командный проект</a:t>
+            </a:r>
+          </a:p>
+        </p:txBody>
+      </p:sp>
+      <p:sp>
+        <p:nvSpPr>
+          <p:cNvPr id="4" name="Подзаголовок 3"/>
+          <p:cNvSpPr>
+            <a:spLocks noGrp="1"/>
+          </p:cNvSpPr>
+          <p:nvPr>
+            <p:ph type="subTitle" idx="1"/>
+          </p:nvPr>
+        </p:nvSpPr>
+        <p:spPr>
+          <a:xfrm>
+            <a:off x="10256520" y="5202238"/>
+            <a:ext cx="1935480" cy="1655762"/>
+          </a:xfrm>
+        </p:spPr>
+        <p:txBody>
+          <a:bodyPr>
+            <a:normAutofit/>
+          </a:bodyPr>
+          <a:lstStyle/>
+          <a:p>
+            <a:pPr algn="r"/>
+            <a:r>
+              <a:rPr lang="ru-RU" sz="1800" dirty="0" smtClean="0"/>
+              <a:t>Выполнили</a:t>
+            </a:r>
+            <a:r>
+              <a:rPr lang="en-US" sz="1800" dirty="0" smtClean="0"/>
+              <a:t>:</a:t>
+            </a:r>
+          </a:p>
+          <a:p>
+            <a:pPr algn="r"/>
+            <a:r>
+              <a:rPr lang="ru-RU" sz="1800" dirty="0" smtClean="0"/>
+              <a:t>Плетка Даниил</a:t>
+            </a:r>
+          </a:p>
+          <a:p>
+            <a:pPr algn="r"/>
+            <a:r>
+              <a:rPr lang="ru-RU" sz="1800" dirty="0" smtClean="0"/>
+              <a:t>Михайлов Данил</a:t>
+            </a:r>
+            <a:endParaRPr lang="ru-RU" sz="1800" dirty="0"/>
+          </a:p>
+        </p:txBody>
+      </p:sp>
+      <p:sp>
+        <p:nvSpPr>
+          <p:cNvPr id="5" name="TextBox 4"/>
+          <p:cNvSpPr txBox="1"/>
           <p:nvPr/>
-        </p:nvPicPr>
-        <p:blipFill>
-          <a:blip r:embed="rId2"/>
-          <a:stretch>
-            <a:fillRect/>
-          </a:stretch>
-        </p:blipFill>
-        <p:spPr>
-          <a:xfrm>
-            <a:off x="1163172" y="2034922"/>
-            <a:ext cx="10190628" cy="2788155"/>
+        </p:nvSpPr>
+        <p:spPr>
+          <a:xfrm>
+            <a:off x="4907280" y="6273225"/>
+            <a:ext cx="2377440" cy="584775"/>
           </a:xfrm>
           <a:prstGeom prst="rect">
             <a:avLst/>
           </a:prstGeom>
-        </p:spPr>
-      </p:pic>
+          <a:noFill/>
+        </p:spPr>
+        <p:txBody>
+          <a:bodyPr wrap="square" rtlCol="0">
+            <a:spAutoFit/>
+          </a:bodyPr>
+          <a:lstStyle/>
+          <a:p>
+            <a:pPr algn="ctr"/>
+            <a:r>
+              <a:rPr lang="ru-RU" sz="1600" dirty="0" smtClean="0"/>
+              <a:t>Санкт-Петербург</a:t>
+            </a:r>
+          </a:p>
+          <a:p>
+            <a:pPr algn="ctr"/>
+            <a:r>
+              <a:rPr lang="ru-RU" sz="1600" dirty="0" smtClean="0"/>
+              <a:t>2025</a:t>
+            </a:r>
+            <a:endParaRPr lang="ru-RU" sz="1600" dirty="0"/>
+          </a:p>
+        </p:txBody>
+      </p:sp>
     </p:spTree>
     <p:extLst>
       <p:ext uri="{BB962C8B-B14F-4D97-AF65-F5344CB8AC3E}">
-        <p14:creationId xmlns:p14="http://schemas.microsoft.com/office/powerpoint/2010/main" val="778581203"/>
+        <p14:creationId xmlns:p14="http://schemas.microsoft.com/office/powerpoint/2010/main" val="4253231471"/>
       </p:ext>
     </p:extLst>
   </p:cSld>
@@ -3433,13 +3546,7 @@
       </p:grpSpPr>
       <p:sp>
         <p:nvSpPr>
-          <p:cNvPr id="2" name="Title 1">
-            <a:extLst>
-              <a:ext uri="{FF2B5EF4-FFF2-40B4-BE49-F238E27FC236}">
-                <a16:creationId xmlns:a16="http://schemas.microsoft.com/office/drawing/2014/main" id="{F5ECD825-C439-7039-23E6-60350D21DEAB}"/>
-              </a:ext>
-            </a:extLst>
-          </p:cNvPr>
+          <p:cNvPr id="2" name="Заголовок 1"/>
           <p:cNvSpPr>
             <a:spLocks noGrp="1"/>
           </p:cNvSpPr>
@@ -3453,46 +3560,101 @@
           <a:lstStyle/>
           <a:p>
             <a:r>
-              <a:rPr lang="en-US" dirty="0"/>
-              <a:t>SC, graph_8</a:t>
-            </a:r>
-          </a:p>
-        </p:txBody>
-      </p:sp>
-      <p:pic>
-        <p:nvPicPr>
-          <p:cNvPr id="4" name="Picture 3">
-            <a:extLst>
-              <a:ext uri="{FF2B5EF4-FFF2-40B4-BE49-F238E27FC236}">
-                <a16:creationId xmlns:a16="http://schemas.microsoft.com/office/drawing/2014/main" id="{A3A29C8B-8522-B51D-F23A-C5AFDE628FDB}"/>
-              </a:ext>
-            </a:extLst>
-          </p:cNvPr>
-          <p:cNvPicPr>
-            <a:picLocks noChangeAspect="1"/>
-          </p:cNvPicPr>
+              <a:rPr lang="ru-RU" dirty="0"/>
+              <a:t>Анализ структуры сети</a:t>
+            </a:r>
+          </a:p>
+        </p:txBody>
+      </p:sp>
+      <p:sp>
+        <p:nvSpPr>
+          <p:cNvPr id="3" name="Объект 2"/>
+          <p:cNvSpPr>
+            <a:spLocks noGrp="1"/>
+          </p:cNvSpPr>
+          <p:nvPr>
+            <p:ph idx="1"/>
+          </p:nvPr>
+        </p:nvSpPr>
+        <p:spPr/>
+        <p:txBody>
+          <a:bodyPr/>
+          <a:lstStyle/>
+          <a:p>
+            <a:r>
+              <a:rPr lang="ru-RU" dirty="0" smtClean="0"/>
+              <a:t>Находим наибольшую компоненту </a:t>
+            </a:r>
+            <a:r>
+              <a:rPr lang="ru-RU" dirty="0"/>
+              <a:t>слабой </a:t>
+            </a:r>
+            <a:r>
+              <a:rPr lang="ru-RU" dirty="0" smtClean="0"/>
+              <a:t>связности</a:t>
+            </a:r>
+          </a:p>
+          <a:p>
+            <a:r>
+              <a:rPr lang="ru-RU" dirty="0" smtClean="0"/>
+              <a:t>Считаем величины опираясь на 3 часть</a:t>
+            </a:r>
+            <a:endParaRPr lang="ru-RU" dirty="0"/>
+          </a:p>
+        </p:txBody>
+      </p:sp>
+      <p:sp>
+        <p:nvSpPr>
+          <p:cNvPr id="4" name="Заголовок 1"/>
+          <p:cNvSpPr txBox="1">
+            <a:spLocks/>
+          </p:cNvSpPr>
           <p:nvPr/>
-        </p:nvPicPr>
-        <p:blipFill>
-          <a:blip r:embed="rId2"/>
-          <a:stretch>
-            <a:fillRect/>
-          </a:stretch>
-        </p:blipFill>
-        <p:spPr>
-          <a:xfrm>
-            <a:off x="0" y="2279694"/>
-            <a:ext cx="12192000" cy="3233791"/>
+        </p:nvSpPr>
+        <p:spPr>
+          <a:xfrm>
+            <a:off x="7080068" y="365125"/>
+            <a:ext cx="4673529" cy="1325563"/>
           </a:xfrm>
           <a:prstGeom prst="rect">
             <a:avLst/>
           </a:prstGeom>
         </p:spPr>
-      </p:pic>
+        <p:txBody>
+          <a:bodyPr vert="horz" lIns="91440" tIns="45720" rIns="91440" bIns="45720" rtlCol="0" anchor="ctr">
+            <a:normAutofit/>
+          </a:bodyPr>
+          <a:lstStyle>
+            <a:lvl1pPr algn="l" defTabSz="914400" rtl="0" eaLnBrk="1" latinLnBrk="0" hangingPunct="1">
+              <a:lnSpc>
+                <a:spcPct val="90000"/>
+              </a:lnSpc>
+              <a:spcBef>
+                <a:spcPct val="0"/>
+              </a:spcBef>
+              <a:buNone/>
+              <a:defRPr sz="4400" kern="1200">
+                <a:solidFill>
+                  <a:schemeClr val="tx1"/>
+                </a:solidFill>
+                <a:latin typeface="+mj-lt"/>
+                <a:ea typeface="+mj-ea"/>
+                <a:cs typeface="+mj-cs"/>
+              </a:defRPr>
+            </a:lvl1pPr>
+          </a:lstStyle>
+          <a:p>
+            <a:r>
+              <a:rPr lang="ru-RU" sz="3600" dirty="0" smtClean="0"/>
+              <a:t>Часть 4</a:t>
+            </a:r>
+          </a:p>
+        </p:txBody>
+      </p:sp>
     </p:spTree>
     <p:extLst>
       <p:ext uri="{BB962C8B-B14F-4D97-AF65-F5344CB8AC3E}">
-        <p14:creationId xmlns:p14="http://schemas.microsoft.com/office/powerpoint/2010/main" val="4016728384"/>
+        <p14:creationId xmlns:p14="http://schemas.microsoft.com/office/powerpoint/2010/main" val="4240046697"/>
       </p:ext>
     </p:extLst>
   </p:cSld>
@@ -3521,13 +3683,7 @@
       </p:grpSpPr>
       <p:sp>
         <p:nvSpPr>
-          <p:cNvPr id="2" name="Title 1">
-            <a:extLst>
-              <a:ext uri="{FF2B5EF4-FFF2-40B4-BE49-F238E27FC236}">
-                <a16:creationId xmlns:a16="http://schemas.microsoft.com/office/drawing/2014/main" id="{7E75FED4-BA3D-0044-55EA-1518683CD07B}"/>
-              </a:ext>
-            </a:extLst>
-          </p:cNvPr>
+          <p:cNvPr id="2" name="Заголовок 1"/>
           <p:cNvSpPr>
             <a:spLocks noGrp="1"/>
           </p:cNvSpPr>
@@ -3535,23 +3691,233 @@
             <p:ph type="title"/>
           </p:nvPr>
         </p:nvSpPr>
-        <p:spPr/>
+        <p:spPr>
+          <a:xfrm>
+            <a:off x="459377" y="208371"/>
+            <a:ext cx="10515600" cy="1325563"/>
+          </a:xfrm>
+        </p:spPr>
         <p:txBody>
           <a:bodyPr/>
           <a:lstStyle/>
           <a:p>
             <a:r>
               <a:rPr lang="ru-RU" dirty="0"/>
-              <a:t>Выводы</a:t>
-            </a:r>
-            <a:endParaRPr lang="en-US" dirty="0"/>
+              <a:t>Анализ структуры сети</a:t>
+            </a:r>
+          </a:p>
+        </p:txBody>
+      </p:sp>
+      <p:pic>
+        <p:nvPicPr>
+          <p:cNvPr id="7" name="Рисунок 6"/>
+          <p:cNvPicPr>
+            <a:picLocks noChangeAspect="1"/>
+          </p:cNvPicPr>
+          <p:nvPr/>
+        </p:nvPicPr>
+        <p:blipFill>
+          <a:blip r:embed="rId2"/>
+          <a:stretch>
+            <a:fillRect/>
+          </a:stretch>
+        </p:blipFill>
+        <p:spPr>
+          <a:xfrm>
+            <a:off x="373481" y="1551933"/>
+            <a:ext cx="6363588" cy="4001058"/>
+          </a:xfrm>
+          <a:prstGeom prst="rect">
+            <a:avLst/>
+          </a:prstGeom>
+        </p:spPr>
+      </p:pic>
+      <p:pic>
+        <p:nvPicPr>
+          <p:cNvPr id="6" name="Рисунок 5"/>
+          <p:cNvPicPr>
+            <a:picLocks noChangeAspect="1"/>
+          </p:cNvPicPr>
+          <p:nvPr/>
+        </p:nvPicPr>
+        <p:blipFill>
+          <a:blip r:embed="rId3"/>
+          <a:stretch>
+            <a:fillRect/>
+          </a:stretch>
+        </p:blipFill>
+        <p:spPr>
+          <a:xfrm>
+            <a:off x="6029881" y="3344091"/>
+            <a:ext cx="5614568" cy="3332223"/>
+          </a:xfrm>
+          <a:prstGeom prst="rect">
+            <a:avLst/>
+          </a:prstGeom>
+        </p:spPr>
+      </p:pic>
+      <p:sp>
+        <p:nvSpPr>
+          <p:cNvPr id="9" name="Заголовок 1"/>
+          <p:cNvSpPr txBox="1">
+            <a:spLocks/>
+          </p:cNvSpPr>
+          <p:nvPr/>
+        </p:nvSpPr>
+        <p:spPr>
+          <a:xfrm>
+            <a:off x="10218129" y="0"/>
+            <a:ext cx="2041363" cy="1325563"/>
+          </a:xfrm>
+          <a:prstGeom prst="rect">
+            <a:avLst/>
+          </a:prstGeom>
+        </p:spPr>
+        <p:txBody>
+          <a:bodyPr vert="horz" lIns="91440" tIns="45720" rIns="91440" bIns="45720" rtlCol="0" anchor="ctr">
+            <a:normAutofit/>
+          </a:bodyPr>
+          <a:lstStyle>
+            <a:lvl1pPr algn="l" defTabSz="914400" rtl="0" eaLnBrk="1" latinLnBrk="0" hangingPunct="1">
+              <a:lnSpc>
+                <a:spcPct val="90000"/>
+              </a:lnSpc>
+              <a:spcBef>
+                <a:spcPct val="0"/>
+              </a:spcBef>
+              <a:buNone/>
+              <a:defRPr sz="4400" kern="1200">
+                <a:solidFill>
+                  <a:schemeClr val="tx1"/>
+                </a:solidFill>
+                <a:latin typeface="+mj-lt"/>
+                <a:ea typeface="+mj-ea"/>
+                <a:cs typeface="+mj-cs"/>
+              </a:defRPr>
+            </a:lvl1pPr>
+          </a:lstStyle>
+          <a:p>
+            <a:r>
+              <a:rPr lang="ru-RU" sz="3600" dirty="0" smtClean="0"/>
+              <a:t>Часть 5</a:t>
+            </a:r>
+            <a:endParaRPr lang="ru-RU" sz="3600" dirty="0"/>
+          </a:p>
+        </p:txBody>
+      </p:sp>
+      <p:sp>
+        <p:nvSpPr>
+          <p:cNvPr id="10" name="TextBox 9"/>
+          <p:cNvSpPr txBox="1"/>
+          <p:nvPr/>
+        </p:nvSpPr>
+        <p:spPr>
+          <a:xfrm>
+            <a:off x="8530045" y="1685109"/>
+            <a:ext cx="3507377" cy="2031325"/>
+          </a:xfrm>
+          <a:prstGeom prst="rect">
+            <a:avLst/>
+          </a:prstGeom>
+          <a:noFill/>
+        </p:spPr>
+        <p:txBody>
+          <a:bodyPr wrap="square" rtlCol="0">
+            <a:spAutoFit/>
+          </a:bodyPr>
+          <a:lstStyle/>
+          <a:p>
+            <a:r>
+              <a:rPr lang="ru-RU" dirty="0" smtClean="0"/>
+              <a:t>Хотим получить что-то такое</a:t>
+            </a:r>
+            <a:r>
+              <a:rPr lang="en-US" dirty="0" smtClean="0"/>
+              <a:t>:</a:t>
+            </a:r>
+            <a:endParaRPr lang="ru-RU" dirty="0" smtClean="0"/>
+          </a:p>
+          <a:p>
+            <a:endParaRPr lang="ru-RU" dirty="0"/>
+          </a:p>
+          <a:p>
+            <a:r>
+              <a:rPr lang="en-US" dirty="0" err="1"/>
+              <a:t>degree_counts</a:t>
+            </a:r>
+            <a:r>
+              <a:rPr lang="en-US" dirty="0"/>
+              <a:t> == {2: 2, 3: 2, 1: 1</a:t>
+            </a:r>
+            <a:r>
+              <a:rPr lang="en-US" dirty="0" smtClean="0"/>
+              <a:t>}</a:t>
+            </a:r>
+            <a:endParaRPr lang="ru-RU" dirty="0" smtClean="0"/>
+          </a:p>
+          <a:p>
+            <a:endParaRPr lang="ru-RU" dirty="0"/>
+          </a:p>
+          <a:p>
+            <a:pPr marL="285750" indent="-285750">
+              <a:buFont typeface="Arial" panose="020B0604020202020204" pitchFamily="34" charset="0"/>
+              <a:buChar char="•"/>
+            </a:pPr>
+            <a:r>
+              <a:rPr lang="ru-RU" dirty="0"/>
+              <a:t>2 вершины имеют степень </a:t>
+            </a:r>
+            <a:r>
+              <a:rPr lang="ru-RU" dirty="0" smtClean="0"/>
+              <a:t>2</a:t>
+            </a:r>
+          </a:p>
+          <a:p>
+            <a:pPr marL="285750" indent="-285750">
+              <a:buFont typeface="Arial" panose="020B0604020202020204" pitchFamily="34" charset="0"/>
+              <a:buChar char="•"/>
+            </a:pPr>
+            <a:r>
+              <a:rPr lang="ru-RU" dirty="0"/>
+              <a:t>2 вершины имеют</a:t>
+            </a:r>
+            <a:r>
+              <a:rPr lang="ru-RU" dirty="0" smtClean="0"/>
+              <a:t> </a:t>
+            </a:r>
+            <a:r>
+              <a:rPr lang="ru-RU" dirty="0"/>
+              <a:t>степень </a:t>
+            </a:r>
+            <a:r>
+              <a:rPr lang="ru-RU" dirty="0" smtClean="0"/>
+              <a:t>3</a:t>
+            </a:r>
+          </a:p>
+          <a:p>
+            <a:pPr marL="285750" indent="-285750">
+              <a:buFont typeface="Arial" panose="020B0604020202020204" pitchFamily="34" charset="0"/>
+              <a:buChar char="•"/>
+            </a:pPr>
+            <a:r>
+              <a:rPr lang="ru-RU" dirty="0"/>
+              <a:t>1 вершина имеют</a:t>
+            </a:r>
+            <a:r>
+              <a:rPr lang="ru-RU" dirty="0" smtClean="0"/>
+              <a:t> </a:t>
+            </a:r>
+            <a:r>
+              <a:rPr lang="ru-RU" dirty="0"/>
+              <a:t>степень 1</a:t>
+            </a:r>
           </a:p>
         </p:txBody>
       </p:sp>
     </p:spTree>
     <p:extLst>
       <p:ext uri="{BB962C8B-B14F-4D97-AF65-F5344CB8AC3E}">
-        <p14:creationId xmlns:p14="http://schemas.microsoft.com/office/powerpoint/2010/main" val="1017558136"/>
+        <p14:creationId xmlns:p14="http://schemas.microsoft.com/office/powerpoint/2010/main" val="1958642234"/>
       </p:ext>
     </p:extLst>
   </p:cSld>
@@ -3580,13 +3946,7 @@
       </p:grpSpPr>
       <p:sp>
         <p:nvSpPr>
-          <p:cNvPr id="2" name="Title 1">
-            <a:extLst>
-              <a:ext uri="{FF2B5EF4-FFF2-40B4-BE49-F238E27FC236}">
-                <a16:creationId xmlns:a16="http://schemas.microsoft.com/office/drawing/2014/main" id="{ADBFFA0D-F416-5165-C864-9DAC1A68A858}"/>
-              </a:ext>
-            </a:extLst>
-          </p:cNvPr>
+          <p:cNvPr id="2" name="Заголовок 1"/>
           <p:cNvSpPr>
             <a:spLocks noGrp="1"/>
           </p:cNvSpPr>
@@ -3599,22 +3959,9 @@
           <a:bodyPr/>
           <a:lstStyle/>
           <a:p>
-            <a:pPr marL="285750" indent="-285750"/>
-            <a:r>
-              <a:rPr lang="ru-RU" dirty="0"/>
-              <a:t>«Чем больше </a:t>
-            </a:r>
             <a:r>
               <a:rPr lang="en-US" dirty="0"/>
-              <a:t>k, </a:t>
-            </a:r>
-            <a:r>
-              <a:rPr lang="ru-RU" dirty="0"/>
-              <a:t>тем меньше ошибка</a:t>
-            </a:r>
-            <a:r>
-              <a:rPr lang="en-US" dirty="0"/>
-              <a:t>»</a:t>
+              <a:t>test_graph.txt</a:t>
             </a:r>
             <a:endParaRPr lang="ru-RU" dirty="0"/>
           </a:p>
@@ -3622,28 +3969,47 @@
       </p:sp>
       <p:pic>
         <p:nvPicPr>
-          <p:cNvPr id="3" name="Picture 2">
-            <a:extLst>
-              <a:ext uri="{FF2B5EF4-FFF2-40B4-BE49-F238E27FC236}">
-                <a16:creationId xmlns:a16="http://schemas.microsoft.com/office/drawing/2014/main" id="{0C203DB1-651F-A9A9-2A88-04DE924AFE98}"/>
-              </a:ext>
-            </a:extLst>
-          </p:cNvPr>
+          <p:cNvPr id="4" name="Объект 3"/>
+          <p:cNvPicPr>
+            <a:picLocks noGrp="1" noChangeAspect="1"/>
+          </p:cNvPicPr>
+          <p:nvPr>
+            <p:ph idx="1"/>
+          </p:nvPr>
+        </p:nvPicPr>
+        <p:blipFill rotWithShape="1">
+          <a:blip r:embed="rId2"/>
+          <a:srcRect l="1287"/>
+          <a:stretch/>
+        </p:blipFill>
+        <p:spPr>
+          <a:xfrm>
+            <a:off x="838200" y="2400390"/>
+            <a:ext cx="9849944" cy="4351338"/>
+          </a:xfrm>
+          <a:prstGeom prst="rect">
+            <a:avLst/>
+          </a:prstGeom>
+        </p:spPr>
+      </p:pic>
+      <p:pic>
+        <p:nvPicPr>
+          <p:cNvPr id="5" name="Рисунок 4"/>
           <p:cNvPicPr>
             <a:picLocks noChangeAspect="1"/>
           </p:cNvPicPr>
           <p:nvPr/>
         </p:nvPicPr>
         <p:blipFill>
-          <a:blip r:embed="rId2"/>
+          <a:blip r:embed="rId3"/>
           <a:stretch>
             <a:fillRect/>
           </a:stretch>
         </p:blipFill>
         <p:spPr>
           <a:xfrm>
-            <a:off x="992909" y="1227313"/>
-            <a:ext cx="10206181" cy="5265562"/>
+            <a:off x="8660675" y="0"/>
+            <a:ext cx="3531326" cy="2450308"/>
           </a:xfrm>
           <a:prstGeom prst="rect">
             <a:avLst/>
@@ -3653,7 +4019,7 @@
     </p:spTree>
     <p:extLst>
       <p:ext uri="{BB962C8B-B14F-4D97-AF65-F5344CB8AC3E}">
-        <p14:creationId xmlns:p14="http://schemas.microsoft.com/office/powerpoint/2010/main" val="2225980345"/>
+        <p14:creationId xmlns:p14="http://schemas.microsoft.com/office/powerpoint/2010/main" val="2361473640"/>
       </p:ext>
     </p:extLst>
   </p:cSld>
@@ -3682,13 +4048,7 @@
       </p:grpSpPr>
       <p:sp>
         <p:nvSpPr>
-          <p:cNvPr id="2" name="Title 1">
-            <a:extLst>
-              <a:ext uri="{FF2B5EF4-FFF2-40B4-BE49-F238E27FC236}">
-                <a16:creationId xmlns:a16="http://schemas.microsoft.com/office/drawing/2014/main" id="{0C631C54-E4AC-D8A7-1B34-76236A6D661A}"/>
-              </a:ext>
-            </a:extLst>
-          </p:cNvPr>
+          <p:cNvPr id="2" name="Заголовок 1"/>
           <p:cNvSpPr>
             <a:spLocks noGrp="1"/>
           </p:cNvSpPr>
@@ -3702,54 +4062,16 @@
           <a:lstStyle/>
           <a:p>
             <a:r>
-              <a:rPr lang="ru-RU" dirty="0"/>
-              <a:t>«</a:t>
-            </a:r>
-            <a:r>
               <a:rPr lang="en-US" dirty="0"/>
-              <a:t>random – </a:t>
-            </a:r>
-            <a:r>
-              <a:rPr lang="ru-RU" dirty="0"/>
-              <a:t>плохо, </a:t>
-            </a:r>
-            <a:r>
-              <a:rPr lang="en-US" dirty="0"/>
-              <a:t>highest deg ≈</a:t>
-            </a:r>
-            <a:r>
-              <a:rPr lang="ru-RU" dirty="0"/>
-              <a:t> </a:t>
-            </a:r>
-            <a:r>
-              <a:rPr lang="en-US" dirty="0"/>
-              <a:t>best </a:t>
-            </a:r>
-            <a:r>
-              <a:rPr lang="en-US" dirty="0" err="1"/>
-              <a:t>cov</a:t>
-            </a:r>
-            <a:r>
-              <a:rPr lang="en-US" dirty="0"/>
-              <a:t>.</a:t>
-            </a:r>
-            <a:r>
-              <a:rPr lang="ru-RU" dirty="0"/>
-              <a:t>»</a:t>
-            </a:r>
-            <a:endParaRPr lang="en-US" dirty="0"/>
+              <a:t>CA-AstroPh.txt</a:t>
+            </a:r>
+            <a:endParaRPr lang="ru-RU" dirty="0"/>
           </a:p>
         </p:txBody>
       </p:sp>
       <p:pic>
         <p:nvPicPr>
-          <p:cNvPr id="4" name="Picture 3">
-            <a:extLst>
-              <a:ext uri="{FF2B5EF4-FFF2-40B4-BE49-F238E27FC236}">
-                <a16:creationId xmlns:a16="http://schemas.microsoft.com/office/drawing/2014/main" id="{927EBC07-599A-A784-1C4A-885CEE0BB65E}"/>
-              </a:ext>
-            </a:extLst>
-          </p:cNvPr>
+          <p:cNvPr id="4" name="Рисунок 3"/>
           <p:cNvPicPr>
             <a:picLocks noChangeAspect="1"/>
           </p:cNvPicPr>
@@ -3763,8 +4085,32 @@
         </p:blipFill>
         <p:spPr>
           <a:xfrm>
-            <a:off x="838200" y="1418983"/>
-            <a:ext cx="9885218" cy="5099971"/>
+            <a:off x="0" y="2469154"/>
+            <a:ext cx="9731829" cy="4314174"/>
+          </a:xfrm>
+          <a:prstGeom prst="rect">
+            <a:avLst/>
+          </a:prstGeom>
+        </p:spPr>
+      </p:pic>
+      <p:pic>
+        <p:nvPicPr>
+          <p:cNvPr id="5" name="Рисунок 4"/>
+          <p:cNvPicPr>
+            <a:picLocks noChangeAspect="1"/>
+          </p:cNvPicPr>
+          <p:nvPr/>
+        </p:nvPicPr>
+        <p:blipFill>
+          <a:blip r:embed="rId3"/>
+          <a:stretch>
+            <a:fillRect/>
+          </a:stretch>
+        </p:blipFill>
+        <p:spPr>
+          <a:xfrm>
+            <a:off x="8455448" y="0"/>
+            <a:ext cx="3736552" cy="2690949"/>
           </a:xfrm>
           <a:prstGeom prst="rect">
             <a:avLst/>
@@ -3774,7 +4120,7 @@
     </p:spTree>
     <p:extLst>
       <p:ext uri="{BB962C8B-B14F-4D97-AF65-F5344CB8AC3E}">
-        <p14:creationId xmlns:p14="http://schemas.microsoft.com/office/powerpoint/2010/main" val="1889584106"/>
+        <p14:creationId xmlns:p14="http://schemas.microsoft.com/office/powerpoint/2010/main" val="1201941344"/>
       </p:ext>
     </p:extLst>
   </p:cSld>
@@ -3803,13 +4149,7 @@
       </p:grpSpPr>
       <p:sp>
         <p:nvSpPr>
-          <p:cNvPr id="2" name="Title 1">
-            <a:extLst>
-              <a:ext uri="{FF2B5EF4-FFF2-40B4-BE49-F238E27FC236}">
-                <a16:creationId xmlns:a16="http://schemas.microsoft.com/office/drawing/2014/main" id="{8BBA76AE-94FC-94B7-D83D-F37CE62496F0}"/>
-              </a:ext>
-            </a:extLst>
-          </p:cNvPr>
+          <p:cNvPr id="2" name="Заголовок 1"/>
           <p:cNvSpPr>
             <a:spLocks noGrp="1"/>
           </p:cNvSpPr>
@@ -3823,38 +4163,16 @@
           <a:lstStyle/>
           <a:p>
             <a:r>
-              <a:rPr lang="ru-RU" dirty="0"/>
-              <a:t>«</a:t>
-            </a:r>
-            <a:r>
               <a:rPr lang="en-US" dirty="0"/>
-              <a:t>SC </a:t>
-            </a:r>
-            <a:r>
-              <a:rPr lang="ru-RU" dirty="0"/>
-              <a:t>точнее, чем </a:t>
-            </a:r>
-            <a:r>
-              <a:rPr lang="en-US" dirty="0"/>
-              <a:t>BASIC</a:t>
-            </a:r>
-            <a:r>
-              <a:rPr lang="ru-RU" dirty="0"/>
-              <a:t>»</a:t>
-            </a:r>
-            <a:endParaRPr lang="en-US" dirty="0"/>
+              <a:t>Email-EuAll.txt</a:t>
+            </a:r>
+            <a:endParaRPr lang="ru-RU" dirty="0"/>
           </a:p>
         </p:txBody>
       </p:sp>
       <p:pic>
         <p:nvPicPr>
-          <p:cNvPr id="4" name="Picture 3">
-            <a:extLst>
-              <a:ext uri="{FF2B5EF4-FFF2-40B4-BE49-F238E27FC236}">
-                <a16:creationId xmlns:a16="http://schemas.microsoft.com/office/drawing/2014/main" id="{BBD84003-7E97-39E0-476A-2FE6AEE4F662}"/>
-              </a:ext>
-            </a:extLst>
-          </p:cNvPr>
+          <p:cNvPr id="5" name="Рисунок 4"/>
           <p:cNvPicPr>
             <a:picLocks noChangeAspect="1"/>
           </p:cNvPicPr>
@@ -3868,8 +4186,32 @@
         </p:blipFill>
         <p:spPr>
           <a:xfrm>
-            <a:off x="838200" y="1452358"/>
-            <a:ext cx="10477697" cy="5405642"/>
+            <a:off x="0" y="2464033"/>
+            <a:ext cx="9829800" cy="4393967"/>
+          </a:xfrm>
+          <a:prstGeom prst="rect">
+            <a:avLst/>
+          </a:prstGeom>
+        </p:spPr>
+      </p:pic>
+      <p:pic>
+        <p:nvPicPr>
+          <p:cNvPr id="6" name="Рисунок 5"/>
+          <p:cNvPicPr>
+            <a:picLocks noChangeAspect="1"/>
+          </p:cNvPicPr>
+          <p:nvPr/>
+        </p:nvPicPr>
+        <p:blipFill>
+          <a:blip r:embed="rId3"/>
+          <a:stretch>
+            <a:fillRect/>
+          </a:stretch>
+        </p:blipFill>
+        <p:spPr>
+          <a:xfrm>
+            <a:off x="8856617" y="0"/>
+            <a:ext cx="3335383" cy="2636213"/>
           </a:xfrm>
           <a:prstGeom prst="rect">
             <a:avLst/>
@@ -3879,7 +4221,7 @@
     </p:spTree>
     <p:extLst>
       <p:ext uri="{BB962C8B-B14F-4D97-AF65-F5344CB8AC3E}">
-        <p14:creationId xmlns:p14="http://schemas.microsoft.com/office/powerpoint/2010/main" val="2562799789"/>
+        <p14:creationId xmlns:p14="http://schemas.microsoft.com/office/powerpoint/2010/main" val="1220921266"/>
       </p:ext>
     </p:extLst>
   </p:cSld>
@@ -3908,13 +4250,7 @@
       </p:grpSpPr>
       <p:sp>
         <p:nvSpPr>
-          <p:cNvPr id="2" name="Title 1">
-            <a:extLst>
-              <a:ext uri="{FF2B5EF4-FFF2-40B4-BE49-F238E27FC236}">
-                <a16:creationId xmlns:a16="http://schemas.microsoft.com/office/drawing/2014/main" id="{AD1516AC-33EF-C906-D3C5-2848A8F78C7F}"/>
-              </a:ext>
-            </a:extLst>
-          </p:cNvPr>
+          <p:cNvPr id="2" name="Заголовок 1"/>
           <p:cNvSpPr>
             <a:spLocks noGrp="1"/>
           </p:cNvSpPr>
@@ -3922,28 +4258,27 @@
             <p:ph type="title"/>
           </p:nvPr>
         </p:nvSpPr>
-        <p:spPr/>
+        <p:spPr>
+          <a:xfrm>
+            <a:off x="838200" y="365125"/>
+            <a:ext cx="3237411" cy="1325563"/>
+          </a:xfrm>
+        </p:spPr>
         <p:txBody>
           <a:bodyPr/>
           <a:lstStyle/>
           <a:p>
             <a:r>
-              <a:rPr lang="ru-RU" dirty="0"/>
-              <a:t>Общие графики точности</a:t>
-            </a:r>
-            <a:endParaRPr lang="en-US" dirty="0"/>
+              <a:rPr lang="en-US" dirty="0"/>
+              <a:t>CA-GrQc.txt</a:t>
+            </a:r>
+            <a:endParaRPr lang="ru-RU" dirty="0"/>
           </a:p>
         </p:txBody>
       </p:sp>
       <p:pic>
         <p:nvPicPr>
-          <p:cNvPr id="4" name="Picture 3">
-            <a:extLst>
-              <a:ext uri="{FF2B5EF4-FFF2-40B4-BE49-F238E27FC236}">
-                <a16:creationId xmlns:a16="http://schemas.microsoft.com/office/drawing/2014/main" id="{466DC8DD-50B5-FCD4-56B0-C74DFD015E76}"/>
-              </a:ext>
-            </a:extLst>
-          </p:cNvPr>
+          <p:cNvPr id="4" name="Рисунок 3"/>
           <p:cNvPicPr>
             <a:picLocks noChangeAspect="1"/>
           </p:cNvPicPr>
@@ -3957,8 +4292,32 @@
         </p:blipFill>
         <p:spPr>
           <a:xfrm>
-            <a:off x="1037936" y="1273774"/>
-            <a:ext cx="10116127" cy="5219101"/>
+            <a:off x="1" y="2990280"/>
+            <a:ext cx="8432074" cy="3867720"/>
+          </a:xfrm>
+          <a:prstGeom prst="rect">
+            <a:avLst/>
+          </a:prstGeom>
+        </p:spPr>
+      </p:pic>
+      <p:pic>
+        <p:nvPicPr>
+          <p:cNvPr id="5" name="Рисунок 4"/>
+          <p:cNvPicPr>
+            <a:picLocks noChangeAspect="1"/>
+          </p:cNvPicPr>
+          <p:nvPr/>
+        </p:nvPicPr>
+        <p:blipFill>
+          <a:blip r:embed="rId3"/>
+          <a:stretch>
+            <a:fillRect/>
+          </a:stretch>
+        </p:blipFill>
+        <p:spPr>
+          <a:xfrm>
+            <a:off x="7966901" y="0"/>
+            <a:ext cx="4225099" cy="3165338"/>
           </a:xfrm>
           <a:prstGeom prst="rect">
             <a:avLst/>
@@ -3968,7 +4327,7 @@
     </p:spTree>
     <p:extLst>
       <p:ext uri="{BB962C8B-B14F-4D97-AF65-F5344CB8AC3E}">
-        <p14:creationId xmlns:p14="http://schemas.microsoft.com/office/powerpoint/2010/main" val="1306460401"/>
+        <p14:creationId xmlns:p14="http://schemas.microsoft.com/office/powerpoint/2010/main" val="2634908648"/>
       </p:ext>
     </p:extLst>
   </p:cSld>
@@ -3997,13 +4356,7 @@
       </p:grpSpPr>
       <p:sp>
         <p:nvSpPr>
-          <p:cNvPr id="2" name="Title 1">
-            <a:extLst>
-              <a:ext uri="{FF2B5EF4-FFF2-40B4-BE49-F238E27FC236}">
-                <a16:creationId xmlns:a16="http://schemas.microsoft.com/office/drawing/2014/main" id="{5AC25505-2F1F-03B1-90A1-04FAFA12ABE9}"/>
-              </a:ext>
-            </a:extLst>
-          </p:cNvPr>
+          <p:cNvPr id="2" name="Заголовок 1"/>
           <p:cNvSpPr>
             <a:spLocks noGrp="1"/>
           </p:cNvSpPr>
@@ -4018,40 +4371,63 @@
           <a:p>
             <a:r>
               <a:rPr lang="ru-RU" dirty="0"/>
-              <a:t>«больше всего времени на подготовку</a:t>
-            </a:r>
-            <a:br>
-              <a:rPr lang="en-US" dirty="0"/>
-            </a:br>
-            <a:r>
-              <a:rPr lang="en-US" dirty="0"/>
-              <a:t>	</a:t>
-            </a:r>
-            <a:r>
-              <a:rPr lang="ru-RU" dirty="0"/>
-              <a:t>(</a:t>
-            </a:r>
-            <a:r>
-              <a:rPr lang="en-US" dirty="0"/>
-              <a:t>BFS -&gt; d(v, landmark)</a:t>
-            </a:r>
-            <a:r>
-              <a:rPr lang="ru-RU" dirty="0"/>
-              <a:t>»</a:t>
-            </a:r>
-            <a:endParaRPr lang="en-US" dirty="0"/>
+              <a:t>Анализ структуры сети</a:t>
+            </a:r>
+          </a:p>
+        </p:txBody>
+      </p:sp>
+      <p:sp>
+        <p:nvSpPr>
+          <p:cNvPr id="4" name="Заголовок 1"/>
+          <p:cNvSpPr txBox="1">
+            <a:spLocks/>
+          </p:cNvSpPr>
+          <p:nvPr/>
+        </p:nvSpPr>
+        <p:spPr>
+          <a:xfrm>
+            <a:off x="10218129" y="0"/>
+            <a:ext cx="2041363" cy="1325563"/>
+          </a:xfrm>
+          <a:prstGeom prst="rect">
+            <a:avLst/>
+          </a:prstGeom>
+        </p:spPr>
+        <p:txBody>
+          <a:bodyPr vert="horz" lIns="91440" tIns="45720" rIns="91440" bIns="45720" rtlCol="0" anchor="ctr">
+            <a:normAutofit/>
+          </a:bodyPr>
+          <a:lstStyle>
+            <a:lvl1pPr algn="l" defTabSz="914400" rtl="0" eaLnBrk="1" latinLnBrk="0" hangingPunct="1">
+              <a:lnSpc>
+                <a:spcPct val="90000"/>
+              </a:lnSpc>
+              <a:spcBef>
+                <a:spcPct val="0"/>
+              </a:spcBef>
+              <a:buNone/>
+              <a:defRPr sz="4400" kern="1200">
+                <a:solidFill>
+                  <a:schemeClr val="tx1"/>
+                </a:solidFill>
+                <a:latin typeface="+mj-lt"/>
+                <a:ea typeface="+mj-ea"/>
+                <a:cs typeface="+mj-cs"/>
+              </a:defRPr>
+            </a:lvl1pPr>
+          </a:lstStyle>
+          <a:p>
+            <a:r>
+              <a:rPr lang="ru-RU" sz="3600" dirty="0" smtClean="0"/>
+              <a:t>Часть В</a:t>
+            </a:r>
+            <a:endParaRPr lang="ru-RU" sz="3600" dirty="0"/>
           </a:p>
         </p:txBody>
       </p:sp>
       <p:pic>
         <p:nvPicPr>
-          <p:cNvPr id="4" name="Picture 3">
-            <a:extLst>
-              <a:ext uri="{FF2B5EF4-FFF2-40B4-BE49-F238E27FC236}">
-                <a16:creationId xmlns:a16="http://schemas.microsoft.com/office/drawing/2014/main" id="{CF845D17-27EC-8755-D41C-1921268F531E}"/>
-              </a:ext>
-            </a:extLst>
-          </p:cNvPr>
+          <p:cNvPr id="5" name="Рисунок 4"/>
           <p:cNvPicPr>
             <a:picLocks noChangeAspect="1"/>
           </p:cNvPicPr>
@@ -4065,18 +4441,76 @@
         </p:blipFill>
         <p:spPr>
           <a:xfrm>
-            <a:off x="838200" y="1690688"/>
-            <a:ext cx="9581120" cy="4943081"/>
+            <a:off x="785949" y="2523030"/>
+            <a:ext cx="10879182" cy="3947248"/>
           </a:xfrm>
           <a:prstGeom prst="rect">
             <a:avLst/>
           </a:prstGeom>
         </p:spPr>
       </p:pic>
+      <p:sp>
+        <p:nvSpPr>
+          <p:cNvPr id="6" name="TextBox 5"/>
+          <p:cNvSpPr txBox="1"/>
+          <p:nvPr/>
+        </p:nvSpPr>
+        <p:spPr>
+          <a:xfrm>
+            <a:off x="838200" y="1922193"/>
+            <a:ext cx="7776754" cy="369332"/>
+          </a:xfrm>
+          <a:prstGeom prst="rect">
+            <a:avLst/>
+          </a:prstGeom>
+          <a:noFill/>
+        </p:spPr>
+        <p:txBody>
+          <a:bodyPr wrap="square" rtlCol="0">
+            <a:spAutoFit/>
+          </a:bodyPr>
+          <a:lstStyle/>
+          <a:p>
+            <a:r>
+              <a:rPr lang="ru-RU" dirty="0" smtClean="0"/>
+              <a:t>Например, можно задать </a:t>
+            </a:r>
+            <a:r>
+              <a:rPr lang="en-US" dirty="0" err="1" smtClean="0"/>
+              <a:t>x_values</a:t>
+            </a:r>
+            <a:r>
+              <a:rPr lang="ru-RU" dirty="0"/>
+              <a:t> </a:t>
+            </a:r>
+            <a:r>
+              <a:rPr lang="ru-RU" dirty="0" smtClean="0"/>
+              <a:t>следующим образом </a:t>
+            </a:r>
+            <a:r>
+              <a:rPr lang="en-US" dirty="0" smtClean="0"/>
+              <a:t>range(1</a:t>
+            </a:r>
+            <a:r>
+              <a:rPr lang="en-US" dirty="0"/>
+              <a:t>, 101, </a:t>
+            </a:r>
+            <a:r>
+              <a:rPr lang="ru-RU" dirty="0" smtClean="0"/>
+              <a:t>10</a:t>
+            </a:r>
+            <a:r>
+              <a:rPr lang="en-US" dirty="0" smtClean="0"/>
+              <a:t>)</a:t>
+            </a:r>
+            <a:endParaRPr lang="ru-RU" dirty="0"/>
+          </a:p>
+        </p:txBody>
+      </p:sp>
     </p:spTree>
     <p:extLst>
       <p:ext uri="{BB962C8B-B14F-4D97-AF65-F5344CB8AC3E}">
-        <p14:creationId xmlns:p14="http://schemas.microsoft.com/office/powerpoint/2010/main" val="3175243423"/>
+        <p14:creationId xmlns:p14="http://schemas.microsoft.com/office/powerpoint/2010/main" val="344189652"/>
       </p:ext>
     </p:extLst>
   </p:cSld>
@@ -4105,13 +4539,7 @@
       </p:grpSpPr>
       <p:sp>
         <p:nvSpPr>
-          <p:cNvPr id="2" name="Title 1">
-            <a:extLst>
-              <a:ext uri="{FF2B5EF4-FFF2-40B4-BE49-F238E27FC236}">
-                <a16:creationId xmlns:a16="http://schemas.microsoft.com/office/drawing/2014/main" id="{755CFD76-7095-B563-9C4C-ED80BF88F3F8}"/>
-              </a:ext>
-            </a:extLst>
-          </p:cNvPr>
+          <p:cNvPr id="2" name="Заголовок 1"/>
           <p:cNvSpPr>
             <a:spLocks noGrp="1"/>
           </p:cNvSpPr>
@@ -4125,41 +4553,16 @@
           <a:lstStyle/>
           <a:p>
             <a:r>
-              <a:rPr lang="ru-RU" dirty="0"/>
-              <a:t>«больше всего времени на подготовку</a:t>
-            </a:r>
-            <a:br>
               <a:rPr lang="en-US" dirty="0"/>
-            </a:br>
-            <a:r>
-              <a:rPr lang="en-US" dirty="0"/>
-              <a:t>	</a:t>
-            </a:r>
-            <a:r>
-              <a:rPr lang="ru-RU" dirty="0"/>
-              <a:t>(</a:t>
-            </a:r>
-            <a:r>
-              <a:rPr lang="en-US" dirty="0"/>
-              <a:t>SPT)</a:t>
-            </a:r>
-            <a:r>
-              <a:rPr lang="ru-RU" dirty="0"/>
-              <a:t>»</a:t>
-            </a:r>
-            <a:endParaRPr lang="en-US" dirty="0"/>
+              <a:t>test_graph.txt</a:t>
+            </a:r>
+            <a:endParaRPr lang="ru-RU" dirty="0"/>
           </a:p>
         </p:txBody>
       </p:sp>
       <p:pic>
         <p:nvPicPr>
-          <p:cNvPr id="3" name="Picture 2">
-            <a:extLst>
-              <a:ext uri="{FF2B5EF4-FFF2-40B4-BE49-F238E27FC236}">
-                <a16:creationId xmlns:a16="http://schemas.microsoft.com/office/drawing/2014/main" id="{3059EA7E-7D40-7647-E892-8A766FF71D5D}"/>
-              </a:ext>
-            </a:extLst>
-          </p:cNvPr>
+          <p:cNvPr id="4" name="Рисунок 3"/>
           <p:cNvPicPr>
             <a:picLocks noChangeAspect="1"/>
           </p:cNvPicPr>
@@ -4173,8 +4576,8 @@
         </p:blipFill>
         <p:spPr>
           <a:xfrm>
-            <a:off x="685799" y="1690688"/>
-            <a:ext cx="9963727" cy="5140475"/>
+            <a:off x="2229394" y="2072729"/>
+            <a:ext cx="7397931" cy="4633869"/>
           </a:xfrm>
           <a:prstGeom prst="rect">
             <a:avLst/>
@@ -4184,7 +4587,7 @@
     </p:spTree>
     <p:extLst>
       <p:ext uri="{BB962C8B-B14F-4D97-AF65-F5344CB8AC3E}">
-        <p14:creationId xmlns:p14="http://schemas.microsoft.com/office/powerpoint/2010/main" val="1149846118"/>
+        <p14:creationId xmlns:p14="http://schemas.microsoft.com/office/powerpoint/2010/main" val="2259337799"/>
       </p:ext>
     </p:extLst>
   </p:cSld>
@@ -4213,13 +4616,7 @@
       </p:grpSpPr>
       <p:sp>
         <p:nvSpPr>
-          <p:cNvPr id="2" name="Title 1">
-            <a:extLst>
-              <a:ext uri="{FF2B5EF4-FFF2-40B4-BE49-F238E27FC236}">
-                <a16:creationId xmlns:a16="http://schemas.microsoft.com/office/drawing/2014/main" id="{E462399C-D3D2-1C76-C99D-DE975D803ECC}"/>
-              </a:ext>
-            </a:extLst>
-          </p:cNvPr>
+          <p:cNvPr id="2" name="Заголовок 1"/>
           <p:cNvSpPr>
             <a:spLocks noGrp="1"/>
           </p:cNvSpPr>
@@ -4233,30 +4630,16 @@
           <a:lstStyle/>
           <a:p>
             <a:r>
-              <a:rPr lang="ru-RU" dirty="0"/>
-              <a:t>Общие графики</a:t>
-            </a:r>
-            <a:r>
               <a:rPr lang="en-US" dirty="0"/>
-              <a:t> </a:t>
-            </a:r>
-            <a:r>
-              <a:rPr lang="ru-RU" dirty="0"/>
-              <a:t>времени</a:t>
-            </a:r>
-            <a:endParaRPr lang="en-US" dirty="0"/>
+              <a:t>CA-AstroPh.txt</a:t>
+            </a:r>
+            <a:endParaRPr lang="ru-RU" dirty="0"/>
           </a:p>
         </p:txBody>
       </p:sp>
       <p:pic>
         <p:nvPicPr>
-          <p:cNvPr id="4" name="Picture 3">
-            <a:extLst>
-              <a:ext uri="{FF2B5EF4-FFF2-40B4-BE49-F238E27FC236}">
-                <a16:creationId xmlns:a16="http://schemas.microsoft.com/office/drawing/2014/main" id="{248234BF-D57F-D595-6233-0320370AF913}"/>
-              </a:ext>
-            </a:extLst>
-          </p:cNvPr>
+          <p:cNvPr id="4" name="Рисунок 3"/>
           <p:cNvPicPr>
             <a:picLocks noChangeAspect="1"/>
           </p:cNvPicPr>
@@ -4270,8 +4653,8 @@
         </p:blipFill>
         <p:spPr>
           <a:xfrm>
-            <a:off x="1134643" y="1373559"/>
-            <a:ext cx="9922714" cy="5119316"/>
+            <a:off x="1851606" y="1795399"/>
+            <a:ext cx="7880223" cy="4820843"/>
           </a:xfrm>
           <a:prstGeom prst="rect">
             <a:avLst/>
@@ -4281,7 +4664,84 @@
     </p:spTree>
     <p:extLst>
       <p:ext uri="{BB962C8B-B14F-4D97-AF65-F5344CB8AC3E}">
-        <p14:creationId xmlns:p14="http://schemas.microsoft.com/office/powerpoint/2010/main" val="801357139"/>
+        <p14:creationId xmlns:p14="http://schemas.microsoft.com/office/powerpoint/2010/main" val="110928082"/>
+      </p:ext>
+    </p:extLst>
+  </p:cSld>
+  <p:clrMapOvr>
+    <a:masterClrMapping/>
+  </p:clrMapOvr>
+</p:sld>
+</file>
+
+<file path=ppt/slides/slide19.xml><?xml version="1.0" encoding="utf-8"?>
+<p:sld xmlns:a="http://schemas.openxmlformats.org/drawingml/2006/main" xmlns:r="http://schemas.openxmlformats.org/officeDocument/2006/relationships" xmlns:p="http://schemas.openxmlformats.org/presentationml/2006/main">
+  <p:cSld>
+    <p:spTree>
+      <p:nvGrpSpPr>
+        <p:cNvPr id="1" name=""/>
+        <p:cNvGrpSpPr/>
+        <p:nvPr/>
+      </p:nvGrpSpPr>
+      <p:grpSpPr>
+        <a:xfrm>
+          <a:off x="0" y="0"/>
+          <a:ext cx="0" cy="0"/>
+          <a:chOff x="0" y="0"/>
+          <a:chExt cx="0" cy="0"/>
+        </a:xfrm>
+      </p:grpSpPr>
+      <p:sp>
+        <p:nvSpPr>
+          <p:cNvPr id="2" name="Заголовок 1"/>
+          <p:cNvSpPr>
+            <a:spLocks noGrp="1"/>
+          </p:cNvSpPr>
+          <p:nvPr>
+            <p:ph type="title"/>
+          </p:nvPr>
+        </p:nvSpPr>
+        <p:spPr/>
+        <p:txBody>
+          <a:bodyPr/>
+          <a:lstStyle/>
+          <a:p>
+            <a:r>
+              <a:rPr lang="en-US" dirty="0"/>
+              <a:t>Email-EuAll.txt</a:t>
+            </a:r>
+            <a:endParaRPr lang="ru-RU" dirty="0"/>
+          </a:p>
+        </p:txBody>
+      </p:sp>
+      <p:pic>
+        <p:nvPicPr>
+          <p:cNvPr id="4" name="Рисунок 3"/>
+          <p:cNvPicPr>
+            <a:picLocks noChangeAspect="1"/>
+          </p:cNvPicPr>
+          <p:nvPr/>
+        </p:nvPicPr>
+        <p:blipFill>
+          <a:blip r:embed="rId2"/>
+          <a:stretch>
+            <a:fillRect/>
+          </a:stretch>
+        </p:blipFill>
+        <p:spPr>
+          <a:xfrm>
+            <a:off x="1589314" y="1938097"/>
+            <a:ext cx="7861663" cy="4850814"/>
+          </a:xfrm>
+          <a:prstGeom prst="rect">
+            <a:avLst/>
+          </a:prstGeom>
+        </p:spPr>
+      </p:pic>
+    </p:spTree>
+    <p:extLst>
+      <p:ext uri="{BB962C8B-B14F-4D97-AF65-F5344CB8AC3E}">
+        <p14:creationId xmlns:p14="http://schemas.microsoft.com/office/powerpoint/2010/main" val="3862157462"/>
       </p:ext>
     </p:extLst>
   </p:cSld>
@@ -4308,44 +4768,9 @@
           <a:chExt cx="0" cy="0"/>
         </a:xfrm>
       </p:grpSpPr>
-      <p:sp>
-        <p:nvSpPr>
-          <p:cNvPr id="2" name="Title 1">
-            <a:extLst>
-              <a:ext uri="{FF2B5EF4-FFF2-40B4-BE49-F238E27FC236}">
-                <a16:creationId xmlns:a16="http://schemas.microsoft.com/office/drawing/2014/main" id="{DD332D86-80B8-7485-1916-0651E4F7E452}"/>
-              </a:ext>
-            </a:extLst>
-          </p:cNvPr>
-          <p:cNvSpPr>
-            <a:spLocks noGrp="1"/>
-          </p:cNvSpPr>
-          <p:nvPr>
-            <p:ph type="title"/>
-          </p:nvPr>
-        </p:nvSpPr>
-        <p:spPr/>
-        <p:txBody>
-          <a:bodyPr/>
-          <a:lstStyle/>
-          <a:p>
-            <a:r>
-              <a:rPr lang="ru-RU" dirty="0"/>
-              <a:t>Анализ работы алгоритмов</a:t>
-            </a:r>
-            <a:endParaRPr lang="en-US" dirty="0"/>
-          </a:p>
-        </p:txBody>
-      </p:sp>
       <p:pic>
         <p:nvPicPr>
-          <p:cNvPr id="4" name="Picture 3">
-            <a:extLst>
-              <a:ext uri="{FF2B5EF4-FFF2-40B4-BE49-F238E27FC236}">
-                <a16:creationId xmlns:a16="http://schemas.microsoft.com/office/drawing/2014/main" id="{595DDE9D-F4EC-E2C3-DF82-D62DF8EBC04B}"/>
-              </a:ext>
-            </a:extLst>
-          </p:cNvPr>
+          <p:cNvPr id="6" name="Рисунок 5"/>
           <p:cNvPicPr>
             <a:picLocks noChangeAspect="1"/>
           </p:cNvPicPr>
@@ -4359,6 +4784,719 @@
         </p:blipFill>
         <p:spPr>
           <a:xfrm>
+            <a:off x="4869265" y="2806586"/>
+            <a:ext cx="2095792" cy="2276793"/>
+          </a:xfrm>
+          <a:prstGeom prst="rect">
+            <a:avLst/>
+          </a:prstGeom>
+        </p:spPr>
+      </p:pic>
+      <p:sp>
+        <p:nvSpPr>
+          <p:cNvPr id="2" name="Заголовок 1"/>
+          <p:cNvSpPr>
+            <a:spLocks noGrp="1"/>
+          </p:cNvSpPr>
+          <p:nvPr>
+            <p:ph type="title"/>
+          </p:nvPr>
+        </p:nvSpPr>
+        <p:spPr>
+          <a:xfrm>
+            <a:off x="511629" y="416933"/>
+            <a:ext cx="10515600" cy="1325563"/>
+          </a:xfrm>
+        </p:spPr>
+        <p:txBody>
+          <a:bodyPr/>
+          <a:lstStyle/>
+          <a:p>
+            <a:r>
+              <a:rPr lang="en-US" dirty="0" smtClean="0"/>
+              <a:t>test_graph.txt</a:t>
+            </a:r>
+            <a:endParaRPr lang="ru-RU" dirty="0"/>
+          </a:p>
+        </p:txBody>
+      </p:sp>
+      <p:pic>
+        <p:nvPicPr>
+          <p:cNvPr id="5" name="Рисунок 4"/>
+          <p:cNvPicPr>
+            <a:picLocks noChangeAspect="1"/>
+          </p:cNvPicPr>
+          <p:nvPr/>
+        </p:nvPicPr>
+        <p:blipFill>
+          <a:blip r:embed="rId3"/>
+          <a:stretch>
+            <a:fillRect/>
+          </a:stretch>
+        </p:blipFill>
+        <p:spPr>
+          <a:xfrm>
+            <a:off x="1423852" y="3169018"/>
+            <a:ext cx="3559628" cy="3278410"/>
+          </a:xfrm>
+          <a:prstGeom prst="rect">
+            <a:avLst/>
+          </a:prstGeom>
+        </p:spPr>
+      </p:pic>
+      <p:pic>
+        <p:nvPicPr>
+          <p:cNvPr id="4" name="Рисунок 3"/>
+          <p:cNvPicPr>
+            <a:picLocks noChangeAspect="1"/>
+          </p:cNvPicPr>
+          <p:nvPr/>
+        </p:nvPicPr>
+        <p:blipFill>
+          <a:blip r:embed="rId4"/>
+          <a:stretch>
+            <a:fillRect/>
+          </a:stretch>
+        </p:blipFill>
+        <p:spPr>
+          <a:xfrm>
+            <a:off x="1280474" y="2586493"/>
+            <a:ext cx="1362265" cy="1267002"/>
+          </a:xfrm>
+          <a:prstGeom prst="rect">
+            <a:avLst/>
+          </a:prstGeom>
+        </p:spPr>
+      </p:pic>
+      <p:sp>
+        <p:nvSpPr>
+          <p:cNvPr id="7" name="TextBox 6"/>
+          <p:cNvSpPr txBox="1"/>
+          <p:nvPr/>
+        </p:nvSpPr>
+        <p:spPr>
+          <a:xfrm>
+            <a:off x="8686173" y="1103811"/>
+            <a:ext cx="1724297" cy="4524315"/>
+          </a:xfrm>
+          <a:prstGeom prst="rect">
+            <a:avLst/>
+          </a:prstGeom>
+          <a:noFill/>
+        </p:spPr>
+        <p:txBody>
+          <a:bodyPr wrap="square" rtlCol="0">
+            <a:spAutoFit/>
+          </a:bodyPr>
+          <a:lstStyle/>
+          <a:p>
+            <a:r>
+              <a:rPr lang="ru-RU" dirty="0" smtClean="0"/>
+              <a:t>1     </a:t>
+            </a:r>
+            <a:r>
+              <a:rPr lang="ru-RU" dirty="0"/>
+              <a:t>2</a:t>
+            </a:r>
+          </a:p>
+          <a:p>
+            <a:r>
+              <a:rPr lang="ru-RU" dirty="0" smtClean="0"/>
+              <a:t>2     </a:t>
+            </a:r>
+            <a:r>
+              <a:rPr lang="ru-RU" dirty="0"/>
+              <a:t>3</a:t>
+            </a:r>
+          </a:p>
+          <a:p>
+            <a:r>
+              <a:rPr lang="ru-RU" dirty="0"/>
+              <a:t>3 </a:t>
+            </a:r>
+            <a:r>
+              <a:rPr lang="ru-RU" dirty="0" smtClean="0"/>
+              <a:t>    4</a:t>
+            </a:r>
+            <a:endParaRPr lang="ru-RU" dirty="0"/>
+          </a:p>
+          <a:p>
+            <a:r>
+              <a:rPr lang="ru-RU" dirty="0" smtClean="0"/>
+              <a:t>4     </a:t>
+            </a:r>
+            <a:r>
+              <a:rPr lang="ru-RU" dirty="0"/>
+              <a:t>2</a:t>
+            </a:r>
+          </a:p>
+          <a:p>
+            <a:r>
+              <a:rPr lang="ru-RU" dirty="0"/>
+              <a:t>3 </a:t>
+            </a:r>
+            <a:r>
+              <a:rPr lang="ru-RU" dirty="0" smtClean="0"/>
+              <a:t>    5</a:t>
+            </a:r>
+            <a:endParaRPr lang="ru-RU" dirty="0"/>
+          </a:p>
+          <a:p>
+            <a:r>
+              <a:rPr lang="ru-RU" dirty="0"/>
+              <a:t>5 </a:t>
+            </a:r>
+            <a:r>
+              <a:rPr lang="ru-RU" dirty="0" smtClean="0"/>
+              <a:t>    1</a:t>
+            </a:r>
+            <a:endParaRPr lang="ru-RU" dirty="0"/>
+          </a:p>
+          <a:p>
+            <a:r>
+              <a:rPr lang="ru-RU" dirty="0"/>
+              <a:t>6 </a:t>
+            </a:r>
+            <a:r>
+              <a:rPr lang="ru-RU" dirty="0" smtClean="0"/>
+              <a:t>    7</a:t>
+            </a:r>
+            <a:endParaRPr lang="ru-RU" dirty="0"/>
+          </a:p>
+          <a:p>
+            <a:r>
+              <a:rPr lang="ru-RU" dirty="0"/>
+              <a:t>7 </a:t>
+            </a:r>
+            <a:r>
+              <a:rPr lang="ru-RU" dirty="0" smtClean="0"/>
+              <a:t>    8</a:t>
+            </a:r>
+            <a:endParaRPr lang="ru-RU" dirty="0"/>
+          </a:p>
+          <a:p>
+            <a:r>
+              <a:rPr lang="ru-RU" dirty="0" smtClean="0"/>
+              <a:t>8     </a:t>
+            </a:r>
+            <a:r>
+              <a:rPr lang="ru-RU" dirty="0"/>
+              <a:t>9</a:t>
+            </a:r>
+          </a:p>
+          <a:p>
+            <a:r>
+              <a:rPr lang="ru-RU" dirty="0"/>
+              <a:t>9 </a:t>
+            </a:r>
+            <a:r>
+              <a:rPr lang="ru-RU" dirty="0" smtClean="0"/>
+              <a:t>    6</a:t>
+            </a:r>
+            <a:endParaRPr lang="ru-RU" dirty="0"/>
+          </a:p>
+          <a:p>
+            <a:r>
+              <a:rPr lang="ru-RU" dirty="0"/>
+              <a:t>7 </a:t>
+            </a:r>
+            <a:r>
+              <a:rPr lang="ru-RU" dirty="0" smtClean="0"/>
+              <a:t>    10</a:t>
+            </a:r>
+            <a:endParaRPr lang="ru-RU" dirty="0"/>
+          </a:p>
+          <a:p>
+            <a:r>
+              <a:rPr lang="ru-RU" dirty="0"/>
+              <a:t>11 </a:t>
+            </a:r>
+            <a:r>
+              <a:rPr lang="ru-RU" dirty="0" smtClean="0"/>
+              <a:t>  12</a:t>
+            </a:r>
+            <a:endParaRPr lang="ru-RU" dirty="0"/>
+          </a:p>
+          <a:p>
+            <a:r>
+              <a:rPr lang="ru-RU" dirty="0"/>
+              <a:t>12 </a:t>
+            </a:r>
+            <a:r>
+              <a:rPr lang="ru-RU" dirty="0" smtClean="0"/>
+              <a:t>  13</a:t>
+            </a:r>
+            <a:endParaRPr lang="ru-RU" dirty="0"/>
+          </a:p>
+          <a:p>
+            <a:r>
+              <a:rPr lang="ru-RU" dirty="0"/>
+              <a:t>14 </a:t>
+            </a:r>
+            <a:r>
+              <a:rPr lang="ru-RU" dirty="0" smtClean="0"/>
+              <a:t>  14</a:t>
+            </a:r>
+            <a:endParaRPr lang="ru-RU" dirty="0"/>
+          </a:p>
+          <a:p>
+            <a:r>
+              <a:rPr lang="ru-RU" dirty="0"/>
+              <a:t>6 </a:t>
+            </a:r>
+            <a:r>
+              <a:rPr lang="ru-RU" dirty="0" smtClean="0"/>
+              <a:t>    11</a:t>
+            </a:r>
+            <a:endParaRPr lang="ru-RU" dirty="0"/>
+          </a:p>
+          <a:p>
+            <a:r>
+              <a:rPr lang="ru-RU" dirty="0"/>
+              <a:t>10 </a:t>
+            </a:r>
+            <a:r>
+              <a:rPr lang="ru-RU" dirty="0" smtClean="0"/>
+              <a:t>  12</a:t>
+            </a:r>
+            <a:endParaRPr lang="ru-RU" dirty="0"/>
+          </a:p>
+        </p:txBody>
+      </p:sp>
+    </p:spTree>
+    <p:extLst>
+      <p:ext uri="{BB962C8B-B14F-4D97-AF65-F5344CB8AC3E}">
+        <p14:creationId xmlns:p14="http://schemas.microsoft.com/office/powerpoint/2010/main" val="3846261642"/>
+      </p:ext>
+    </p:extLst>
+  </p:cSld>
+  <p:clrMapOvr>
+    <a:masterClrMapping/>
+  </p:clrMapOvr>
+</p:sld>
+</file>
+
+<file path=ppt/slides/slide20.xml><?xml version="1.0" encoding="utf-8"?>
+<p:sld xmlns:a="http://schemas.openxmlformats.org/drawingml/2006/main" xmlns:r="http://schemas.openxmlformats.org/officeDocument/2006/relationships" xmlns:p="http://schemas.openxmlformats.org/presentationml/2006/main">
+  <p:cSld>
+    <p:spTree>
+      <p:nvGrpSpPr>
+        <p:cNvPr id="1" name=""/>
+        <p:cNvGrpSpPr/>
+        <p:nvPr/>
+      </p:nvGrpSpPr>
+      <p:grpSpPr>
+        <a:xfrm>
+          <a:off x="0" y="0"/>
+          <a:ext cx="0" cy="0"/>
+          <a:chOff x="0" y="0"/>
+          <a:chExt cx="0" cy="0"/>
+        </a:xfrm>
+      </p:grpSpPr>
+      <p:sp>
+        <p:nvSpPr>
+          <p:cNvPr id="2" name="Заголовок 1"/>
+          <p:cNvSpPr>
+            <a:spLocks noGrp="1"/>
+          </p:cNvSpPr>
+          <p:nvPr>
+            <p:ph type="title"/>
+          </p:nvPr>
+        </p:nvSpPr>
+        <p:spPr/>
+        <p:txBody>
+          <a:bodyPr/>
+          <a:lstStyle/>
+          <a:p>
+            <a:r>
+              <a:rPr lang="en-US" dirty="0"/>
+              <a:t>CA-GrQc.txt</a:t>
+            </a:r>
+            <a:endParaRPr lang="ru-RU" dirty="0"/>
+          </a:p>
+        </p:txBody>
+      </p:sp>
+      <p:pic>
+        <p:nvPicPr>
+          <p:cNvPr id="4" name="Рисунок 3"/>
+          <p:cNvPicPr>
+            <a:picLocks noChangeAspect="1"/>
+          </p:cNvPicPr>
+          <p:nvPr/>
+        </p:nvPicPr>
+        <p:blipFill>
+          <a:blip r:embed="rId2"/>
+          <a:stretch>
+            <a:fillRect/>
+          </a:stretch>
+        </p:blipFill>
+        <p:spPr>
+          <a:xfrm>
+            <a:off x="1890518" y="1690689"/>
+            <a:ext cx="8283818" cy="5004026"/>
+          </a:xfrm>
+          <a:prstGeom prst="rect">
+            <a:avLst/>
+          </a:prstGeom>
+        </p:spPr>
+      </p:pic>
+    </p:spTree>
+    <p:extLst>
+      <p:ext uri="{BB962C8B-B14F-4D97-AF65-F5344CB8AC3E}">
+        <p14:creationId xmlns:p14="http://schemas.microsoft.com/office/powerpoint/2010/main" val="558503551"/>
+      </p:ext>
+    </p:extLst>
+  </p:cSld>
+  <p:clrMapOvr>
+    <a:masterClrMapping/>
+  </p:clrMapOvr>
+</p:sld>
+</file>
+
+<file path=ppt/slides/slide21.xml><?xml version="1.0" encoding="utf-8"?>
+<p:sld xmlns:a="http://schemas.openxmlformats.org/drawingml/2006/main" xmlns:r="http://schemas.openxmlformats.org/officeDocument/2006/relationships" xmlns:p="http://schemas.openxmlformats.org/presentationml/2006/main">
+  <p:cSld>
+    <p:spTree>
+      <p:nvGrpSpPr>
+        <p:cNvPr id="1" name=""/>
+        <p:cNvGrpSpPr/>
+        <p:nvPr/>
+      </p:nvGrpSpPr>
+      <p:grpSpPr>
+        <a:xfrm>
+          <a:off x="0" y="0"/>
+          <a:ext cx="0" cy="0"/>
+          <a:chOff x="0" y="0"/>
+          <a:chExt cx="0" cy="0"/>
+        </a:xfrm>
+      </p:grpSpPr>
+      <p:pic>
+        <p:nvPicPr>
+          <p:cNvPr id="4" name="Рисунок 3"/>
+          <p:cNvPicPr>
+            <a:picLocks noChangeAspect="1"/>
+          </p:cNvPicPr>
+          <p:nvPr/>
+        </p:nvPicPr>
+        <p:blipFill>
+          <a:blip r:embed="rId2">
+            <a:extLst>
+              <a:ext uri="{28A0092B-C50C-407E-A947-70E740481C1C}">
+                <a14:useLocalDpi xmlns:a14="http://schemas.microsoft.com/office/drawing/2010/main" val="0"/>
+              </a:ext>
+            </a:extLst>
+          </a:blip>
+          <a:stretch>
+            <a:fillRect/>
+          </a:stretch>
+        </p:blipFill>
+        <p:spPr>
+          <a:xfrm>
+            <a:off x="0" y="2577424"/>
+            <a:ext cx="12192000" cy="1703152"/>
+          </a:xfrm>
+          <a:prstGeom prst="rect">
+            <a:avLst/>
+          </a:prstGeom>
+        </p:spPr>
+      </p:pic>
+      <p:sp>
+        <p:nvSpPr>
+          <p:cNvPr id="5" name="Title 1">
+            <a:extLst>
+              <a:ext uri="{FF2B5EF4-FFF2-40B4-BE49-F238E27FC236}">
+                <a16:creationId xmlns:a16="http://schemas.microsoft.com/office/drawing/2014/main" xmlns="" id="{DD332D86-80B8-7485-1916-0651E4F7E452}"/>
+              </a:ext>
+            </a:extLst>
+          </p:cNvPr>
+          <p:cNvSpPr>
+            <a:spLocks noGrp="1"/>
+          </p:cNvSpPr>
+          <p:nvPr>
+            <p:ph type="title"/>
+          </p:nvPr>
+        </p:nvSpPr>
+        <p:spPr>
+          <a:xfrm>
+            <a:off x="434340" y="717822"/>
+            <a:ext cx="11323319" cy="1325563"/>
+          </a:xfrm>
+        </p:spPr>
+        <p:txBody>
+          <a:bodyPr/>
+          <a:lstStyle/>
+          <a:p>
+            <a:r>
+              <a:rPr lang="ru-RU" dirty="0" smtClean="0"/>
+              <a:t>Применение алгоритмов к тестовой выборке</a:t>
+            </a:r>
+            <a:endParaRPr lang="en-US" dirty="0"/>
+          </a:p>
+        </p:txBody>
+      </p:sp>
+    </p:spTree>
+    <p:extLst>
+      <p:ext uri="{BB962C8B-B14F-4D97-AF65-F5344CB8AC3E}">
+        <p14:creationId xmlns:p14="http://schemas.microsoft.com/office/powerpoint/2010/main" val="2138935208"/>
+      </p:ext>
+    </p:extLst>
+  </p:cSld>
+  <p:clrMapOvr>
+    <a:masterClrMapping/>
+  </p:clrMapOvr>
+</p:sld>
+</file>
+
+<file path=ppt/slides/slide22.xml><?xml version="1.0" encoding="utf-8"?>
+<p:sld xmlns:a="http://schemas.openxmlformats.org/drawingml/2006/main" xmlns:r="http://schemas.openxmlformats.org/officeDocument/2006/relationships" xmlns:p="http://schemas.openxmlformats.org/presentationml/2006/main">
+  <p:cSld>
+    <p:spTree>
+      <p:nvGrpSpPr>
+        <p:cNvPr id="1" name=""/>
+        <p:cNvGrpSpPr/>
+        <p:nvPr/>
+      </p:nvGrpSpPr>
+      <p:grpSpPr>
+        <a:xfrm>
+          <a:off x="0" y="0"/>
+          <a:ext cx="0" cy="0"/>
+          <a:chOff x="0" y="0"/>
+          <a:chExt cx="0" cy="0"/>
+        </a:xfrm>
+      </p:grpSpPr>
+      <p:pic>
+        <p:nvPicPr>
+          <p:cNvPr id="5" name="Рисунок 4"/>
+          <p:cNvPicPr>
+            <a:picLocks noChangeAspect="1"/>
+          </p:cNvPicPr>
+          <p:nvPr/>
+        </p:nvPicPr>
+        <p:blipFill>
+          <a:blip r:embed="rId2">
+            <a:extLst>
+              <a:ext uri="{28A0092B-C50C-407E-A947-70E740481C1C}">
+                <a14:useLocalDpi xmlns:a14="http://schemas.microsoft.com/office/drawing/2010/main" val="0"/>
+              </a:ext>
+            </a:extLst>
+          </a:blip>
+          <a:stretch>
+            <a:fillRect/>
+          </a:stretch>
+        </p:blipFill>
+        <p:spPr>
+          <a:xfrm>
+            <a:off x="0" y="1691724"/>
+            <a:ext cx="12192000" cy="4310575"/>
+          </a:xfrm>
+          <a:prstGeom prst="rect">
+            <a:avLst/>
+          </a:prstGeom>
+        </p:spPr>
+      </p:pic>
+      <p:sp>
+        <p:nvSpPr>
+          <p:cNvPr id="6" name="Title 1">
+            <a:extLst>
+              <a:ext uri="{FF2B5EF4-FFF2-40B4-BE49-F238E27FC236}">
+                <a16:creationId xmlns:a16="http://schemas.microsoft.com/office/drawing/2014/main" xmlns="" id="{DD332D86-80B8-7485-1916-0651E4F7E452}"/>
+              </a:ext>
+            </a:extLst>
+          </p:cNvPr>
+          <p:cNvSpPr>
+            <a:spLocks noGrp="1"/>
+          </p:cNvSpPr>
+          <p:nvPr>
+            <p:ph type="title"/>
+          </p:nvPr>
+        </p:nvSpPr>
+        <p:spPr>
+          <a:xfrm>
+            <a:off x="225335" y="137161"/>
+            <a:ext cx="11323319" cy="1051560"/>
+          </a:xfrm>
+        </p:spPr>
+        <p:txBody>
+          <a:bodyPr/>
+          <a:lstStyle/>
+          <a:p>
+            <a:r>
+              <a:rPr lang="ru-RU" dirty="0" smtClean="0"/>
+              <a:t>Применение алгоритмов к тестовой выборке</a:t>
+            </a:r>
+            <a:endParaRPr lang="en-US" dirty="0"/>
+          </a:p>
+        </p:txBody>
+      </p:sp>
+    </p:spTree>
+    <p:extLst>
+      <p:ext uri="{BB962C8B-B14F-4D97-AF65-F5344CB8AC3E}">
+        <p14:creationId xmlns:p14="http://schemas.microsoft.com/office/powerpoint/2010/main" val="1673247366"/>
+      </p:ext>
+    </p:extLst>
+  </p:cSld>
+  <p:clrMapOvr>
+    <a:masterClrMapping/>
+  </p:clrMapOvr>
+</p:sld>
+</file>
+
+<file path=ppt/slides/slide23.xml><?xml version="1.0" encoding="utf-8"?>
+<p:sld xmlns:a="http://schemas.openxmlformats.org/drawingml/2006/main" xmlns:r="http://schemas.openxmlformats.org/officeDocument/2006/relationships" xmlns:p="http://schemas.openxmlformats.org/presentationml/2006/main">
+  <p:cSld>
+    <p:spTree>
+      <p:nvGrpSpPr>
+        <p:cNvPr id="1" name=""/>
+        <p:cNvGrpSpPr/>
+        <p:nvPr/>
+      </p:nvGrpSpPr>
+      <p:grpSpPr>
+        <a:xfrm>
+          <a:off x="0" y="0"/>
+          <a:ext cx="0" cy="0"/>
+          <a:chOff x="0" y="0"/>
+          <a:chExt cx="0" cy="0"/>
+        </a:xfrm>
+      </p:grpSpPr>
+      <p:sp>
+        <p:nvSpPr>
+          <p:cNvPr id="2" name="Title 1">
+            <a:extLst>
+              <a:ext uri="{FF2B5EF4-FFF2-40B4-BE49-F238E27FC236}">
+                <a16:creationId xmlns:a16="http://schemas.microsoft.com/office/drawing/2014/main" xmlns="" id="{EC34633F-C91B-541D-1200-4A13B5E276F8}"/>
+              </a:ext>
+            </a:extLst>
+          </p:cNvPr>
+          <p:cNvSpPr>
+            <a:spLocks noGrp="1"/>
+          </p:cNvSpPr>
+          <p:nvPr>
+            <p:ph type="title"/>
+          </p:nvPr>
+        </p:nvSpPr>
+        <p:spPr/>
+        <p:txBody>
+          <a:bodyPr/>
+          <a:lstStyle/>
+          <a:p>
+            <a:r>
+              <a:rPr lang="en-US" dirty="0"/>
+              <a:t>LCA -&gt; SC</a:t>
+            </a:r>
+          </a:p>
+        </p:txBody>
+      </p:sp>
+      <p:pic>
+        <p:nvPicPr>
+          <p:cNvPr id="3" name="Picture 2">
+            <a:extLst>
+              <a:ext uri="{FF2B5EF4-FFF2-40B4-BE49-F238E27FC236}">
+                <a16:creationId xmlns:a16="http://schemas.microsoft.com/office/drawing/2014/main" xmlns="" id="{C78DE2A6-BF81-811D-E750-BEB42ACBF106}"/>
+              </a:ext>
+            </a:extLst>
+          </p:cNvPr>
+          <p:cNvPicPr>
+            <a:picLocks noChangeAspect="1"/>
+          </p:cNvPicPr>
+          <p:nvPr/>
+        </p:nvPicPr>
+        <p:blipFill>
+          <a:blip r:embed="rId2"/>
+          <a:stretch>
+            <a:fillRect/>
+          </a:stretch>
+        </p:blipFill>
+        <p:spPr>
+          <a:xfrm>
+            <a:off x="1163172" y="2034922"/>
+            <a:ext cx="10190628" cy="2788155"/>
+          </a:xfrm>
+          <a:prstGeom prst="rect">
+            <a:avLst/>
+          </a:prstGeom>
+        </p:spPr>
+      </p:pic>
+    </p:spTree>
+    <p:extLst>
+      <p:ext uri="{BB962C8B-B14F-4D97-AF65-F5344CB8AC3E}">
+        <p14:creationId xmlns:p14="http://schemas.microsoft.com/office/powerpoint/2010/main" val="778581203"/>
+      </p:ext>
+    </p:extLst>
+  </p:cSld>
+  <p:clrMapOvr>
+    <a:masterClrMapping/>
+  </p:clrMapOvr>
+</p:sld>
+</file>
+
+<file path=ppt/slides/slide24.xml><?xml version="1.0" encoding="utf-8"?>
+<p:sld xmlns:a="http://schemas.openxmlformats.org/drawingml/2006/main" xmlns:r="http://schemas.openxmlformats.org/officeDocument/2006/relationships" xmlns:p="http://schemas.openxmlformats.org/presentationml/2006/main">
+  <p:cSld>
+    <p:spTree>
+      <p:nvGrpSpPr>
+        <p:cNvPr id="1" name=""/>
+        <p:cNvGrpSpPr/>
+        <p:nvPr/>
+      </p:nvGrpSpPr>
+      <p:grpSpPr>
+        <a:xfrm>
+          <a:off x="0" y="0"/>
+          <a:ext cx="0" cy="0"/>
+          <a:chOff x="0" y="0"/>
+          <a:chExt cx="0" cy="0"/>
+        </a:xfrm>
+      </p:grpSpPr>
+      <p:sp>
+        <p:nvSpPr>
+          <p:cNvPr id="2" name="Title 1">
+            <a:extLst>
+              <a:ext uri="{FF2B5EF4-FFF2-40B4-BE49-F238E27FC236}">
+                <a16:creationId xmlns:a16="http://schemas.microsoft.com/office/drawing/2014/main" xmlns="" id="{DD332D86-80B8-7485-1916-0651E4F7E452}"/>
+              </a:ext>
+            </a:extLst>
+          </p:cNvPr>
+          <p:cNvSpPr>
+            <a:spLocks noGrp="1"/>
+          </p:cNvSpPr>
+          <p:nvPr>
+            <p:ph type="title"/>
+          </p:nvPr>
+        </p:nvSpPr>
+        <p:spPr/>
+        <p:txBody>
+          <a:bodyPr/>
+          <a:lstStyle/>
+          <a:p>
+            <a:r>
+              <a:rPr lang="ru-RU" dirty="0"/>
+              <a:t>Анализ работы алгоритмов</a:t>
+            </a:r>
+            <a:endParaRPr lang="en-US" dirty="0"/>
+          </a:p>
+        </p:txBody>
+      </p:sp>
+      <p:pic>
+        <p:nvPicPr>
+          <p:cNvPr id="4" name="Picture 3">
+            <a:extLst>
+              <a:ext uri="{FF2B5EF4-FFF2-40B4-BE49-F238E27FC236}">
+                <a16:creationId xmlns:a16="http://schemas.microsoft.com/office/drawing/2014/main" xmlns="" id="{595DDE9D-F4EC-E2C3-DF82-D62DF8EBC04B}"/>
+              </a:ext>
+            </a:extLst>
+          </p:cNvPr>
+          <p:cNvPicPr>
+            <a:picLocks noChangeAspect="1"/>
+          </p:cNvPicPr>
+          <p:nvPr/>
+        </p:nvPicPr>
+        <p:blipFill>
+          <a:blip r:embed="rId2"/>
+          <a:stretch>
+            <a:fillRect/>
+          </a:stretch>
+        </p:blipFill>
+        <p:spPr>
+          <a:xfrm>
             <a:off x="0" y="2957082"/>
             <a:ext cx="12176739" cy="1079209"/>
           </a:xfrm>
@@ -4371,6 +5509,466 @@
     <p:extLst>
       <p:ext uri="{BB962C8B-B14F-4D97-AF65-F5344CB8AC3E}">
         <p14:creationId xmlns:p14="http://schemas.microsoft.com/office/powerpoint/2010/main" val="3987323669"/>
+      </p:ext>
+    </p:extLst>
+  </p:cSld>
+  <p:clrMapOvr>
+    <a:masterClrMapping/>
+  </p:clrMapOvr>
+</p:sld>
+</file>
+
+<file path=ppt/slides/slide25.xml><?xml version="1.0" encoding="utf-8"?>
+<p:sld xmlns:a="http://schemas.openxmlformats.org/drawingml/2006/main" xmlns:r="http://schemas.openxmlformats.org/officeDocument/2006/relationships" xmlns:p="http://schemas.openxmlformats.org/presentationml/2006/main">
+  <p:cSld>
+    <p:spTree>
+      <p:nvGrpSpPr>
+        <p:cNvPr id="1" name=""/>
+        <p:cNvGrpSpPr/>
+        <p:nvPr/>
+      </p:nvGrpSpPr>
+      <p:grpSpPr>
+        <a:xfrm>
+          <a:off x="0" y="0"/>
+          <a:ext cx="0" cy="0"/>
+          <a:chOff x="0" y="0"/>
+          <a:chExt cx="0" cy="0"/>
+        </a:xfrm>
+      </p:grpSpPr>
+      <p:sp>
+        <p:nvSpPr>
+          <p:cNvPr id="2" name="Title 1">
+            <a:extLst>
+              <a:ext uri="{FF2B5EF4-FFF2-40B4-BE49-F238E27FC236}">
+                <a16:creationId xmlns:a16="http://schemas.microsoft.com/office/drawing/2014/main" xmlns="" id="{6DC7717E-779C-5EDC-5AF1-70F7B4975FCF}"/>
+              </a:ext>
+            </a:extLst>
+          </p:cNvPr>
+          <p:cNvSpPr>
+            <a:spLocks noGrp="1"/>
+          </p:cNvSpPr>
+          <p:nvPr>
+            <p:ph type="title"/>
+          </p:nvPr>
+        </p:nvSpPr>
+        <p:spPr/>
+        <p:txBody>
+          <a:bodyPr/>
+          <a:lstStyle/>
+          <a:p>
+            <a:r>
+              <a:rPr lang="en-US" dirty="0"/>
+              <a:t>BASIC, CA-</a:t>
+            </a:r>
+            <a:r>
+              <a:rPr lang="en-US" dirty="0" err="1"/>
+              <a:t>AstroPh</a:t>
+            </a:r>
+            <a:endParaRPr lang="en-US" dirty="0"/>
+          </a:p>
+        </p:txBody>
+      </p:sp>
+      <p:pic>
+        <p:nvPicPr>
+          <p:cNvPr id="4" name="Picture 3">
+            <a:extLst>
+              <a:ext uri="{FF2B5EF4-FFF2-40B4-BE49-F238E27FC236}">
+                <a16:creationId xmlns:a16="http://schemas.microsoft.com/office/drawing/2014/main" xmlns="" id="{1BF730E2-4714-9AC7-011E-0F8DD6BD8F80}"/>
+              </a:ext>
+            </a:extLst>
+          </p:cNvPr>
+          <p:cNvPicPr>
+            <a:picLocks noChangeAspect="1"/>
+          </p:cNvPicPr>
+          <p:nvPr/>
+        </p:nvPicPr>
+        <p:blipFill>
+          <a:blip r:embed="rId2"/>
+          <a:stretch>
+            <a:fillRect/>
+          </a:stretch>
+        </p:blipFill>
+        <p:spPr>
+          <a:xfrm>
+            <a:off x="0" y="1690688"/>
+            <a:ext cx="12192000" cy="4397002"/>
+          </a:xfrm>
+          <a:prstGeom prst="rect">
+            <a:avLst/>
+          </a:prstGeom>
+        </p:spPr>
+      </p:pic>
+    </p:spTree>
+    <p:extLst>
+      <p:ext uri="{BB962C8B-B14F-4D97-AF65-F5344CB8AC3E}">
+        <p14:creationId xmlns:p14="http://schemas.microsoft.com/office/powerpoint/2010/main" val="2485193801"/>
+      </p:ext>
+    </p:extLst>
+  </p:cSld>
+  <p:clrMapOvr>
+    <a:masterClrMapping/>
+  </p:clrMapOvr>
+</p:sld>
+</file>
+
+<file path=ppt/slides/slide26.xml><?xml version="1.0" encoding="utf-8"?>
+<p:sld xmlns:a="http://schemas.openxmlformats.org/drawingml/2006/main" xmlns:r="http://schemas.openxmlformats.org/officeDocument/2006/relationships" xmlns:p="http://schemas.openxmlformats.org/presentationml/2006/main">
+  <p:cSld>
+    <p:spTree>
+      <p:nvGrpSpPr>
+        <p:cNvPr id="1" name=""/>
+        <p:cNvGrpSpPr/>
+        <p:nvPr/>
+      </p:nvGrpSpPr>
+      <p:grpSpPr>
+        <a:xfrm>
+          <a:off x="0" y="0"/>
+          <a:ext cx="0" cy="0"/>
+          <a:chOff x="0" y="0"/>
+          <a:chExt cx="0" cy="0"/>
+        </a:xfrm>
+      </p:grpSpPr>
+      <p:sp>
+        <p:nvSpPr>
+          <p:cNvPr id="2" name="Title 1">
+            <a:extLst>
+              <a:ext uri="{FF2B5EF4-FFF2-40B4-BE49-F238E27FC236}">
+                <a16:creationId xmlns:a16="http://schemas.microsoft.com/office/drawing/2014/main" xmlns="" id="{974320BD-0033-9124-790E-39B1626E503A}"/>
+              </a:ext>
+            </a:extLst>
+          </p:cNvPr>
+          <p:cNvSpPr>
+            <a:spLocks noGrp="1"/>
+          </p:cNvSpPr>
+          <p:nvPr>
+            <p:ph type="title"/>
+          </p:nvPr>
+        </p:nvSpPr>
+        <p:spPr/>
+        <p:txBody>
+          <a:bodyPr/>
+          <a:lstStyle/>
+          <a:p>
+            <a:r>
+              <a:rPr lang="en-US" dirty="0"/>
+              <a:t>SC, CA-</a:t>
+            </a:r>
+            <a:r>
+              <a:rPr lang="en-US" dirty="0" err="1"/>
+              <a:t>AstroPh</a:t>
+            </a:r>
+            <a:endParaRPr lang="en-US" dirty="0"/>
+          </a:p>
+        </p:txBody>
+      </p:sp>
+      <p:pic>
+        <p:nvPicPr>
+          <p:cNvPr id="4" name="Picture 3">
+            <a:extLst>
+              <a:ext uri="{FF2B5EF4-FFF2-40B4-BE49-F238E27FC236}">
+                <a16:creationId xmlns:a16="http://schemas.microsoft.com/office/drawing/2014/main" xmlns="" id="{3F6718B2-C299-F2A0-213C-A6F3B34F0511}"/>
+              </a:ext>
+            </a:extLst>
+          </p:cNvPr>
+          <p:cNvPicPr>
+            <a:picLocks noChangeAspect="1"/>
+          </p:cNvPicPr>
+          <p:nvPr/>
+        </p:nvPicPr>
+        <p:blipFill>
+          <a:blip r:embed="rId2"/>
+          <a:stretch>
+            <a:fillRect/>
+          </a:stretch>
+        </p:blipFill>
+        <p:spPr>
+          <a:xfrm>
+            <a:off x="0" y="1690688"/>
+            <a:ext cx="9421091" cy="4451307"/>
+          </a:xfrm>
+          <a:prstGeom prst="rect">
+            <a:avLst/>
+          </a:prstGeom>
+        </p:spPr>
+      </p:pic>
+    </p:spTree>
+    <p:extLst>
+      <p:ext uri="{BB962C8B-B14F-4D97-AF65-F5344CB8AC3E}">
+        <p14:creationId xmlns:p14="http://schemas.microsoft.com/office/powerpoint/2010/main" val="1393508578"/>
+      </p:ext>
+    </p:extLst>
+  </p:cSld>
+  <p:clrMapOvr>
+    <a:masterClrMapping/>
+  </p:clrMapOvr>
+</p:sld>
+</file>
+
+<file path=ppt/slides/slide27.xml><?xml version="1.0" encoding="utf-8"?>
+<p:sld xmlns:a="http://schemas.openxmlformats.org/drawingml/2006/main" xmlns:r="http://schemas.openxmlformats.org/officeDocument/2006/relationships" xmlns:p="http://schemas.openxmlformats.org/presentationml/2006/main">
+  <p:cSld>
+    <p:spTree>
+      <p:nvGrpSpPr>
+        <p:cNvPr id="1" name=""/>
+        <p:cNvGrpSpPr/>
+        <p:nvPr/>
+      </p:nvGrpSpPr>
+      <p:grpSpPr>
+        <a:xfrm>
+          <a:off x="0" y="0"/>
+          <a:ext cx="0" cy="0"/>
+          <a:chOff x="0" y="0"/>
+          <a:chExt cx="0" cy="0"/>
+        </a:xfrm>
+      </p:grpSpPr>
+      <p:sp>
+        <p:nvSpPr>
+          <p:cNvPr id="2" name="Title 1">
+            <a:extLst>
+              <a:ext uri="{FF2B5EF4-FFF2-40B4-BE49-F238E27FC236}">
+                <a16:creationId xmlns:a16="http://schemas.microsoft.com/office/drawing/2014/main" xmlns="" id="{1139B143-2F74-6EFD-29A5-6675EA49E24D}"/>
+              </a:ext>
+            </a:extLst>
+          </p:cNvPr>
+          <p:cNvSpPr>
+            <a:spLocks noGrp="1"/>
+          </p:cNvSpPr>
+          <p:nvPr>
+            <p:ph type="title"/>
+          </p:nvPr>
+        </p:nvSpPr>
+        <p:spPr/>
+        <p:txBody>
+          <a:bodyPr/>
+          <a:lstStyle/>
+          <a:p>
+            <a:r>
+              <a:rPr lang="en-US" dirty="0"/>
+              <a:t>BASIC, CA-</a:t>
+            </a:r>
+            <a:r>
+              <a:rPr lang="en-US" dirty="0" err="1"/>
+              <a:t>GrQc</a:t>
+            </a:r>
+            <a:endParaRPr lang="en-US" dirty="0"/>
+          </a:p>
+        </p:txBody>
+      </p:sp>
+      <p:pic>
+        <p:nvPicPr>
+          <p:cNvPr id="4" name="Picture 3">
+            <a:extLst>
+              <a:ext uri="{FF2B5EF4-FFF2-40B4-BE49-F238E27FC236}">
+                <a16:creationId xmlns:a16="http://schemas.microsoft.com/office/drawing/2014/main" xmlns="" id="{B340F94B-8DEA-C82D-F3D8-45BA200B6D61}"/>
+              </a:ext>
+            </a:extLst>
+          </p:cNvPr>
+          <p:cNvPicPr>
+            <a:picLocks noChangeAspect="1"/>
+          </p:cNvPicPr>
+          <p:nvPr/>
+        </p:nvPicPr>
+        <p:blipFill>
+          <a:blip r:embed="rId2"/>
+          <a:stretch>
+            <a:fillRect/>
+          </a:stretch>
+        </p:blipFill>
+        <p:spPr>
+          <a:xfrm>
+            <a:off x="0" y="1755343"/>
+            <a:ext cx="12192000" cy="4509010"/>
+          </a:xfrm>
+          <a:prstGeom prst="rect">
+            <a:avLst/>
+          </a:prstGeom>
+        </p:spPr>
+      </p:pic>
+    </p:spTree>
+    <p:extLst>
+      <p:ext uri="{BB962C8B-B14F-4D97-AF65-F5344CB8AC3E}">
+        <p14:creationId xmlns:p14="http://schemas.microsoft.com/office/powerpoint/2010/main" val="4055720038"/>
+      </p:ext>
+    </p:extLst>
+  </p:cSld>
+  <p:clrMapOvr>
+    <a:masterClrMapping/>
+  </p:clrMapOvr>
+</p:sld>
+</file>
+
+<file path=ppt/slides/slide28.xml><?xml version="1.0" encoding="utf-8"?>
+<p:sld xmlns:a="http://schemas.openxmlformats.org/drawingml/2006/main" xmlns:r="http://schemas.openxmlformats.org/officeDocument/2006/relationships" xmlns:p="http://schemas.openxmlformats.org/presentationml/2006/main">
+  <p:cSld>
+    <p:spTree>
+      <p:nvGrpSpPr>
+        <p:cNvPr id="1" name=""/>
+        <p:cNvGrpSpPr/>
+        <p:nvPr/>
+      </p:nvGrpSpPr>
+      <p:grpSpPr>
+        <a:xfrm>
+          <a:off x="0" y="0"/>
+          <a:ext cx="0" cy="0"/>
+          <a:chOff x="0" y="0"/>
+          <a:chExt cx="0" cy="0"/>
+        </a:xfrm>
+      </p:grpSpPr>
+      <p:sp>
+        <p:nvSpPr>
+          <p:cNvPr id="2" name="Title 1">
+            <a:extLst>
+              <a:ext uri="{FF2B5EF4-FFF2-40B4-BE49-F238E27FC236}">
+                <a16:creationId xmlns:a16="http://schemas.microsoft.com/office/drawing/2014/main" xmlns="" id="{E43EB5D8-0360-0A5E-71C0-9FD90011435A}"/>
+              </a:ext>
+            </a:extLst>
+          </p:cNvPr>
+          <p:cNvSpPr>
+            <a:spLocks noGrp="1"/>
+          </p:cNvSpPr>
+          <p:nvPr>
+            <p:ph type="title"/>
+          </p:nvPr>
+        </p:nvSpPr>
+        <p:spPr/>
+        <p:txBody>
+          <a:bodyPr/>
+          <a:lstStyle/>
+          <a:p>
+            <a:r>
+              <a:rPr lang="en-US" dirty="0"/>
+              <a:t>SC, CA-</a:t>
+            </a:r>
+            <a:r>
+              <a:rPr lang="en-US" dirty="0" err="1"/>
+              <a:t>GrQc</a:t>
+            </a:r>
+            <a:endParaRPr lang="en-US" dirty="0"/>
+          </a:p>
+        </p:txBody>
+      </p:sp>
+      <p:pic>
+        <p:nvPicPr>
+          <p:cNvPr id="4" name="Picture 3">
+            <a:extLst>
+              <a:ext uri="{FF2B5EF4-FFF2-40B4-BE49-F238E27FC236}">
+                <a16:creationId xmlns:a16="http://schemas.microsoft.com/office/drawing/2014/main" xmlns="" id="{237ED81E-E8D0-A643-781C-7A09CAEFBAE2}"/>
+              </a:ext>
+            </a:extLst>
+          </p:cNvPr>
+          <p:cNvPicPr>
+            <a:picLocks noChangeAspect="1"/>
+          </p:cNvPicPr>
+          <p:nvPr/>
+        </p:nvPicPr>
+        <p:blipFill>
+          <a:blip r:embed="rId2"/>
+          <a:stretch>
+            <a:fillRect/>
+          </a:stretch>
+        </p:blipFill>
+        <p:spPr>
+          <a:xfrm>
+            <a:off x="0" y="1669667"/>
+            <a:ext cx="9975273" cy="4823208"/>
+          </a:xfrm>
+          <a:prstGeom prst="rect">
+            <a:avLst/>
+          </a:prstGeom>
+        </p:spPr>
+      </p:pic>
+    </p:spTree>
+    <p:extLst>
+      <p:ext uri="{BB962C8B-B14F-4D97-AF65-F5344CB8AC3E}">
+        <p14:creationId xmlns:p14="http://schemas.microsoft.com/office/powerpoint/2010/main" val="2554961572"/>
+      </p:ext>
+    </p:extLst>
+  </p:cSld>
+  <p:clrMapOvr>
+    <a:masterClrMapping/>
+  </p:clrMapOvr>
+</p:sld>
+</file>
+
+<file path=ppt/slides/slide29.xml><?xml version="1.0" encoding="utf-8"?>
+<p:sld xmlns:a="http://schemas.openxmlformats.org/drawingml/2006/main" xmlns:r="http://schemas.openxmlformats.org/officeDocument/2006/relationships" xmlns:p="http://schemas.openxmlformats.org/presentationml/2006/main">
+  <p:cSld>
+    <p:spTree>
+      <p:nvGrpSpPr>
+        <p:cNvPr id="1" name=""/>
+        <p:cNvGrpSpPr/>
+        <p:nvPr/>
+      </p:nvGrpSpPr>
+      <p:grpSpPr>
+        <a:xfrm>
+          <a:off x="0" y="0"/>
+          <a:ext cx="0" cy="0"/>
+          <a:chOff x="0" y="0"/>
+          <a:chExt cx="0" cy="0"/>
+        </a:xfrm>
+      </p:grpSpPr>
+      <p:sp>
+        <p:nvSpPr>
+          <p:cNvPr id="2" name="Title 1">
+            <a:extLst>
+              <a:ext uri="{FF2B5EF4-FFF2-40B4-BE49-F238E27FC236}">
+                <a16:creationId xmlns:a16="http://schemas.microsoft.com/office/drawing/2014/main" xmlns="" id="{D61DC79B-37ED-1419-8B98-5114D0375FD3}"/>
+              </a:ext>
+            </a:extLst>
+          </p:cNvPr>
+          <p:cNvSpPr>
+            <a:spLocks noGrp="1"/>
+          </p:cNvSpPr>
+          <p:nvPr>
+            <p:ph type="title"/>
+          </p:nvPr>
+        </p:nvSpPr>
+        <p:spPr/>
+        <p:txBody>
+          <a:bodyPr/>
+          <a:lstStyle/>
+          <a:p>
+            <a:r>
+              <a:rPr lang="en-US" dirty="0"/>
+              <a:t>BASIC, Wiki-Vote</a:t>
+            </a:r>
+          </a:p>
+        </p:txBody>
+      </p:sp>
+      <p:pic>
+        <p:nvPicPr>
+          <p:cNvPr id="4" name="Picture 3">
+            <a:extLst>
+              <a:ext uri="{FF2B5EF4-FFF2-40B4-BE49-F238E27FC236}">
+                <a16:creationId xmlns:a16="http://schemas.microsoft.com/office/drawing/2014/main" xmlns="" id="{D67FDD20-627C-4586-A050-1A8A44F1C309}"/>
+              </a:ext>
+            </a:extLst>
+          </p:cNvPr>
+          <p:cNvPicPr>
+            <a:picLocks noChangeAspect="1"/>
+          </p:cNvPicPr>
+          <p:nvPr/>
+        </p:nvPicPr>
+        <p:blipFill>
+          <a:blip r:embed="rId2"/>
+          <a:stretch>
+            <a:fillRect/>
+          </a:stretch>
+        </p:blipFill>
+        <p:spPr>
+          <a:xfrm>
+            <a:off x="0" y="1690688"/>
+            <a:ext cx="12192000" cy="4376285"/>
+          </a:xfrm>
+          <a:prstGeom prst="rect">
+            <a:avLst/>
+          </a:prstGeom>
+        </p:spPr>
+      </p:pic>
+    </p:spTree>
+    <p:extLst>
+      <p:ext uri="{BB962C8B-B14F-4D97-AF65-F5344CB8AC3E}">
+        <p14:creationId xmlns:p14="http://schemas.microsoft.com/office/powerpoint/2010/main" val="2095812913"/>
       </p:ext>
     </p:extLst>
   </p:cSld>
@@ -4399,13 +5997,7 @@
       </p:grpSpPr>
       <p:sp>
         <p:nvSpPr>
-          <p:cNvPr id="2" name="Title 1">
-            <a:extLst>
-              <a:ext uri="{FF2B5EF4-FFF2-40B4-BE49-F238E27FC236}">
-                <a16:creationId xmlns:a16="http://schemas.microsoft.com/office/drawing/2014/main" id="{6DC7717E-779C-5EDC-5AF1-70F7B4975FCF}"/>
-              </a:ext>
-            </a:extLst>
-          </p:cNvPr>
+          <p:cNvPr id="2" name="Заголовок 1"/>
           <p:cNvSpPr>
             <a:spLocks noGrp="1"/>
           </p:cNvSpPr>
@@ -4413,32 +6005,27 @@
             <p:ph type="title"/>
           </p:nvPr>
         </p:nvSpPr>
-        <p:spPr/>
+        <p:spPr>
+          <a:xfrm>
+            <a:off x="635725" y="84273"/>
+            <a:ext cx="10515600" cy="1325563"/>
+          </a:xfrm>
+        </p:spPr>
         <p:txBody>
           <a:bodyPr/>
           <a:lstStyle/>
           <a:p>
             <a:r>
-              <a:rPr lang="en-US" dirty="0"/>
-              <a:t>BASIC, CA-</a:t>
-            </a:r>
-            <a:r>
-              <a:rPr lang="en-US" dirty="0" err="1"/>
-              <a:t>AstroPh</a:t>
-            </a:r>
-            <a:endParaRPr lang="en-US" dirty="0"/>
+              <a:rPr lang="ru-RU" dirty="0" smtClean="0"/>
+              <a:t>Загрузка данных</a:t>
+            </a:r>
+            <a:endParaRPr lang="ru-RU" dirty="0"/>
           </a:p>
         </p:txBody>
       </p:sp>
       <p:pic>
         <p:nvPicPr>
-          <p:cNvPr id="4" name="Picture 3">
-            <a:extLst>
-              <a:ext uri="{FF2B5EF4-FFF2-40B4-BE49-F238E27FC236}">
-                <a16:creationId xmlns:a16="http://schemas.microsoft.com/office/drawing/2014/main" id="{1BF730E2-4714-9AC7-011E-0F8DD6BD8F80}"/>
-              </a:ext>
-            </a:extLst>
-          </p:cNvPr>
+          <p:cNvPr id="4" name="Рисунок 3"/>
           <p:cNvPicPr>
             <a:picLocks noChangeAspect="1"/>
           </p:cNvPicPr>
@@ -4452,8 +6039,8 @@
         </p:blipFill>
         <p:spPr>
           <a:xfrm>
-            <a:off x="0" y="1690688"/>
-            <a:ext cx="12192000" cy="4397002"/>
+            <a:off x="3508800" y="1221377"/>
+            <a:ext cx="4769450" cy="5329646"/>
           </a:xfrm>
           <a:prstGeom prst="rect">
             <a:avLst/>
@@ -4463,7 +6050,971 @@
     </p:spTree>
     <p:extLst>
       <p:ext uri="{BB962C8B-B14F-4D97-AF65-F5344CB8AC3E}">
-        <p14:creationId xmlns:p14="http://schemas.microsoft.com/office/powerpoint/2010/main" val="2485193801"/>
+        <p14:creationId xmlns:p14="http://schemas.microsoft.com/office/powerpoint/2010/main" val="2266094781"/>
+      </p:ext>
+    </p:extLst>
+  </p:cSld>
+  <p:clrMapOvr>
+    <a:masterClrMapping/>
+  </p:clrMapOvr>
+</p:sld>
+</file>
+
+<file path=ppt/slides/slide30.xml><?xml version="1.0" encoding="utf-8"?>
+<p:sld xmlns:a="http://schemas.openxmlformats.org/drawingml/2006/main" xmlns:r="http://schemas.openxmlformats.org/officeDocument/2006/relationships" xmlns:p="http://schemas.openxmlformats.org/presentationml/2006/main">
+  <p:cSld>
+    <p:spTree>
+      <p:nvGrpSpPr>
+        <p:cNvPr id="1" name=""/>
+        <p:cNvGrpSpPr/>
+        <p:nvPr/>
+      </p:nvGrpSpPr>
+      <p:grpSpPr>
+        <a:xfrm>
+          <a:off x="0" y="0"/>
+          <a:ext cx="0" cy="0"/>
+          <a:chOff x="0" y="0"/>
+          <a:chExt cx="0" cy="0"/>
+        </a:xfrm>
+      </p:grpSpPr>
+      <p:sp>
+        <p:nvSpPr>
+          <p:cNvPr id="2" name="Title 1">
+            <a:extLst>
+              <a:ext uri="{FF2B5EF4-FFF2-40B4-BE49-F238E27FC236}">
+                <a16:creationId xmlns:a16="http://schemas.microsoft.com/office/drawing/2014/main" xmlns="" id="{B2933352-6A57-F911-5CF7-91270261AF5A}"/>
+              </a:ext>
+            </a:extLst>
+          </p:cNvPr>
+          <p:cNvSpPr>
+            <a:spLocks noGrp="1"/>
+          </p:cNvSpPr>
+          <p:nvPr>
+            <p:ph type="title"/>
+          </p:nvPr>
+        </p:nvSpPr>
+        <p:spPr/>
+        <p:txBody>
+          <a:bodyPr/>
+          <a:lstStyle/>
+          <a:p>
+            <a:r>
+              <a:rPr lang="en-US" dirty="0"/>
+              <a:t>SC, Wiki-Vote</a:t>
+            </a:r>
+          </a:p>
+        </p:txBody>
+      </p:sp>
+      <p:pic>
+        <p:nvPicPr>
+          <p:cNvPr id="4" name="Picture 3">
+            <a:extLst>
+              <a:ext uri="{FF2B5EF4-FFF2-40B4-BE49-F238E27FC236}">
+                <a16:creationId xmlns:a16="http://schemas.microsoft.com/office/drawing/2014/main" xmlns="" id="{1438ED8A-506F-9D64-76A3-FF287B97D93E}"/>
+              </a:ext>
+            </a:extLst>
+          </p:cNvPr>
+          <p:cNvPicPr>
+            <a:picLocks noChangeAspect="1"/>
+          </p:cNvPicPr>
+          <p:nvPr/>
+        </p:nvPicPr>
+        <p:blipFill>
+          <a:blip r:embed="rId2"/>
+          <a:stretch>
+            <a:fillRect/>
+          </a:stretch>
+        </p:blipFill>
+        <p:spPr>
+          <a:xfrm>
+            <a:off x="0" y="1690688"/>
+            <a:ext cx="10335491" cy="4880070"/>
+          </a:xfrm>
+          <a:prstGeom prst="rect">
+            <a:avLst/>
+          </a:prstGeom>
+        </p:spPr>
+      </p:pic>
+    </p:spTree>
+    <p:extLst>
+      <p:ext uri="{BB962C8B-B14F-4D97-AF65-F5344CB8AC3E}">
+        <p14:creationId xmlns:p14="http://schemas.microsoft.com/office/powerpoint/2010/main" val="4109207767"/>
+      </p:ext>
+    </p:extLst>
+  </p:cSld>
+  <p:clrMapOvr>
+    <a:masterClrMapping/>
+  </p:clrMapOvr>
+</p:sld>
+</file>
+
+<file path=ppt/slides/slide31.xml><?xml version="1.0" encoding="utf-8"?>
+<p:sld xmlns:a="http://schemas.openxmlformats.org/drawingml/2006/main" xmlns:r="http://schemas.openxmlformats.org/officeDocument/2006/relationships" xmlns:p="http://schemas.openxmlformats.org/presentationml/2006/main">
+  <p:cSld>
+    <p:spTree>
+      <p:nvGrpSpPr>
+        <p:cNvPr id="1" name=""/>
+        <p:cNvGrpSpPr/>
+        <p:nvPr/>
+      </p:nvGrpSpPr>
+      <p:grpSpPr>
+        <a:xfrm>
+          <a:off x="0" y="0"/>
+          <a:ext cx="0" cy="0"/>
+          <a:chOff x="0" y="0"/>
+          <a:chExt cx="0" cy="0"/>
+        </a:xfrm>
+      </p:grpSpPr>
+      <p:sp>
+        <p:nvSpPr>
+          <p:cNvPr id="2" name="Title 1">
+            <a:extLst>
+              <a:ext uri="{FF2B5EF4-FFF2-40B4-BE49-F238E27FC236}">
+                <a16:creationId xmlns:a16="http://schemas.microsoft.com/office/drawing/2014/main" xmlns="" id="{CB826CEC-7668-7AD9-3E10-324C9172442E}"/>
+              </a:ext>
+            </a:extLst>
+          </p:cNvPr>
+          <p:cNvSpPr>
+            <a:spLocks noGrp="1"/>
+          </p:cNvSpPr>
+          <p:nvPr>
+            <p:ph type="title"/>
+          </p:nvPr>
+        </p:nvSpPr>
+        <p:spPr/>
+        <p:txBody>
+          <a:bodyPr/>
+          <a:lstStyle/>
+          <a:p>
+            <a:r>
+              <a:rPr lang="en-US" dirty="0"/>
+              <a:t>BASIC, graph_8</a:t>
+            </a:r>
+          </a:p>
+        </p:txBody>
+      </p:sp>
+      <p:pic>
+        <p:nvPicPr>
+          <p:cNvPr id="4" name="Picture 3">
+            <a:extLst>
+              <a:ext uri="{FF2B5EF4-FFF2-40B4-BE49-F238E27FC236}">
+                <a16:creationId xmlns:a16="http://schemas.microsoft.com/office/drawing/2014/main" xmlns="" id="{EDEB1195-F2D7-51CD-474F-D3D6FA475A6E}"/>
+              </a:ext>
+            </a:extLst>
+          </p:cNvPr>
+          <p:cNvPicPr>
+            <a:picLocks noChangeAspect="1"/>
+          </p:cNvPicPr>
+          <p:nvPr/>
+        </p:nvPicPr>
+        <p:blipFill>
+          <a:blip r:embed="rId2"/>
+          <a:stretch>
+            <a:fillRect/>
+          </a:stretch>
+        </p:blipFill>
+        <p:spPr>
+          <a:xfrm>
+            <a:off x="0" y="2469624"/>
+            <a:ext cx="12192000" cy="2790627"/>
+          </a:xfrm>
+          <a:prstGeom prst="rect">
+            <a:avLst/>
+          </a:prstGeom>
+        </p:spPr>
+      </p:pic>
+    </p:spTree>
+    <p:extLst>
+      <p:ext uri="{BB962C8B-B14F-4D97-AF65-F5344CB8AC3E}">
+        <p14:creationId xmlns:p14="http://schemas.microsoft.com/office/powerpoint/2010/main" val="1179465604"/>
+      </p:ext>
+    </p:extLst>
+  </p:cSld>
+  <p:clrMapOvr>
+    <a:masterClrMapping/>
+  </p:clrMapOvr>
+</p:sld>
+</file>
+
+<file path=ppt/slides/slide32.xml><?xml version="1.0" encoding="utf-8"?>
+<p:sld xmlns:a="http://schemas.openxmlformats.org/drawingml/2006/main" xmlns:r="http://schemas.openxmlformats.org/officeDocument/2006/relationships" xmlns:p="http://schemas.openxmlformats.org/presentationml/2006/main">
+  <p:cSld>
+    <p:spTree>
+      <p:nvGrpSpPr>
+        <p:cNvPr id="1" name=""/>
+        <p:cNvGrpSpPr/>
+        <p:nvPr/>
+      </p:nvGrpSpPr>
+      <p:grpSpPr>
+        <a:xfrm>
+          <a:off x="0" y="0"/>
+          <a:ext cx="0" cy="0"/>
+          <a:chOff x="0" y="0"/>
+          <a:chExt cx="0" cy="0"/>
+        </a:xfrm>
+      </p:grpSpPr>
+      <p:sp>
+        <p:nvSpPr>
+          <p:cNvPr id="2" name="Title 1">
+            <a:extLst>
+              <a:ext uri="{FF2B5EF4-FFF2-40B4-BE49-F238E27FC236}">
+                <a16:creationId xmlns:a16="http://schemas.microsoft.com/office/drawing/2014/main" xmlns="" id="{F5ECD825-C439-7039-23E6-60350D21DEAB}"/>
+              </a:ext>
+            </a:extLst>
+          </p:cNvPr>
+          <p:cNvSpPr>
+            <a:spLocks noGrp="1"/>
+          </p:cNvSpPr>
+          <p:nvPr>
+            <p:ph type="title"/>
+          </p:nvPr>
+        </p:nvSpPr>
+        <p:spPr/>
+        <p:txBody>
+          <a:bodyPr/>
+          <a:lstStyle/>
+          <a:p>
+            <a:r>
+              <a:rPr lang="en-US" dirty="0"/>
+              <a:t>SC, graph_8</a:t>
+            </a:r>
+          </a:p>
+        </p:txBody>
+      </p:sp>
+      <p:pic>
+        <p:nvPicPr>
+          <p:cNvPr id="4" name="Picture 3">
+            <a:extLst>
+              <a:ext uri="{FF2B5EF4-FFF2-40B4-BE49-F238E27FC236}">
+                <a16:creationId xmlns:a16="http://schemas.microsoft.com/office/drawing/2014/main" xmlns="" id="{A3A29C8B-8522-B51D-F23A-C5AFDE628FDB}"/>
+              </a:ext>
+            </a:extLst>
+          </p:cNvPr>
+          <p:cNvPicPr>
+            <a:picLocks noChangeAspect="1"/>
+          </p:cNvPicPr>
+          <p:nvPr/>
+        </p:nvPicPr>
+        <p:blipFill>
+          <a:blip r:embed="rId2"/>
+          <a:stretch>
+            <a:fillRect/>
+          </a:stretch>
+        </p:blipFill>
+        <p:spPr>
+          <a:xfrm>
+            <a:off x="0" y="2279694"/>
+            <a:ext cx="12192000" cy="3233791"/>
+          </a:xfrm>
+          <a:prstGeom prst="rect">
+            <a:avLst/>
+          </a:prstGeom>
+        </p:spPr>
+      </p:pic>
+    </p:spTree>
+    <p:extLst>
+      <p:ext uri="{BB962C8B-B14F-4D97-AF65-F5344CB8AC3E}">
+        <p14:creationId xmlns:p14="http://schemas.microsoft.com/office/powerpoint/2010/main" val="4016728384"/>
+      </p:ext>
+    </p:extLst>
+  </p:cSld>
+  <p:clrMapOvr>
+    <a:masterClrMapping/>
+  </p:clrMapOvr>
+</p:sld>
+</file>
+
+<file path=ppt/slides/slide33.xml><?xml version="1.0" encoding="utf-8"?>
+<p:sld xmlns:a="http://schemas.openxmlformats.org/drawingml/2006/main" xmlns:r="http://schemas.openxmlformats.org/officeDocument/2006/relationships" xmlns:p="http://schemas.openxmlformats.org/presentationml/2006/main">
+  <p:cSld>
+    <p:spTree>
+      <p:nvGrpSpPr>
+        <p:cNvPr id="1" name=""/>
+        <p:cNvGrpSpPr/>
+        <p:nvPr/>
+      </p:nvGrpSpPr>
+      <p:grpSpPr>
+        <a:xfrm>
+          <a:off x="0" y="0"/>
+          <a:ext cx="0" cy="0"/>
+          <a:chOff x="0" y="0"/>
+          <a:chExt cx="0" cy="0"/>
+        </a:xfrm>
+      </p:grpSpPr>
+      <p:sp>
+        <p:nvSpPr>
+          <p:cNvPr id="2" name="Title 1">
+            <a:extLst>
+              <a:ext uri="{FF2B5EF4-FFF2-40B4-BE49-F238E27FC236}">
+                <a16:creationId xmlns:a16="http://schemas.microsoft.com/office/drawing/2014/main" xmlns="" id="{7E75FED4-BA3D-0044-55EA-1518683CD07B}"/>
+              </a:ext>
+            </a:extLst>
+          </p:cNvPr>
+          <p:cNvSpPr>
+            <a:spLocks noGrp="1"/>
+          </p:cNvSpPr>
+          <p:nvPr>
+            <p:ph type="title"/>
+          </p:nvPr>
+        </p:nvSpPr>
+        <p:spPr/>
+        <p:txBody>
+          <a:bodyPr/>
+          <a:lstStyle/>
+          <a:p>
+            <a:r>
+              <a:rPr lang="ru-RU" dirty="0"/>
+              <a:t>Выводы</a:t>
+            </a:r>
+            <a:endParaRPr lang="en-US" dirty="0"/>
+          </a:p>
+        </p:txBody>
+      </p:sp>
+    </p:spTree>
+    <p:extLst>
+      <p:ext uri="{BB962C8B-B14F-4D97-AF65-F5344CB8AC3E}">
+        <p14:creationId xmlns:p14="http://schemas.microsoft.com/office/powerpoint/2010/main" val="1017558136"/>
+      </p:ext>
+    </p:extLst>
+  </p:cSld>
+  <p:clrMapOvr>
+    <a:masterClrMapping/>
+  </p:clrMapOvr>
+</p:sld>
+</file>
+
+<file path=ppt/slides/slide34.xml><?xml version="1.0" encoding="utf-8"?>
+<p:sld xmlns:a="http://schemas.openxmlformats.org/drawingml/2006/main" xmlns:r="http://schemas.openxmlformats.org/officeDocument/2006/relationships" xmlns:p="http://schemas.openxmlformats.org/presentationml/2006/main">
+  <p:cSld>
+    <p:spTree>
+      <p:nvGrpSpPr>
+        <p:cNvPr id="1" name=""/>
+        <p:cNvGrpSpPr/>
+        <p:nvPr/>
+      </p:nvGrpSpPr>
+      <p:grpSpPr>
+        <a:xfrm>
+          <a:off x="0" y="0"/>
+          <a:ext cx="0" cy="0"/>
+          <a:chOff x="0" y="0"/>
+          <a:chExt cx="0" cy="0"/>
+        </a:xfrm>
+      </p:grpSpPr>
+      <p:sp>
+        <p:nvSpPr>
+          <p:cNvPr id="2" name="Title 1">
+            <a:extLst>
+              <a:ext uri="{FF2B5EF4-FFF2-40B4-BE49-F238E27FC236}">
+                <a16:creationId xmlns:a16="http://schemas.microsoft.com/office/drawing/2014/main" xmlns="" id="{ADBFFA0D-F416-5165-C864-9DAC1A68A858}"/>
+              </a:ext>
+            </a:extLst>
+          </p:cNvPr>
+          <p:cNvSpPr>
+            <a:spLocks noGrp="1"/>
+          </p:cNvSpPr>
+          <p:nvPr>
+            <p:ph type="title"/>
+          </p:nvPr>
+        </p:nvSpPr>
+        <p:spPr/>
+        <p:txBody>
+          <a:bodyPr/>
+          <a:lstStyle/>
+          <a:p>
+            <a:pPr marL="285750" indent="-285750"/>
+            <a:r>
+              <a:rPr lang="ru-RU" dirty="0"/>
+              <a:t>«Чем больше </a:t>
+            </a:r>
+            <a:r>
+              <a:rPr lang="en-US" dirty="0"/>
+              <a:t>k, </a:t>
+            </a:r>
+            <a:r>
+              <a:rPr lang="ru-RU" dirty="0"/>
+              <a:t>тем меньше ошибка</a:t>
+            </a:r>
+            <a:r>
+              <a:rPr lang="en-US" dirty="0"/>
+              <a:t>»</a:t>
+            </a:r>
+            <a:endParaRPr lang="ru-RU" dirty="0"/>
+          </a:p>
+        </p:txBody>
+      </p:sp>
+      <p:pic>
+        <p:nvPicPr>
+          <p:cNvPr id="3" name="Picture 2">
+            <a:extLst>
+              <a:ext uri="{FF2B5EF4-FFF2-40B4-BE49-F238E27FC236}">
+                <a16:creationId xmlns:a16="http://schemas.microsoft.com/office/drawing/2014/main" xmlns="" id="{0C203DB1-651F-A9A9-2A88-04DE924AFE98}"/>
+              </a:ext>
+            </a:extLst>
+          </p:cNvPr>
+          <p:cNvPicPr>
+            <a:picLocks noChangeAspect="1"/>
+          </p:cNvPicPr>
+          <p:nvPr/>
+        </p:nvPicPr>
+        <p:blipFill>
+          <a:blip r:embed="rId2"/>
+          <a:stretch>
+            <a:fillRect/>
+          </a:stretch>
+        </p:blipFill>
+        <p:spPr>
+          <a:xfrm>
+            <a:off x="992909" y="1227313"/>
+            <a:ext cx="10206181" cy="5265562"/>
+          </a:xfrm>
+          <a:prstGeom prst="rect">
+            <a:avLst/>
+          </a:prstGeom>
+        </p:spPr>
+      </p:pic>
+    </p:spTree>
+    <p:extLst>
+      <p:ext uri="{BB962C8B-B14F-4D97-AF65-F5344CB8AC3E}">
+        <p14:creationId xmlns:p14="http://schemas.microsoft.com/office/powerpoint/2010/main" val="2225980345"/>
+      </p:ext>
+    </p:extLst>
+  </p:cSld>
+  <p:clrMapOvr>
+    <a:masterClrMapping/>
+  </p:clrMapOvr>
+</p:sld>
+</file>
+
+<file path=ppt/slides/slide35.xml><?xml version="1.0" encoding="utf-8"?>
+<p:sld xmlns:a="http://schemas.openxmlformats.org/drawingml/2006/main" xmlns:r="http://schemas.openxmlformats.org/officeDocument/2006/relationships" xmlns:p="http://schemas.openxmlformats.org/presentationml/2006/main">
+  <p:cSld>
+    <p:spTree>
+      <p:nvGrpSpPr>
+        <p:cNvPr id="1" name=""/>
+        <p:cNvGrpSpPr/>
+        <p:nvPr/>
+      </p:nvGrpSpPr>
+      <p:grpSpPr>
+        <a:xfrm>
+          <a:off x="0" y="0"/>
+          <a:ext cx="0" cy="0"/>
+          <a:chOff x="0" y="0"/>
+          <a:chExt cx="0" cy="0"/>
+        </a:xfrm>
+      </p:grpSpPr>
+      <p:sp>
+        <p:nvSpPr>
+          <p:cNvPr id="2" name="Title 1">
+            <a:extLst>
+              <a:ext uri="{FF2B5EF4-FFF2-40B4-BE49-F238E27FC236}">
+                <a16:creationId xmlns:a16="http://schemas.microsoft.com/office/drawing/2014/main" xmlns="" id="{0C631C54-E4AC-D8A7-1B34-76236A6D661A}"/>
+              </a:ext>
+            </a:extLst>
+          </p:cNvPr>
+          <p:cNvSpPr>
+            <a:spLocks noGrp="1"/>
+          </p:cNvSpPr>
+          <p:nvPr>
+            <p:ph type="title"/>
+          </p:nvPr>
+        </p:nvSpPr>
+        <p:spPr/>
+        <p:txBody>
+          <a:bodyPr/>
+          <a:lstStyle/>
+          <a:p>
+            <a:r>
+              <a:rPr lang="ru-RU" dirty="0"/>
+              <a:t>«</a:t>
+            </a:r>
+            <a:r>
+              <a:rPr lang="en-US" dirty="0"/>
+              <a:t>random – </a:t>
+            </a:r>
+            <a:r>
+              <a:rPr lang="ru-RU" dirty="0"/>
+              <a:t>плохо, </a:t>
+            </a:r>
+            <a:r>
+              <a:rPr lang="en-US" dirty="0"/>
+              <a:t>highest deg ≈</a:t>
+            </a:r>
+            <a:r>
+              <a:rPr lang="ru-RU" dirty="0"/>
+              <a:t> </a:t>
+            </a:r>
+            <a:r>
+              <a:rPr lang="en-US" dirty="0"/>
+              <a:t>best </a:t>
+            </a:r>
+            <a:r>
+              <a:rPr lang="en-US" dirty="0" err="1"/>
+              <a:t>cov</a:t>
+            </a:r>
+            <a:r>
+              <a:rPr lang="en-US" dirty="0"/>
+              <a:t>.</a:t>
+            </a:r>
+            <a:r>
+              <a:rPr lang="ru-RU" dirty="0"/>
+              <a:t>»</a:t>
+            </a:r>
+            <a:endParaRPr lang="en-US" dirty="0"/>
+          </a:p>
+        </p:txBody>
+      </p:sp>
+      <p:pic>
+        <p:nvPicPr>
+          <p:cNvPr id="4" name="Picture 3">
+            <a:extLst>
+              <a:ext uri="{FF2B5EF4-FFF2-40B4-BE49-F238E27FC236}">
+                <a16:creationId xmlns:a16="http://schemas.microsoft.com/office/drawing/2014/main" xmlns="" id="{927EBC07-599A-A784-1C4A-885CEE0BB65E}"/>
+              </a:ext>
+            </a:extLst>
+          </p:cNvPr>
+          <p:cNvPicPr>
+            <a:picLocks noChangeAspect="1"/>
+          </p:cNvPicPr>
+          <p:nvPr/>
+        </p:nvPicPr>
+        <p:blipFill>
+          <a:blip r:embed="rId2"/>
+          <a:stretch>
+            <a:fillRect/>
+          </a:stretch>
+        </p:blipFill>
+        <p:spPr>
+          <a:xfrm>
+            <a:off x="838200" y="1418983"/>
+            <a:ext cx="9885218" cy="5099971"/>
+          </a:xfrm>
+          <a:prstGeom prst="rect">
+            <a:avLst/>
+          </a:prstGeom>
+        </p:spPr>
+      </p:pic>
+    </p:spTree>
+    <p:extLst>
+      <p:ext uri="{BB962C8B-B14F-4D97-AF65-F5344CB8AC3E}">
+        <p14:creationId xmlns:p14="http://schemas.microsoft.com/office/powerpoint/2010/main" val="1889584106"/>
+      </p:ext>
+    </p:extLst>
+  </p:cSld>
+  <p:clrMapOvr>
+    <a:masterClrMapping/>
+  </p:clrMapOvr>
+</p:sld>
+</file>
+
+<file path=ppt/slides/slide36.xml><?xml version="1.0" encoding="utf-8"?>
+<p:sld xmlns:a="http://schemas.openxmlformats.org/drawingml/2006/main" xmlns:r="http://schemas.openxmlformats.org/officeDocument/2006/relationships" xmlns:p="http://schemas.openxmlformats.org/presentationml/2006/main">
+  <p:cSld>
+    <p:spTree>
+      <p:nvGrpSpPr>
+        <p:cNvPr id="1" name=""/>
+        <p:cNvGrpSpPr/>
+        <p:nvPr/>
+      </p:nvGrpSpPr>
+      <p:grpSpPr>
+        <a:xfrm>
+          <a:off x="0" y="0"/>
+          <a:ext cx="0" cy="0"/>
+          <a:chOff x="0" y="0"/>
+          <a:chExt cx="0" cy="0"/>
+        </a:xfrm>
+      </p:grpSpPr>
+      <p:sp>
+        <p:nvSpPr>
+          <p:cNvPr id="2" name="Title 1">
+            <a:extLst>
+              <a:ext uri="{FF2B5EF4-FFF2-40B4-BE49-F238E27FC236}">
+                <a16:creationId xmlns:a16="http://schemas.microsoft.com/office/drawing/2014/main" xmlns="" id="{8BBA76AE-94FC-94B7-D83D-F37CE62496F0}"/>
+              </a:ext>
+            </a:extLst>
+          </p:cNvPr>
+          <p:cNvSpPr>
+            <a:spLocks noGrp="1"/>
+          </p:cNvSpPr>
+          <p:nvPr>
+            <p:ph type="title"/>
+          </p:nvPr>
+        </p:nvSpPr>
+        <p:spPr/>
+        <p:txBody>
+          <a:bodyPr/>
+          <a:lstStyle/>
+          <a:p>
+            <a:r>
+              <a:rPr lang="ru-RU" dirty="0"/>
+              <a:t>«</a:t>
+            </a:r>
+            <a:r>
+              <a:rPr lang="en-US" dirty="0"/>
+              <a:t>SC </a:t>
+            </a:r>
+            <a:r>
+              <a:rPr lang="ru-RU" dirty="0"/>
+              <a:t>точнее, чем </a:t>
+            </a:r>
+            <a:r>
+              <a:rPr lang="en-US" dirty="0"/>
+              <a:t>BASIC</a:t>
+            </a:r>
+            <a:r>
+              <a:rPr lang="ru-RU" dirty="0"/>
+              <a:t>»</a:t>
+            </a:r>
+            <a:endParaRPr lang="en-US" dirty="0"/>
+          </a:p>
+        </p:txBody>
+      </p:sp>
+      <p:pic>
+        <p:nvPicPr>
+          <p:cNvPr id="4" name="Picture 3">
+            <a:extLst>
+              <a:ext uri="{FF2B5EF4-FFF2-40B4-BE49-F238E27FC236}">
+                <a16:creationId xmlns:a16="http://schemas.microsoft.com/office/drawing/2014/main" xmlns="" id="{BBD84003-7E97-39E0-476A-2FE6AEE4F662}"/>
+              </a:ext>
+            </a:extLst>
+          </p:cNvPr>
+          <p:cNvPicPr>
+            <a:picLocks noChangeAspect="1"/>
+          </p:cNvPicPr>
+          <p:nvPr/>
+        </p:nvPicPr>
+        <p:blipFill>
+          <a:blip r:embed="rId2"/>
+          <a:stretch>
+            <a:fillRect/>
+          </a:stretch>
+        </p:blipFill>
+        <p:spPr>
+          <a:xfrm>
+            <a:off x="838200" y="1452358"/>
+            <a:ext cx="10477697" cy="5405642"/>
+          </a:xfrm>
+          <a:prstGeom prst="rect">
+            <a:avLst/>
+          </a:prstGeom>
+        </p:spPr>
+      </p:pic>
+    </p:spTree>
+    <p:extLst>
+      <p:ext uri="{BB962C8B-B14F-4D97-AF65-F5344CB8AC3E}">
+        <p14:creationId xmlns:p14="http://schemas.microsoft.com/office/powerpoint/2010/main" val="2562799789"/>
+      </p:ext>
+    </p:extLst>
+  </p:cSld>
+  <p:clrMapOvr>
+    <a:masterClrMapping/>
+  </p:clrMapOvr>
+</p:sld>
+</file>
+
+<file path=ppt/slides/slide37.xml><?xml version="1.0" encoding="utf-8"?>
+<p:sld xmlns:a="http://schemas.openxmlformats.org/drawingml/2006/main" xmlns:r="http://schemas.openxmlformats.org/officeDocument/2006/relationships" xmlns:p="http://schemas.openxmlformats.org/presentationml/2006/main">
+  <p:cSld>
+    <p:spTree>
+      <p:nvGrpSpPr>
+        <p:cNvPr id="1" name=""/>
+        <p:cNvGrpSpPr/>
+        <p:nvPr/>
+      </p:nvGrpSpPr>
+      <p:grpSpPr>
+        <a:xfrm>
+          <a:off x="0" y="0"/>
+          <a:ext cx="0" cy="0"/>
+          <a:chOff x="0" y="0"/>
+          <a:chExt cx="0" cy="0"/>
+        </a:xfrm>
+      </p:grpSpPr>
+      <p:sp>
+        <p:nvSpPr>
+          <p:cNvPr id="2" name="Title 1">
+            <a:extLst>
+              <a:ext uri="{FF2B5EF4-FFF2-40B4-BE49-F238E27FC236}">
+                <a16:creationId xmlns:a16="http://schemas.microsoft.com/office/drawing/2014/main" xmlns="" id="{AD1516AC-33EF-C906-D3C5-2848A8F78C7F}"/>
+              </a:ext>
+            </a:extLst>
+          </p:cNvPr>
+          <p:cNvSpPr>
+            <a:spLocks noGrp="1"/>
+          </p:cNvSpPr>
+          <p:nvPr>
+            <p:ph type="title"/>
+          </p:nvPr>
+        </p:nvSpPr>
+        <p:spPr/>
+        <p:txBody>
+          <a:bodyPr/>
+          <a:lstStyle/>
+          <a:p>
+            <a:r>
+              <a:rPr lang="ru-RU" dirty="0"/>
+              <a:t>Общие графики точности</a:t>
+            </a:r>
+            <a:endParaRPr lang="en-US" dirty="0"/>
+          </a:p>
+        </p:txBody>
+      </p:sp>
+      <p:pic>
+        <p:nvPicPr>
+          <p:cNvPr id="4" name="Picture 3">
+            <a:extLst>
+              <a:ext uri="{FF2B5EF4-FFF2-40B4-BE49-F238E27FC236}">
+                <a16:creationId xmlns:a16="http://schemas.microsoft.com/office/drawing/2014/main" xmlns="" id="{466DC8DD-50B5-FCD4-56B0-C74DFD015E76}"/>
+              </a:ext>
+            </a:extLst>
+          </p:cNvPr>
+          <p:cNvPicPr>
+            <a:picLocks noChangeAspect="1"/>
+          </p:cNvPicPr>
+          <p:nvPr/>
+        </p:nvPicPr>
+        <p:blipFill>
+          <a:blip r:embed="rId2"/>
+          <a:stretch>
+            <a:fillRect/>
+          </a:stretch>
+        </p:blipFill>
+        <p:spPr>
+          <a:xfrm>
+            <a:off x="1037936" y="1273774"/>
+            <a:ext cx="10116127" cy="5219101"/>
+          </a:xfrm>
+          <a:prstGeom prst="rect">
+            <a:avLst/>
+          </a:prstGeom>
+        </p:spPr>
+      </p:pic>
+    </p:spTree>
+    <p:extLst>
+      <p:ext uri="{BB962C8B-B14F-4D97-AF65-F5344CB8AC3E}">
+        <p14:creationId xmlns:p14="http://schemas.microsoft.com/office/powerpoint/2010/main" val="1306460401"/>
+      </p:ext>
+    </p:extLst>
+  </p:cSld>
+  <p:clrMapOvr>
+    <a:masterClrMapping/>
+  </p:clrMapOvr>
+</p:sld>
+</file>
+
+<file path=ppt/slides/slide38.xml><?xml version="1.0" encoding="utf-8"?>
+<p:sld xmlns:a="http://schemas.openxmlformats.org/drawingml/2006/main" xmlns:r="http://schemas.openxmlformats.org/officeDocument/2006/relationships" xmlns:p="http://schemas.openxmlformats.org/presentationml/2006/main">
+  <p:cSld>
+    <p:spTree>
+      <p:nvGrpSpPr>
+        <p:cNvPr id="1" name=""/>
+        <p:cNvGrpSpPr/>
+        <p:nvPr/>
+      </p:nvGrpSpPr>
+      <p:grpSpPr>
+        <a:xfrm>
+          <a:off x="0" y="0"/>
+          <a:ext cx="0" cy="0"/>
+          <a:chOff x="0" y="0"/>
+          <a:chExt cx="0" cy="0"/>
+        </a:xfrm>
+      </p:grpSpPr>
+      <p:sp>
+        <p:nvSpPr>
+          <p:cNvPr id="2" name="Title 1">
+            <a:extLst>
+              <a:ext uri="{FF2B5EF4-FFF2-40B4-BE49-F238E27FC236}">
+                <a16:creationId xmlns:a16="http://schemas.microsoft.com/office/drawing/2014/main" xmlns="" id="{5AC25505-2F1F-03B1-90A1-04FAFA12ABE9}"/>
+              </a:ext>
+            </a:extLst>
+          </p:cNvPr>
+          <p:cNvSpPr>
+            <a:spLocks noGrp="1"/>
+          </p:cNvSpPr>
+          <p:nvPr>
+            <p:ph type="title"/>
+          </p:nvPr>
+        </p:nvSpPr>
+        <p:spPr/>
+        <p:txBody>
+          <a:bodyPr/>
+          <a:lstStyle/>
+          <a:p>
+            <a:r>
+              <a:rPr lang="ru-RU" dirty="0"/>
+              <a:t>«больше всего времени на подготовку</a:t>
+            </a:r>
+            <a:r>
+              <a:rPr lang="en-US" dirty="0"/>
+              <a:t/>
+            </a:r>
+            <a:br>
+              <a:rPr lang="en-US" dirty="0"/>
+            </a:br>
+            <a:r>
+              <a:rPr lang="en-US" dirty="0"/>
+              <a:t>	</a:t>
+            </a:r>
+            <a:r>
+              <a:rPr lang="ru-RU" dirty="0"/>
+              <a:t>(</a:t>
+            </a:r>
+            <a:r>
+              <a:rPr lang="en-US" dirty="0"/>
+              <a:t>BFS -&gt; d(v, landmark)</a:t>
+            </a:r>
+            <a:r>
+              <a:rPr lang="ru-RU" dirty="0"/>
+              <a:t>»</a:t>
+            </a:r>
+            <a:endParaRPr lang="en-US" dirty="0"/>
+          </a:p>
+        </p:txBody>
+      </p:sp>
+      <p:pic>
+        <p:nvPicPr>
+          <p:cNvPr id="4" name="Picture 3">
+            <a:extLst>
+              <a:ext uri="{FF2B5EF4-FFF2-40B4-BE49-F238E27FC236}">
+                <a16:creationId xmlns:a16="http://schemas.microsoft.com/office/drawing/2014/main" xmlns="" id="{CF845D17-27EC-8755-D41C-1921268F531E}"/>
+              </a:ext>
+            </a:extLst>
+          </p:cNvPr>
+          <p:cNvPicPr>
+            <a:picLocks noChangeAspect="1"/>
+          </p:cNvPicPr>
+          <p:nvPr/>
+        </p:nvPicPr>
+        <p:blipFill>
+          <a:blip r:embed="rId2"/>
+          <a:stretch>
+            <a:fillRect/>
+          </a:stretch>
+        </p:blipFill>
+        <p:spPr>
+          <a:xfrm>
+            <a:off x="838200" y="1690688"/>
+            <a:ext cx="9581120" cy="4943081"/>
+          </a:xfrm>
+          <a:prstGeom prst="rect">
+            <a:avLst/>
+          </a:prstGeom>
+        </p:spPr>
+      </p:pic>
+    </p:spTree>
+    <p:extLst>
+      <p:ext uri="{BB962C8B-B14F-4D97-AF65-F5344CB8AC3E}">
+        <p14:creationId xmlns:p14="http://schemas.microsoft.com/office/powerpoint/2010/main" val="3175243423"/>
+      </p:ext>
+    </p:extLst>
+  </p:cSld>
+  <p:clrMapOvr>
+    <a:masterClrMapping/>
+  </p:clrMapOvr>
+</p:sld>
+</file>
+
+<file path=ppt/slides/slide39.xml><?xml version="1.0" encoding="utf-8"?>
+<p:sld xmlns:a="http://schemas.openxmlformats.org/drawingml/2006/main" xmlns:r="http://schemas.openxmlformats.org/officeDocument/2006/relationships" xmlns:p="http://schemas.openxmlformats.org/presentationml/2006/main">
+  <p:cSld>
+    <p:spTree>
+      <p:nvGrpSpPr>
+        <p:cNvPr id="1" name=""/>
+        <p:cNvGrpSpPr/>
+        <p:nvPr/>
+      </p:nvGrpSpPr>
+      <p:grpSpPr>
+        <a:xfrm>
+          <a:off x="0" y="0"/>
+          <a:ext cx="0" cy="0"/>
+          <a:chOff x="0" y="0"/>
+          <a:chExt cx="0" cy="0"/>
+        </a:xfrm>
+      </p:grpSpPr>
+      <p:sp>
+        <p:nvSpPr>
+          <p:cNvPr id="2" name="Title 1">
+            <a:extLst>
+              <a:ext uri="{FF2B5EF4-FFF2-40B4-BE49-F238E27FC236}">
+                <a16:creationId xmlns:a16="http://schemas.microsoft.com/office/drawing/2014/main" xmlns="" id="{755CFD76-7095-B563-9C4C-ED80BF88F3F8}"/>
+              </a:ext>
+            </a:extLst>
+          </p:cNvPr>
+          <p:cNvSpPr>
+            <a:spLocks noGrp="1"/>
+          </p:cNvSpPr>
+          <p:nvPr>
+            <p:ph type="title"/>
+          </p:nvPr>
+        </p:nvSpPr>
+        <p:spPr/>
+        <p:txBody>
+          <a:bodyPr/>
+          <a:lstStyle/>
+          <a:p>
+            <a:r>
+              <a:rPr lang="ru-RU" dirty="0"/>
+              <a:t>«больше всего времени на подготовку</a:t>
+            </a:r>
+            <a:r>
+              <a:rPr lang="en-US" dirty="0"/>
+              <a:t/>
+            </a:r>
+            <a:br>
+              <a:rPr lang="en-US" dirty="0"/>
+            </a:br>
+            <a:r>
+              <a:rPr lang="en-US" dirty="0"/>
+              <a:t>	</a:t>
+            </a:r>
+            <a:r>
+              <a:rPr lang="ru-RU" dirty="0"/>
+              <a:t>(</a:t>
+            </a:r>
+            <a:r>
+              <a:rPr lang="en-US" dirty="0"/>
+              <a:t>SPT)</a:t>
+            </a:r>
+            <a:r>
+              <a:rPr lang="ru-RU" dirty="0"/>
+              <a:t>»</a:t>
+            </a:r>
+            <a:endParaRPr lang="en-US" dirty="0"/>
+          </a:p>
+        </p:txBody>
+      </p:sp>
+      <p:pic>
+        <p:nvPicPr>
+          <p:cNvPr id="3" name="Picture 2">
+            <a:extLst>
+              <a:ext uri="{FF2B5EF4-FFF2-40B4-BE49-F238E27FC236}">
+                <a16:creationId xmlns:a16="http://schemas.microsoft.com/office/drawing/2014/main" xmlns="" id="{3059EA7E-7D40-7647-E892-8A766FF71D5D}"/>
+              </a:ext>
+            </a:extLst>
+          </p:cNvPr>
+          <p:cNvPicPr>
+            <a:picLocks noChangeAspect="1"/>
+          </p:cNvPicPr>
+          <p:nvPr/>
+        </p:nvPicPr>
+        <p:blipFill>
+          <a:blip r:embed="rId2"/>
+          <a:stretch>
+            <a:fillRect/>
+          </a:stretch>
+        </p:blipFill>
+        <p:spPr>
+          <a:xfrm>
+            <a:off x="685799" y="1690688"/>
+            <a:ext cx="9963727" cy="5140475"/>
+          </a:xfrm>
+          <a:prstGeom prst="rect">
+            <a:avLst/>
+          </a:prstGeom>
+        </p:spPr>
+      </p:pic>
+    </p:spTree>
+    <p:extLst>
+      <p:ext uri="{BB962C8B-B14F-4D97-AF65-F5344CB8AC3E}">
+        <p14:creationId xmlns:p14="http://schemas.microsoft.com/office/powerpoint/2010/main" val="1149846118"/>
       </p:ext>
     </p:extLst>
   </p:cSld>
@@ -4492,13 +7043,7 @@
       </p:grpSpPr>
       <p:sp>
         <p:nvSpPr>
-          <p:cNvPr id="2" name="Title 1">
-            <a:extLst>
-              <a:ext uri="{FF2B5EF4-FFF2-40B4-BE49-F238E27FC236}">
-                <a16:creationId xmlns:a16="http://schemas.microsoft.com/office/drawing/2014/main" id="{974320BD-0033-9124-790E-39B1626E503A}"/>
-              </a:ext>
-            </a:extLst>
-          </p:cNvPr>
+          <p:cNvPr id="2" name="Заголовок 1"/>
           <p:cNvSpPr>
             <a:spLocks noGrp="1"/>
           </p:cNvSpPr>
@@ -4506,32 +7051,26 @@
             <p:ph type="title"/>
           </p:nvPr>
         </p:nvSpPr>
-        <p:spPr/>
+        <p:spPr>
+          <a:xfrm>
+            <a:off x="407126" y="149588"/>
+            <a:ext cx="10515600" cy="1325563"/>
+          </a:xfrm>
+        </p:spPr>
         <p:txBody>
           <a:bodyPr/>
           <a:lstStyle/>
           <a:p>
             <a:r>
-              <a:rPr lang="en-US" dirty="0"/>
-              <a:t>SC, CA-</a:t>
-            </a:r>
-            <a:r>
-              <a:rPr lang="en-US" dirty="0" err="1"/>
-              <a:t>AstroPh</a:t>
-            </a:r>
-            <a:endParaRPr lang="en-US" dirty="0"/>
+              <a:rPr lang="ru-RU" dirty="0"/>
+              <a:t>Анализ структуры сети</a:t>
+            </a:r>
           </a:p>
         </p:txBody>
       </p:sp>
       <p:pic>
         <p:nvPicPr>
-          <p:cNvPr id="4" name="Picture 3">
-            <a:extLst>
-              <a:ext uri="{FF2B5EF4-FFF2-40B4-BE49-F238E27FC236}">
-                <a16:creationId xmlns:a16="http://schemas.microsoft.com/office/drawing/2014/main" id="{3F6718B2-C299-F2A0-213C-A6F3B34F0511}"/>
-              </a:ext>
-            </a:extLst>
-          </p:cNvPr>
+          <p:cNvPr id="4" name="Рисунок 3"/>
           <p:cNvPicPr>
             <a:picLocks noChangeAspect="1"/>
           </p:cNvPicPr>
@@ -4545,8 +7084,201 @@
         </p:blipFill>
         <p:spPr>
           <a:xfrm>
-            <a:off x="0" y="1690688"/>
-            <a:ext cx="9421091" cy="4451307"/>
+            <a:off x="65315" y="1418500"/>
+            <a:ext cx="6355080" cy="3582492"/>
+          </a:xfrm>
+          <a:prstGeom prst="rect">
+            <a:avLst/>
+          </a:prstGeom>
+        </p:spPr>
+      </p:pic>
+      <p:pic>
+        <p:nvPicPr>
+          <p:cNvPr id="5" name="Рисунок 4"/>
+          <p:cNvPicPr>
+            <a:picLocks noChangeAspect="1"/>
+          </p:cNvPicPr>
+          <p:nvPr/>
+        </p:nvPicPr>
+        <p:blipFill rotWithShape="1">
+          <a:blip r:embed="rId3"/>
+          <a:srcRect b="69832"/>
+          <a:stretch/>
+        </p:blipFill>
+        <p:spPr>
+          <a:xfrm>
+            <a:off x="65315" y="5085899"/>
+            <a:ext cx="6354537" cy="1210397"/>
+          </a:xfrm>
+          <a:prstGeom prst="rect">
+            <a:avLst/>
+          </a:prstGeom>
+        </p:spPr>
+      </p:pic>
+      <p:pic>
+        <p:nvPicPr>
+          <p:cNvPr id="6" name="Рисунок 5"/>
+          <p:cNvPicPr>
+            <a:picLocks noChangeAspect="1"/>
+          </p:cNvPicPr>
+          <p:nvPr/>
+        </p:nvPicPr>
+        <p:blipFill>
+          <a:blip r:embed="rId4"/>
+          <a:stretch>
+            <a:fillRect/>
+          </a:stretch>
+        </p:blipFill>
+        <p:spPr>
+          <a:xfrm>
+            <a:off x="6466114" y="78377"/>
+            <a:ext cx="5725886" cy="3410195"/>
+          </a:xfrm>
+          <a:prstGeom prst="rect">
+            <a:avLst/>
+          </a:prstGeom>
+        </p:spPr>
+      </p:pic>
+      <p:sp>
+        <p:nvSpPr>
+          <p:cNvPr id="7" name="Заголовок 1"/>
+          <p:cNvSpPr txBox="1">
+            <a:spLocks/>
+          </p:cNvSpPr>
+          <p:nvPr/>
+        </p:nvSpPr>
+        <p:spPr>
+          <a:xfrm>
+            <a:off x="6607629" y="3355706"/>
+            <a:ext cx="2262051" cy="1325563"/>
+          </a:xfrm>
+          <a:prstGeom prst="rect">
+            <a:avLst/>
+          </a:prstGeom>
+        </p:spPr>
+        <p:txBody>
+          <a:bodyPr vert="horz" lIns="91440" tIns="45720" rIns="91440" bIns="45720" rtlCol="0" anchor="ctr">
+            <a:normAutofit/>
+          </a:bodyPr>
+          <a:lstStyle>
+            <a:lvl1pPr algn="l" defTabSz="914400" rtl="0" eaLnBrk="1" latinLnBrk="0" hangingPunct="1">
+              <a:lnSpc>
+                <a:spcPct val="90000"/>
+              </a:lnSpc>
+              <a:spcBef>
+                <a:spcPct val="0"/>
+              </a:spcBef>
+              <a:buNone/>
+              <a:defRPr sz="4400" kern="1200">
+                <a:solidFill>
+                  <a:schemeClr val="tx1"/>
+                </a:solidFill>
+                <a:latin typeface="+mj-lt"/>
+                <a:ea typeface="+mj-ea"/>
+                <a:cs typeface="+mj-cs"/>
+              </a:defRPr>
+            </a:lvl1pPr>
+          </a:lstStyle>
+          <a:p>
+            <a:r>
+              <a:rPr lang="ru-RU" sz="3600" dirty="0" smtClean="0"/>
+              <a:t>Часть 1</a:t>
+            </a:r>
+            <a:endParaRPr lang="ru-RU" sz="3600" dirty="0"/>
+          </a:p>
+        </p:txBody>
+      </p:sp>
+    </p:spTree>
+    <p:extLst>
+      <p:ext uri="{BB962C8B-B14F-4D97-AF65-F5344CB8AC3E}">
+        <p14:creationId xmlns:p14="http://schemas.microsoft.com/office/powerpoint/2010/main" val="917997939"/>
+      </p:ext>
+    </p:extLst>
+  </p:cSld>
+  <p:clrMapOvr>
+    <a:masterClrMapping/>
+  </p:clrMapOvr>
+</p:sld>
+</file>
+
+<file path=ppt/slides/slide40.xml><?xml version="1.0" encoding="utf-8"?>
+<p:sld xmlns:a="http://schemas.openxmlformats.org/drawingml/2006/main" xmlns:r="http://schemas.openxmlformats.org/officeDocument/2006/relationships" xmlns:p="http://schemas.openxmlformats.org/presentationml/2006/main">
+  <p:cSld>
+    <p:spTree>
+      <p:nvGrpSpPr>
+        <p:cNvPr id="1" name=""/>
+        <p:cNvGrpSpPr/>
+        <p:nvPr/>
+      </p:nvGrpSpPr>
+      <p:grpSpPr>
+        <a:xfrm>
+          <a:off x="0" y="0"/>
+          <a:ext cx="0" cy="0"/>
+          <a:chOff x="0" y="0"/>
+          <a:chExt cx="0" cy="0"/>
+        </a:xfrm>
+      </p:grpSpPr>
+      <p:sp>
+        <p:nvSpPr>
+          <p:cNvPr id="2" name="Title 1">
+            <a:extLst>
+              <a:ext uri="{FF2B5EF4-FFF2-40B4-BE49-F238E27FC236}">
+                <a16:creationId xmlns:a16="http://schemas.microsoft.com/office/drawing/2014/main" xmlns="" id="{E462399C-D3D2-1C76-C99D-DE975D803ECC}"/>
+              </a:ext>
+            </a:extLst>
+          </p:cNvPr>
+          <p:cNvSpPr>
+            <a:spLocks noGrp="1"/>
+          </p:cNvSpPr>
+          <p:nvPr>
+            <p:ph type="title"/>
+          </p:nvPr>
+        </p:nvSpPr>
+        <p:spPr/>
+        <p:txBody>
+          <a:bodyPr/>
+          <a:lstStyle/>
+          <a:p>
+            <a:r>
+              <a:rPr lang="ru-RU" dirty="0"/>
+              <a:t>Общие графики</a:t>
+            </a:r>
+            <a:r>
+              <a:rPr lang="en-US" dirty="0"/>
+              <a:t> </a:t>
+            </a:r>
+            <a:r>
+              <a:rPr lang="ru-RU" dirty="0"/>
+              <a:t>времени</a:t>
+            </a:r>
+            <a:endParaRPr lang="en-US" dirty="0"/>
+          </a:p>
+        </p:txBody>
+      </p:sp>
+      <p:pic>
+        <p:nvPicPr>
+          <p:cNvPr id="4" name="Picture 3">
+            <a:extLst>
+              <a:ext uri="{FF2B5EF4-FFF2-40B4-BE49-F238E27FC236}">
+                <a16:creationId xmlns:a16="http://schemas.microsoft.com/office/drawing/2014/main" xmlns="" id="{248234BF-D57F-D595-6233-0320370AF913}"/>
+              </a:ext>
+            </a:extLst>
+          </p:cNvPr>
+          <p:cNvPicPr>
+            <a:picLocks noChangeAspect="1"/>
+          </p:cNvPicPr>
+          <p:nvPr/>
+        </p:nvPicPr>
+        <p:blipFill>
+          <a:blip r:embed="rId2"/>
+          <a:stretch>
+            <a:fillRect/>
+          </a:stretch>
+        </p:blipFill>
+        <p:spPr>
+          <a:xfrm>
+            <a:off x="1134643" y="1373559"/>
+            <a:ext cx="9922714" cy="5119316"/>
           </a:xfrm>
           <a:prstGeom prst="rect">
             <a:avLst/>
@@ -4556,7 +7288,7 @@
     </p:spTree>
     <p:extLst>
       <p:ext uri="{BB962C8B-B14F-4D97-AF65-F5344CB8AC3E}">
-        <p14:creationId xmlns:p14="http://schemas.microsoft.com/office/powerpoint/2010/main" val="1393508578"/>
+        <p14:creationId xmlns:p14="http://schemas.microsoft.com/office/powerpoint/2010/main" val="801357139"/>
       </p:ext>
     </p:extLst>
   </p:cSld>
@@ -4585,13 +7317,7 @@
       </p:grpSpPr>
       <p:sp>
         <p:nvSpPr>
-          <p:cNvPr id="2" name="Title 1">
-            <a:extLst>
-              <a:ext uri="{FF2B5EF4-FFF2-40B4-BE49-F238E27FC236}">
-                <a16:creationId xmlns:a16="http://schemas.microsoft.com/office/drawing/2014/main" id="{1139B143-2F74-6EFD-29A5-6675EA49E24D}"/>
-              </a:ext>
-            </a:extLst>
-          </p:cNvPr>
+          <p:cNvPr id="2" name="Заголовок 1"/>
           <p:cNvSpPr>
             <a:spLocks noGrp="1"/>
           </p:cNvSpPr>
@@ -4599,32 +7325,28 @@
             <p:ph type="title"/>
           </p:nvPr>
         </p:nvSpPr>
-        <p:spPr/>
-        <p:txBody>
-          <a:bodyPr/>
-          <a:lstStyle/>
-          <a:p>
-            <a:r>
-              <a:rPr lang="en-US" dirty="0"/>
-              <a:t>BASIC, CA-</a:t>
-            </a:r>
-            <a:r>
-              <a:rPr lang="en-US" dirty="0" err="1"/>
-              <a:t>GrQc</a:t>
-            </a:r>
-            <a:endParaRPr lang="en-US" dirty="0"/>
+        <p:spPr>
+          <a:xfrm>
+            <a:off x="437342" y="849085"/>
+            <a:ext cx="3122052" cy="1325563"/>
+          </a:xfrm>
+        </p:spPr>
+        <p:txBody>
+          <a:bodyPr>
+            <a:normAutofit fontScale="90000"/>
+          </a:bodyPr>
+          <a:lstStyle/>
+          <a:p>
+            <a:r>
+              <a:rPr lang="ru-RU" dirty="0"/>
+              <a:t>Анализ структуры сети</a:t>
+            </a:r>
           </a:p>
         </p:txBody>
       </p:sp>
       <p:pic>
         <p:nvPicPr>
-          <p:cNvPr id="4" name="Picture 3">
-            <a:extLst>
-              <a:ext uri="{FF2B5EF4-FFF2-40B4-BE49-F238E27FC236}">
-                <a16:creationId xmlns:a16="http://schemas.microsoft.com/office/drawing/2014/main" id="{B340F94B-8DEA-C82D-F3D8-45BA200B6D61}"/>
-              </a:ext>
-            </a:extLst>
-          </p:cNvPr>
+          <p:cNvPr id="4" name="Рисунок 3"/>
           <p:cNvPicPr>
             <a:picLocks noChangeAspect="1"/>
           </p:cNvPicPr>
@@ -4638,18 +7360,95 @@
         </p:blipFill>
         <p:spPr>
           <a:xfrm>
-            <a:off x="0" y="1755343"/>
-            <a:ext cx="12192000" cy="4509010"/>
+            <a:off x="437342" y="4450325"/>
+            <a:ext cx="7259063" cy="2152950"/>
           </a:xfrm>
           <a:prstGeom prst="rect">
             <a:avLst/>
           </a:prstGeom>
         </p:spPr>
       </p:pic>
+      <p:pic>
+        <p:nvPicPr>
+          <p:cNvPr id="8" name="Рисунок 7"/>
+          <p:cNvPicPr>
+            <a:picLocks noChangeAspect="1"/>
+          </p:cNvPicPr>
+          <p:nvPr/>
+        </p:nvPicPr>
+        <p:blipFill>
+          <a:blip r:embed="rId3"/>
+          <a:stretch>
+            <a:fillRect/>
+          </a:stretch>
+        </p:blipFill>
+        <p:spPr>
+          <a:xfrm>
+            <a:off x="5589544" y="136525"/>
+            <a:ext cx="6516202" cy="4076246"/>
+          </a:xfrm>
+          <a:prstGeom prst="rect">
+            <a:avLst/>
+          </a:prstGeom>
+        </p:spPr>
+      </p:pic>
+      <p:sp>
+        <p:nvSpPr>
+          <p:cNvPr id="9" name="Заголовок 1"/>
+          <p:cNvSpPr txBox="1">
+            <a:spLocks/>
+          </p:cNvSpPr>
+          <p:nvPr/>
+        </p:nvSpPr>
+        <p:spPr>
+          <a:xfrm>
+            <a:off x="437342" y="3124762"/>
+            <a:ext cx="2262051" cy="1325563"/>
+          </a:xfrm>
+          <a:prstGeom prst="rect">
+            <a:avLst/>
+          </a:prstGeom>
+        </p:spPr>
+        <p:txBody>
+          <a:bodyPr vert="horz" lIns="91440" tIns="45720" rIns="91440" bIns="45720" rtlCol="0" anchor="ctr">
+            <a:normAutofit/>
+          </a:bodyPr>
+          <a:lstStyle>
+            <a:lvl1pPr algn="l" defTabSz="914400" rtl="0" eaLnBrk="1" latinLnBrk="0" hangingPunct="1">
+              <a:lnSpc>
+                <a:spcPct val="90000"/>
+              </a:lnSpc>
+              <a:spcBef>
+                <a:spcPct val="0"/>
+              </a:spcBef>
+              <a:buNone/>
+              <a:defRPr sz="4400" kern="1200">
+                <a:solidFill>
+                  <a:schemeClr val="tx1"/>
+                </a:solidFill>
+                <a:latin typeface="+mj-lt"/>
+                <a:ea typeface="+mj-ea"/>
+                <a:cs typeface="+mj-cs"/>
+              </a:defRPr>
+            </a:lvl1pPr>
+          </a:lstStyle>
+          <a:p>
+            <a:r>
+              <a:rPr lang="ru-RU" sz="3600" dirty="0" smtClean="0"/>
+              <a:t>Часть </a:t>
+            </a:r>
+            <a:r>
+              <a:rPr lang="en-US" sz="3600" dirty="0" smtClean="0"/>
+              <a:t>2.1</a:t>
+            </a:r>
+            <a:endParaRPr lang="ru-RU" sz="3600" dirty="0"/>
+          </a:p>
+        </p:txBody>
+      </p:sp>
     </p:spTree>
     <p:extLst>
       <p:ext uri="{BB962C8B-B14F-4D97-AF65-F5344CB8AC3E}">
-        <p14:creationId xmlns:p14="http://schemas.microsoft.com/office/powerpoint/2010/main" val="4055720038"/>
+        <p14:creationId xmlns:p14="http://schemas.microsoft.com/office/powerpoint/2010/main" val="4106301516"/>
       </p:ext>
     </p:extLst>
   </p:cSld>
@@ -4676,48 +7475,9 @@
           <a:chExt cx="0" cy="0"/>
         </a:xfrm>
       </p:grpSpPr>
-      <p:sp>
-        <p:nvSpPr>
-          <p:cNvPr id="2" name="Title 1">
-            <a:extLst>
-              <a:ext uri="{FF2B5EF4-FFF2-40B4-BE49-F238E27FC236}">
-                <a16:creationId xmlns:a16="http://schemas.microsoft.com/office/drawing/2014/main" id="{E43EB5D8-0360-0A5E-71C0-9FD90011435A}"/>
-              </a:ext>
-            </a:extLst>
-          </p:cNvPr>
-          <p:cNvSpPr>
-            <a:spLocks noGrp="1"/>
-          </p:cNvSpPr>
-          <p:nvPr>
-            <p:ph type="title"/>
-          </p:nvPr>
-        </p:nvSpPr>
-        <p:spPr/>
-        <p:txBody>
-          <a:bodyPr/>
-          <a:lstStyle/>
-          <a:p>
-            <a:r>
-              <a:rPr lang="en-US" dirty="0"/>
-              <a:t>SC, CA-</a:t>
-            </a:r>
-            <a:r>
-              <a:rPr lang="en-US" dirty="0" err="1"/>
-              <a:t>GrQc</a:t>
-            </a:r>
-            <a:endParaRPr lang="en-US" dirty="0"/>
-          </a:p>
-        </p:txBody>
-      </p:sp>
       <p:pic>
         <p:nvPicPr>
-          <p:cNvPr id="4" name="Picture 3">
-            <a:extLst>
-              <a:ext uri="{FF2B5EF4-FFF2-40B4-BE49-F238E27FC236}">
-                <a16:creationId xmlns:a16="http://schemas.microsoft.com/office/drawing/2014/main" id="{237ED81E-E8D0-A643-781C-7A09CAEFBAE2}"/>
-              </a:ext>
-            </a:extLst>
-          </p:cNvPr>
+          <p:cNvPr id="4" name="Рисунок 3"/>
           <p:cNvPicPr>
             <a:picLocks noChangeAspect="1"/>
           </p:cNvPicPr>
@@ -4731,18 +7491,217 @@
         </p:blipFill>
         <p:spPr>
           <a:xfrm>
-            <a:off x="0" y="1669667"/>
-            <a:ext cx="9975273" cy="4823208"/>
+            <a:off x="691289" y="3193645"/>
+            <a:ext cx="11031489" cy="3200847"/>
           </a:xfrm>
           <a:prstGeom prst="rect">
             <a:avLst/>
           </a:prstGeom>
         </p:spPr>
       </p:pic>
+      <p:sp>
+        <p:nvSpPr>
+          <p:cNvPr id="5" name="Заголовок 1"/>
+          <p:cNvSpPr txBox="1">
+            <a:spLocks/>
+          </p:cNvSpPr>
+          <p:nvPr/>
+        </p:nvSpPr>
+        <p:spPr>
+          <a:xfrm>
+            <a:off x="767442" y="1594769"/>
+            <a:ext cx="4187689" cy="1325563"/>
+          </a:xfrm>
+          <a:prstGeom prst="rect">
+            <a:avLst/>
+          </a:prstGeom>
+        </p:spPr>
+        <p:txBody>
+          <a:bodyPr vert="horz" lIns="91440" tIns="45720" rIns="91440" bIns="45720" rtlCol="0" anchor="ctr">
+            <a:noAutofit/>
+          </a:bodyPr>
+          <a:lstStyle>
+            <a:lvl1pPr algn="l" defTabSz="914400" rtl="0" eaLnBrk="1" latinLnBrk="0" hangingPunct="1">
+              <a:lnSpc>
+                <a:spcPct val="90000"/>
+              </a:lnSpc>
+              <a:spcBef>
+                <a:spcPct val="0"/>
+              </a:spcBef>
+              <a:buNone/>
+              <a:defRPr sz="4400" kern="1200">
+                <a:solidFill>
+                  <a:schemeClr val="tx1"/>
+                </a:solidFill>
+                <a:latin typeface="+mj-lt"/>
+                <a:ea typeface="+mj-ea"/>
+                <a:cs typeface="+mj-cs"/>
+              </a:defRPr>
+            </a:lvl1pPr>
+          </a:lstStyle>
+          <a:p>
+            <a:r>
+              <a:rPr lang="ru-RU" sz="3200" dirty="0" err="1" smtClean="0"/>
+              <a:t>Процентиль</a:t>
+            </a:r>
+            <a:r>
+              <a:rPr lang="ru-RU" sz="3200" dirty="0" smtClean="0"/>
+              <a:t> расстояния </a:t>
+            </a:r>
+            <a:r>
+              <a:rPr lang="ru-RU" sz="3200" dirty="0"/>
+              <a:t>между вершинами </a:t>
+            </a:r>
+            <a:r>
+              <a:rPr lang="ru-RU" sz="3200" dirty="0" smtClean="0"/>
+              <a:t>графа</a:t>
+            </a:r>
+            <a:r>
+              <a:rPr lang="en-US" sz="3200" dirty="0" smtClean="0"/>
+              <a:t>:</a:t>
+            </a:r>
+            <a:endParaRPr lang="ru-RU" sz="3200" dirty="0"/>
+          </a:p>
+        </p:txBody>
+      </p:sp>
+      <p:pic>
+        <p:nvPicPr>
+          <p:cNvPr id="6" name="Рисунок 5"/>
+          <p:cNvPicPr>
+            <a:picLocks noChangeAspect="1"/>
+          </p:cNvPicPr>
+          <p:nvPr/>
+        </p:nvPicPr>
+        <p:blipFill>
+          <a:blip r:embed="rId3"/>
+          <a:stretch>
+            <a:fillRect/>
+          </a:stretch>
+        </p:blipFill>
+        <p:spPr>
+          <a:xfrm>
+            <a:off x="5752201" y="0"/>
+            <a:ext cx="6439799" cy="1724266"/>
+          </a:xfrm>
+          <a:prstGeom prst="rect">
+            <a:avLst/>
+          </a:prstGeom>
+        </p:spPr>
+      </p:pic>
+      <p:pic>
+        <p:nvPicPr>
+          <p:cNvPr id="7" name="Рисунок 6"/>
+          <p:cNvPicPr>
+            <a:picLocks noChangeAspect="1"/>
+          </p:cNvPicPr>
+          <p:nvPr/>
+        </p:nvPicPr>
+        <p:blipFill>
+          <a:blip r:embed="rId4"/>
+          <a:stretch>
+            <a:fillRect/>
+          </a:stretch>
+        </p:blipFill>
+        <p:spPr>
+          <a:xfrm>
+            <a:off x="4819487" y="2182439"/>
+            <a:ext cx="7372513" cy="763857"/>
+          </a:xfrm>
+          <a:prstGeom prst="rect">
+            <a:avLst/>
+          </a:prstGeom>
+        </p:spPr>
+      </p:pic>
+      <p:sp>
+        <p:nvSpPr>
+          <p:cNvPr id="8" name="Заголовок 1"/>
+          <p:cNvSpPr>
+            <a:spLocks noGrp="1"/>
+          </p:cNvSpPr>
+          <p:nvPr>
+            <p:ph type="title"/>
+          </p:nvPr>
+        </p:nvSpPr>
+        <p:spPr>
+          <a:xfrm>
+            <a:off x="0" y="70420"/>
+            <a:ext cx="5722575" cy="1325563"/>
+          </a:xfrm>
+        </p:spPr>
+        <p:txBody>
+          <a:bodyPr>
+            <a:normAutofit/>
+          </a:bodyPr>
+          <a:lstStyle/>
+          <a:p>
+            <a:r>
+              <a:rPr lang="ru-RU" dirty="0"/>
+              <a:t>Анализ структуры сети</a:t>
+            </a:r>
+          </a:p>
+        </p:txBody>
+      </p:sp>
+      <p:sp>
+        <p:nvSpPr>
+          <p:cNvPr id="9" name="Заголовок 1"/>
+          <p:cNvSpPr txBox="1">
+            <a:spLocks/>
+          </p:cNvSpPr>
+          <p:nvPr/>
+        </p:nvSpPr>
+        <p:spPr>
+          <a:xfrm>
+            <a:off x="225100" y="1000521"/>
+            <a:ext cx="1793377" cy="684541"/>
+          </a:xfrm>
+          <a:prstGeom prst="rect">
+            <a:avLst/>
+          </a:prstGeom>
+        </p:spPr>
+        <p:txBody>
+          <a:bodyPr vert="horz" lIns="91440" tIns="45720" rIns="91440" bIns="45720" rtlCol="0" anchor="ctr">
+            <a:normAutofit fontScale="92500"/>
+          </a:bodyPr>
+          <a:lstStyle>
+            <a:lvl1pPr algn="l" defTabSz="914400" rtl="0" eaLnBrk="1" latinLnBrk="0" hangingPunct="1">
+              <a:lnSpc>
+                <a:spcPct val="90000"/>
+              </a:lnSpc>
+              <a:spcBef>
+                <a:spcPct val="0"/>
+              </a:spcBef>
+              <a:buNone/>
+              <a:defRPr sz="4400" kern="1200">
+                <a:solidFill>
+                  <a:schemeClr val="tx1"/>
+                </a:solidFill>
+                <a:latin typeface="+mj-lt"/>
+                <a:ea typeface="+mj-ea"/>
+                <a:cs typeface="+mj-cs"/>
+              </a:defRPr>
+            </a:lvl1pPr>
+          </a:lstStyle>
+          <a:p>
+            <a:r>
+              <a:rPr lang="ru-RU" sz="3600" dirty="0" smtClean="0"/>
+              <a:t>Часть </a:t>
+            </a:r>
+            <a:r>
+              <a:rPr lang="en-US" sz="3600" dirty="0" smtClean="0"/>
+              <a:t>2.</a:t>
+            </a:r>
+            <a:r>
+              <a:rPr lang="ru-RU" sz="3600" dirty="0" smtClean="0"/>
+              <a:t>2</a:t>
+            </a:r>
+            <a:endParaRPr lang="ru-RU" sz="3600" dirty="0"/>
+          </a:p>
+        </p:txBody>
+      </p:sp>
     </p:spTree>
     <p:extLst>
       <p:ext uri="{BB962C8B-B14F-4D97-AF65-F5344CB8AC3E}">
-        <p14:creationId xmlns:p14="http://schemas.microsoft.com/office/powerpoint/2010/main" val="2554961572"/>
+        <p14:creationId xmlns:p14="http://schemas.microsoft.com/office/powerpoint/2010/main" val="1466715027"/>
       </p:ext>
     </p:extLst>
   </p:cSld>
@@ -4771,41 +7730,113 @@
       </p:grpSpPr>
       <p:sp>
         <p:nvSpPr>
-          <p:cNvPr id="2" name="Title 1">
-            <a:extLst>
-              <a:ext uri="{FF2B5EF4-FFF2-40B4-BE49-F238E27FC236}">
-                <a16:creationId xmlns:a16="http://schemas.microsoft.com/office/drawing/2014/main" id="{D61DC79B-37ED-1419-8B98-5114D0375FD3}"/>
-              </a:ext>
-            </a:extLst>
-          </p:cNvPr>
-          <p:cNvSpPr>
-            <a:spLocks noGrp="1"/>
-          </p:cNvSpPr>
-          <p:nvPr>
-            <p:ph type="title"/>
-          </p:nvPr>
-        </p:nvSpPr>
-        <p:spPr/>
-        <p:txBody>
-          <a:bodyPr/>
-          <a:lstStyle/>
-          <a:p>
-            <a:r>
-              <a:rPr lang="en-US" dirty="0"/>
-              <a:t>BASIC, Wiki-Vote</a:t>
-            </a:r>
+          <p:cNvPr id="4" name="Заголовок 1"/>
+          <p:cNvSpPr txBox="1">
+            <a:spLocks/>
+          </p:cNvSpPr>
+          <p:nvPr/>
+        </p:nvSpPr>
+        <p:spPr>
+          <a:xfrm>
+            <a:off x="6107187" y="170526"/>
+            <a:ext cx="5722575" cy="1325563"/>
+          </a:xfrm>
+          <a:prstGeom prst="rect">
+            <a:avLst/>
+          </a:prstGeom>
+        </p:spPr>
+        <p:txBody>
+          <a:bodyPr vert="horz" lIns="91440" tIns="45720" rIns="91440" bIns="45720" rtlCol="0" anchor="ctr">
+            <a:normAutofit/>
+          </a:bodyPr>
+          <a:lstStyle>
+            <a:lvl1pPr algn="l" defTabSz="914400" rtl="0" eaLnBrk="1" latinLnBrk="0" hangingPunct="1">
+              <a:lnSpc>
+                <a:spcPct val="90000"/>
+              </a:lnSpc>
+              <a:spcBef>
+                <a:spcPct val="0"/>
+              </a:spcBef>
+              <a:buNone/>
+              <a:defRPr sz="4400" kern="1200">
+                <a:solidFill>
+                  <a:schemeClr val="tx1"/>
+                </a:solidFill>
+                <a:latin typeface="+mj-lt"/>
+                <a:ea typeface="+mj-ea"/>
+                <a:cs typeface="+mj-cs"/>
+              </a:defRPr>
+            </a:lvl1pPr>
+          </a:lstStyle>
+          <a:p>
+            <a:r>
+              <a:rPr lang="ru-RU" dirty="0" smtClean="0"/>
+              <a:t>Анализ структуры сети</a:t>
+            </a:r>
+            <a:endParaRPr lang="ru-RU" dirty="0"/>
+          </a:p>
+        </p:txBody>
+      </p:sp>
+      <p:sp>
+        <p:nvSpPr>
+          <p:cNvPr id="5" name="Заголовок 1"/>
+          <p:cNvSpPr txBox="1">
+            <a:spLocks/>
+          </p:cNvSpPr>
+          <p:nvPr/>
+        </p:nvSpPr>
+        <p:spPr>
+          <a:xfrm>
+            <a:off x="7837448" y="1256773"/>
+            <a:ext cx="2262051" cy="1325563"/>
+          </a:xfrm>
+          <a:prstGeom prst="rect">
+            <a:avLst/>
+          </a:prstGeom>
+        </p:spPr>
+        <p:txBody>
+          <a:bodyPr vert="horz" lIns="91440" tIns="45720" rIns="91440" bIns="45720" rtlCol="0" anchor="ctr">
+            <a:normAutofit/>
+          </a:bodyPr>
+          <a:lstStyle>
+            <a:lvl1pPr algn="l" defTabSz="914400" rtl="0" eaLnBrk="1" latinLnBrk="0" hangingPunct="1">
+              <a:lnSpc>
+                <a:spcPct val="90000"/>
+              </a:lnSpc>
+              <a:spcBef>
+                <a:spcPct val="0"/>
+              </a:spcBef>
+              <a:buNone/>
+              <a:defRPr sz="4400" kern="1200">
+                <a:solidFill>
+                  <a:schemeClr val="tx1"/>
+                </a:solidFill>
+                <a:latin typeface="+mj-lt"/>
+                <a:ea typeface="+mj-ea"/>
+                <a:cs typeface="+mj-cs"/>
+              </a:defRPr>
+            </a:lvl1pPr>
+          </a:lstStyle>
+          <a:p>
+            <a:r>
+              <a:rPr lang="ru-RU" sz="3600" dirty="0" smtClean="0"/>
+              <a:t>Часть </a:t>
+            </a:r>
+            <a:r>
+              <a:rPr lang="en-US" sz="3600" dirty="0" smtClean="0"/>
+              <a:t>2.</a:t>
+            </a:r>
+            <a:r>
+              <a:rPr lang="ru-RU" sz="3600" dirty="0"/>
+              <a:t>3</a:t>
+            </a:r>
+            <a:endParaRPr lang="ru-RU" sz="3600" dirty="0"/>
           </a:p>
         </p:txBody>
       </p:sp>
       <p:pic>
         <p:nvPicPr>
-          <p:cNvPr id="4" name="Picture 3">
-            <a:extLst>
-              <a:ext uri="{FF2B5EF4-FFF2-40B4-BE49-F238E27FC236}">
-                <a16:creationId xmlns:a16="http://schemas.microsoft.com/office/drawing/2014/main" id="{D67FDD20-627C-4586-A050-1A8A44F1C309}"/>
-              </a:ext>
-            </a:extLst>
-          </p:cNvPr>
+          <p:cNvPr id="6" name="Рисунок 5"/>
           <p:cNvPicPr>
             <a:picLocks noChangeAspect="1"/>
           </p:cNvPicPr>
@@ -4819,18 +7850,149 @@
         </p:blipFill>
         <p:spPr>
           <a:xfrm>
-            <a:off x="0" y="1690688"/>
-            <a:ext cx="12192000" cy="4376285"/>
+            <a:off x="1" y="0"/>
+            <a:ext cx="5277394" cy="3040332"/>
           </a:xfrm>
           <a:prstGeom prst="rect">
             <a:avLst/>
           </a:prstGeom>
         </p:spPr>
       </p:pic>
+      <p:pic>
+        <p:nvPicPr>
+          <p:cNvPr id="7" name="Рисунок 6"/>
+          <p:cNvPicPr>
+            <a:picLocks noChangeAspect="1"/>
+          </p:cNvPicPr>
+          <p:nvPr/>
+        </p:nvPicPr>
+        <p:blipFill>
+          <a:blip r:embed="rId3"/>
+          <a:stretch>
+            <a:fillRect/>
+          </a:stretch>
+        </p:blipFill>
+        <p:spPr>
+          <a:xfrm>
+            <a:off x="4406849" y="2992178"/>
+            <a:ext cx="7785151" cy="3865822"/>
+          </a:xfrm>
+          <a:prstGeom prst="rect">
+            <a:avLst/>
+          </a:prstGeom>
+        </p:spPr>
+      </p:pic>
+      <p:sp>
+        <p:nvSpPr>
+          <p:cNvPr id="8" name="Прямоугольник 7"/>
+          <p:cNvSpPr/>
+          <p:nvPr/>
+        </p:nvSpPr>
+        <p:spPr>
+          <a:xfrm>
+            <a:off x="93618" y="3530603"/>
+            <a:ext cx="4219615" cy="2308324"/>
+          </a:xfrm>
+          <a:prstGeom prst="rect">
+            <a:avLst/>
+          </a:prstGeom>
+        </p:spPr>
+        <p:txBody>
+          <a:bodyPr wrap="square">
+            <a:spAutoFit/>
+          </a:bodyPr>
+          <a:lstStyle/>
+          <a:p>
+            <a:r>
+              <a:rPr lang="en-US" dirty="0" err="1" smtClean="0"/>
+              <a:t>S</a:t>
+            </a:r>
+            <a:r>
+              <a:rPr lang="ru-RU" dirty="0" err="1" smtClean="0"/>
+              <a:t>nowball</a:t>
+            </a:r>
+            <a:r>
+              <a:rPr lang="ru-RU" dirty="0" smtClean="0"/>
+              <a:t> </a:t>
+            </a:r>
+            <a:r>
+              <a:rPr lang="en-US" dirty="0" err="1"/>
+              <a:t>S</a:t>
+            </a:r>
+            <a:r>
+              <a:rPr lang="ru-RU" dirty="0" err="1" smtClean="0"/>
+              <a:t>ample</a:t>
+            </a:r>
+            <a:r>
+              <a:rPr lang="ru-RU" dirty="0" smtClean="0"/>
+              <a:t>: </a:t>
+            </a:r>
+          </a:p>
+          <a:p>
+            <a:pPr marL="285750" indent="-285750">
+              <a:buFont typeface="Arial" panose="020B0604020202020204" pitchFamily="34" charset="0"/>
+              <a:buChar char="•"/>
+            </a:pPr>
+            <a:r>
+              <a:rPr lang="ru-RU" dirty="0" smtClean="0"/>
+              <a:t>выбирается 2 смежные вершины</a:t>
+            </a:r>
+          </a:p>
+          <a:p>
+            <a:pPr marL="285750" indent="-285750">
+              <a:buFont typeface="Arial" panose="020B0604020202020204" pitchFamily="34" charset="0"/>
+              <a:buChar char="•"/>
+            </a:pPr>
+            <a:r>
+              <a:rPr lang="ru-RU" dirty="0" smtClean="0"/>
+              <a:t>затем </a:t>
+            </a:r>
+            <a:r>
+              <a:rPr lang="ru-RU" dirty="0"/>
+              <a:t>в граф добавляются все их </a:t>
+            </a:r>
+            <a:r>
+              <a:rPr lang="ru-RU" dirty="0" smtClean="0"/>
+              <a:t>соседи</a:t>
+            </a:r>
+          </a:p>
+          <a:p>
+            <a:pPr marL="285750" indent="-285750">
+              <a:buFont typeface="Arial" panose="020B0604020202020204" pitchFamily="34" charset="0"/>
+              <a:buChar char="•"/>
+            </a:pPr>
+            <a:r>
+              <a:rPr lang="ru-RU" dirty="0" smtClean="0"/>
+              <a:t>затем </a:t>
+            </a:r>
+            <a:r>
+              <a:rPr lang="ru-RU" dirty="0"/>
+              <a:t>соседи соседей и т.д</a:t>
+            </a:r>
+            <a:r>
+              <a:rPr lang="ru-RU" dirty="0" smtClean="0"/>
+              <a:t>.</a:t>
+            </a:r>
+          </a:p>
+          <a:p>
+            <a:pPr marL="285750" indent="-285750">
+              <a:buFont typeface="Arial" panose="020B0604020202020204" pitchFamily="34" charset="0"/>
+              <a:buChar char="•"/>
+            </a:pPr>
+            <a:endParaRPr lang="ru-RU" dirty="0"/>
+          </a:p>
+          <a:p>
+            <a:r>
+              <a:rPr lang="ru-RU" dirty="0" smtClean="0"/>
+              <a:t>В нашем случае остановка происходит на 500 значении</a:t>
+            </a:r>
+          </a:p>
+        </p:txBody>
+      </p:sp>
     </p:spTree>
     <p:extLst>
       <p:ext uri="{BB962C8B-B14F-4D97-AF65-F5344CB8AC3E}">
-        <p14:creationId xmlns:p14="http://schemas.microsoft.com/office/powerpoint/2010/main" val="2095812913"/>
+        <p14:creationId xmlns:p14="http://schemas.microsoft.com/office/powerpoint/2010/main" val="1643398556"/>
       </p:ext>
     </p:extLst>
   </p:cSld>
@@ -4859,13 +8021,7 @@
       </p:grpSpPr>
       <p:sp>
         <p:nvSpPr>
-          <p:cNvPr id="2" name="Title 1">
-            <a:extLst>
-              <a:ext uri="{FF2B5EF4-FFF2-40B4-BE49-F238E27FC236}">
-                <a16:creationId xmlns:a16="http://schemas.microsoft.com/office/drawing/2014/main" id="{B2933352-6A57-F911-5CF7-91270261AF5A}"/>
-              </a:ext>
-            </a:extLst>
-          </p:cNvPr>
+          <p:cNvPr id="2" name="Заголовок 1"/>
           <p:cNvSpPr>
             <a:spLocks noGrp="1"/>
           </p:cNvSpPr>
@@ -4873,27 +8029,32 @@
             <p:ph type="title"/>
           </p:nvPr>
         </p:nvSpPr>
-        <p:spPr/>
-        <p:txBody>
-          <a:bodyPr/>
-          <a:lstStyle/>
-          <a:p>
-            <a:r>
-              <a:rPr lang="en-US" dirty="0"/>
-              <a:t>SC, Wiki-Vote</a:t>
+        <p:spPr>
+          <a:xfrm>
+            <a:off x="680739" y="613320"/>
+            <a:ext cx="5588726" cy="1325563"/>
+          </a:xfrm>
+        </p:spPr>
+        <p:txBody>
+          <a:bodyPr>
+            <a:normAutofit fontScale="90000"/>
+          </a:bodyPr>
+          <a:lstStyle/>
+          <a:p>
+            <a:r>
+              <a:rPr lang="ru-RU" sz="4000" dirty="0" smtClean="0"/>
+              <a:t>Средний </a:t>
+            </a:r>
+            <a:r>
+              <a:rPr lang="ru-RU" sz="4000" dirty="0"/>
+              <a:t>и глобальный кластерные коэффициенты</a:t>
             </a:r>
           </a:p>
         </p:txBody>
       </p:sp>
       <p:pic>
         <p:nvPicPr>
-          <p:cNvPr id="4" name="Picture 3">
-            <a:extLst>
-              <a:ext uri="{FF2B5EF4-FFF2-40B4-BE49-F238E27FC236}">
-                <a16:creationId xmlns:a16="http://schemas.microsoft.com/office/drawing/2014/main" id="{1438ED8A-506F-9D64-76A3-FF287B97D93E}"/>
-              </a:ext>
-            </a:extLst>
-          </p:cNvPr>
+          <p:cNvPr id="7" name="Рисунок 6"/>
           <p:cNvPicPr>
             <a:picLocks noChangeAspect="1"/>
           </p:cNvPicPr>
@@ -4907,8 +8068,171 @@
         </p:blipFill>
         <p:spPr>
           <a:xfrm>
-            <a:off x="0" y="1690688"/>
-            <a:ext cx="10335491" cy="4880070"/>
+            <a:off x="447618" y="1828739"/>
+            <a:ext cx="3027484" cy="1618777"/>
+          </a:xfrm>
+          <a:prstGeom prst="rect">
+            <a:avLst/>
+          </a:prstGeom>
+        </p:spPr>
+      </p:pic>
+      <p:sp>
+        <p:nvSpPr>
+          <p:cNvPr id="8" name="Прямоугольник 7"/>
+          <p:cNvSpPr/>
+          <p:nvPr/>
+        </p:nvSpPr>
+        <p:spPr>
+          <a:xfrm>
+            <a:off x="7240470" y="613320"/>
+            <a:ext cx="4167759" cy="923330"/>
+          </a:xfrm>
+          <a:prstGeom prst="rect">
+            <a:avLst/>
+          </a:prstGeom>
+        </p:spPr>
+        <p:txBody>
+          <a:bodyPr wrap="square">
+            <a:spAutoFit/>
+          </a:bodyPr>
+          <a:lstStyle/>
+          <a:p>
+            <a:r>
+              <a:rPr lang="ru-RU" dirty="0"/>
+              <a:t>Локальный кластерный коэффициент (узла) </a:t>
+            </a:r>
+            <a:r>
+              <a:rPr lang="ru-RU" dirty="0" smtClean="0"/>
+              <a:t>— </a:t>
+            </a:r>
+            <a:r>
+              <a:rPr lang="ru-RU" dirty="0"/>
+              <a:t>доля соседей узла, соединенных ребром</a:t>
+            </a:r>
+          </a:p>
+        </p:txBody>
+      </p:sp>
+      <p:pic>
+        <p:nvPicPr>
+          <p:cNvPr id="9" name="Рисунок 8"/>
+          <p:cNvPicPr>
+            <a:picLocks noChangeAspect="1"/>
+          </p:cNvPicPr>
+          <p:nvPr/>
+        </p:nvPicPr>
+        <p:blipFill>
+          <a:blip r:embed="rId3"/>
+          <a:stretch>
+            <a:fillRect/>
+          </a:stretch>
+        </p:blipFill>
+        <p:spPr>
+          <a:xfrm>
+            <a:off x="7240470" y="1590625"/>
+            <a:ext cx="2829320" cy="914528"/>
+          </a:xfrm>
+          <a:prstGeom prst="rect">
+            <a:avLst/>
+          </a:prstGeom>
+        </p:spPr>
+      </p:pic>
+      <p:sp>
+        <p:nvSpPr>
+          <p:cNvPr id="10" name="Прямоугольник 9"/>
+          <p:cNvSpPr/>
+          <p:nvPr/>
+        </p:nvSpPr>
+        <p:spPr>
+          <a:xfrm>
+            <a:off x="7155774" y="2638128"/>
+            <a:ext cx="4337149" cy="646331"/>
+          </a:xfrm>
+          <a:prstGeom prst="rect">
+            <a:avLst/>
+          </a:prstGeom>
+        </p:spPr>
+        <p:txBody>
+          <a:bodyPr wrap="none">
+            <a:spAutoFit/>
+          </a:bodyPr>
+          <a:lstStyle/>
+          <a:p>
+            <a:r>
+              <a:rPr lang="en-US" dirty="0" smtClean="0"/>
+              <a:t>k_</a:t>
+            </a:r>
+            <a:r>
+              <a:rPr lang="ru-RU" dirty="0" smtClean="0"/>
+              <a:t>i </a:t>
+            </a:r>
+            <a:r>
+              <a:rPr lang="ru-RU" dirty="0"/>
+              <a:t>— степень </a:t>
+            </a:r>
+            <a:r>
+              <a:rPr lang="ru-RU" dirty="0" smtClean="0"/>
+              <a:t>узла</a:t>
+            </a:r>
+            <a:endParaRPr lang="en-US" dirty="0" smtClean="0"/>
+          </a:p>
+          <a:p>
+            <a:r>
+              <a:rPr lang="ru-RU" dirty="0" err="1" smtClean="0"/>
+              <a:t>L_i</a:t>
+            </a:r>
+            <a:r>
+              <a:rPr lang="ru-RU" dirty="0" smtClean="0"/>
+              <a:t> </a:t>
+            </a:r>
+            <a:r>
+              <a:rPr lang="ru-RU" dirty="0"/>
+              <a:t>— число связей между соседями узла i</a:t>
+            </a:r>
+          </a:p>
+        </p:txBody>
+      </p:sp>
+      <p:pic>
+        <p:nvPicPr>
+          <p:cNvPr id="11" name="Рисунок 10"/>
+          <p:cNvPicPr>
+            <a:picLocks noChangeAspect="1"/>
+          </p:cNvPicPr>
+          <p:nvPr/>
+        </p:nvPicPr>
+        <p:blipFill>
+          <a:blip r:embed="rId4"/>
+          <a:stretch>
+            <a:fillRect/>
+          </a:stretch>
+        </p:blipFill>
+        <p:spPr>
+          <a:xfrm>
+            <a:off x="680739" y="3720572"/>
+            <a:ext cx="7085027" cy="730535"/>
+          </a:xfrm>
+          <a:prstGeom prst="rect">
+            <a:avLst/>
+          </a:prstGeom>
+        </p:spPr>
+      </p:pic>
+      <p:pic>
+        <p:nvPicPr>
+          <p:cNvPr id="13" name="Рисунок 12"/>
+          <p:cNvPicPr>
+            <a:picLocks noChangeAspect="1"/>
+          </p:cNvPicPr>
+          <p:nvPr/>
+        </p:nvPicPr>
+        <p:blipFill>
+          <a:blip r:embed="rId5"/>
+          <a:stretch>
+            <a:fillRect/>
+          </a:stretch>
+        </p:blipFill>
+        <p:spPr>
+          <a:xfrm>
+            <a:off x="680739" y="4938652"/>
+            <a:ext cx="6088109" cy="933102"/>
           </a:xfrm>
           <a:prstGeom prst="rect">
             <a:avLst/>
@@ -4918,7 +8242,7 @@
     </p:spTree>
     <p:extLst>
       <p:ext uri="{BB962C8B-B14F-4D97-AF65-F5344CB8AC3E}">
-        <p14:creationId xmlns:p14="http://schemas.microsoft.com/office/powerpoint/2010/main" val="4109207767"/>
+        <p14:creationId xmlns:p14="http://schemas.microsoft.com/office/powerpoint/2010/main" val="229985109"/>
       </p:ext>
     </p:extLst>
   </p:cSld>
@@ -4947,13 +8271,7 @@
       </p:grpSpPr>
       <p:sp>
         <p:nvSpPr>
-          <p:cNvPr id="2" name="Title 1">
-            <a:extLst>
-              <a:ext uri="{FF2B5EF4-FFF2-40B4-BE49-F238E27FC236}">
-                <a16:creationId xmlns:a16="http://schemas.microsoft.com/office/drawing/2014/main" id="{CB826CEC-7668-7AD9-3E10-324C9172442E}"/>
-              </a:ext>
-            </a:extLst>
-          </p:cNvPr>
+          <p:cNvPr id="2" name="Заголовок 1"/>
           <p:cNvSpPr>
             <a:spLocks noGrp="1"/>
           </p:cNvSpPr>
@@ -4961,27 +8279,26 @@
             <p:ph type="title"/>
           </p:nvPr>
         </p:nvSpPr>
-        <p:spPr/>
+        <p:spPr>
+          <a:xfrm>
+            <a:off x="361406" y="208371"/>
+            <a:ext cx="6365965" cy="1325563"/>
+          </a:xfrm>
+        </p:spPr>
         <p:txBody>
           <a:bodyPr/>
           <a:lstStyle/>
           <a:p>
             <a:r>
-              <a:rPr lang="en-US" dirty="0"/>
-              <a:t>BASIC, graph_8</a:t>
+              <a:rPr lang="ru-RU" dirty="0"/>
+              <a:t>Анализ структуры сети</a:t>
             </a:r>
           </a:p>
         </p:txBody>
       </p:sp>
       <p:pic>
         <p:nvPicPr>
-          <p:cNvPr id="4" name="Picture 3">
-            <a:extLst>
-              <a:ext uri="{FF2B5EF4-FFF2-40B4-BE49-F238E27FC236}">
-                <a16:creationId xmlns:a16="http://schemas.microsoft.com/office/drawing/2014/main" id="{EDEB1195-F2D7-51CD-474F-D3D6FA475A6E}"/>
-              </a:ext>
-            </a:extLst>
-          </p:cNvPr>
+          <p:cNvPr id="4" name="Рисунок 3"/>
           <p:cNvPicPr>
             <a:picLocks noChangeAspect="1"/>
           </p:cNvPicPr>
@@ -4995,8 +8312,104 @@
         </p:blipFill>
         <p:spPr>
           <a:xfrm>
-            <a:off x="0" y="2469624"/>
-            <a:ext cx="12192000" cy="2790627"/>
+            <a:off x="361406" y="1477107"/>
+            <a:ext cx="7525800" cy="3172268"/>
+          </a:xfrm>
+          <a:prstGeom prst="rect">
+            <a:avLst/>
+          </a:prstGeom>
+        </p:spPr>
+      </p:pic>
+      <p:sp>
+        <p:nvSpPr>
+          <p:cNvPr id="5" name="Заголовок 1"/>
+          <p:cNvSpPr txBox="1">
+            <a:spLocks/>
+          </p:cNvSpPr>
+          <p:nvPr/>
+        </p:nvSpPr>
+        <p:spPr>
+          <a:xfrm>
+            <a:off x="6727371" y="185855"/>
+            <a:ext cx="4673529" cy="1325563"/>
+          </a:xfrm>
+          <a:prstGeom prst="rect">
+            <a:avLst/>
+          </a:prstGeom>
+        </p:spPr>
+        <p:txBody>
+          <a:bodyPr vert="horz" lIns="91440" tIns="45720" rIns="91440" bIns="45720" rtlCol="0" anchor="ctr">
+            <a:normAutofit/>
+          </a:bodyPr>
+          <a:lstStyle>
+            <a:lvl1pPr algn="l" defTabSz="914400" rtl="0" eaLnBrk="1" latinLnBrk="0" hangingPunct="1">
+              <a:lnSpc>
+                <a:spcPct val="90000"/>
+              </a:lnSpc>
+              <a:spcBef>
+                <a:spcPct val="0"/>
+              </a:spcBef>
+              <a:buNone/>
+              <a:defRPr sz="4400" kern="1200">
+                <a:solidFill>
+                  <a:schemeClr val="tx1"/>
+                </a:solidFill>
+                <a:latin typeface="+mj-lt"/>
+                <a:ea typeface="+mj-ea"/>
+                <a:cs typeface="+mj-cs"/>
+              </a:defRPr>
+            </a:lvl1pPr>
+          </a:lstStyle>
+          <a:p>
+            <a:r>
+              <a:rPr lang="ru-RU" sz="3600" dirty="0" smtClean="0"/>
+              <a:t>Часть 3</a:t>
+            </a:r>
+          </a:p>
+        </p:txBody>
+      </p:sp>
+      <p:pic>
+        <p:nvPicPr>
+          <p:cNvPr id="6" name="Рисунок 5"/>
+          <p:cNvPicPr>
+            <a:picLocks noChangeAspect="1"/>
+          </p:cNvPicPr>
+          <p:nvPr/>
+        </p:nvPicPr>
+        <p:blipFill>
+          <a:blip r:embed="rId3"/>
+          <a:stretch>
+            <a:fillRect/>
+          </a:stretch>
+        </p:blipFill>
+        <p:spPr>
+          <a:xfrm>
+            <a:off x="3752779" y="5126246"/>
+            <a:ext cx="4134427" cy="1543265"/>
+          </a:xfrm>
+          <a:prstGeom prst="rect">
+            <a:avLst/>
+          </a:prstGeom>
+        </p:spPr>
+      </p:pic>
+      <p:pic>
+        <p:nvPicPr>
+          <p:cNvPr id="7" name="Рисунок 6"/>
+          <p:cNvPicPr>
+            <a:picLocks noChangeAspect="1"/>
+          </p:cNvPicPr>
+          <p:nvPr/>
+        </p:nvPicPr>
+        <p:blipFill>
+          <a:blip r:embed="rId4"/>
+          <a:stretch>
+            <a:fillRect/>
+          </a:stretch>
+        </p:blipFill>
+        <p:spPr>
+          <a:xfrm>
+            <a:off x="7989301" y="1346478"/>
+            <a:ext cx="3967939" cy="4007032"/>
           </a:xfrm>
           <a:prstGeom prst="rect">
             <a:avLst/>
@@ -5006,7 +8419,7 @@
     </p:spTree>
     <p:extLst>
       <p:ext uri="{BB962C8B-B14F-4D97-AF65-F5344CB8AC3E}">
-        <p14:creationId xmlns:p14="http://schemas.microsoft.com/office/powerpoint/2010/main" val="1179465604"/>
+        <p14:creationId xmlns:p14="http://schemas.microsoft.com/office/powerpoint/2010/main" val="3265395048"/>
       </p:ext>
     </p:extLst>
   </p:cSld>
